--- a/deck/Otium_Chigi_Journeys_Pitch_Deck.pptx
+++ b/deck/Otium_Chigi_Journeys_Pitch_Deck.pptx
@@ -19,9 +19,10 @@
     <p:sldId id="267" r:id="rId13"/>
     <p:sldId id="268" r:id="rId14"/>
     <p:sldId id="269" r:id="rId15"/>
+    <p:sldId id="270" r:id="rId16"/>
   </p:sldIdLst>
   <p:notesMasterIdLst>
-    <p:notesMasterId r:id="rId16"/>
+    <p:notesMasterId r:id="rId17"/>
   </p:notesMasterIdLst>
   <p:sldSz cx="12192000" cy="6858000"/>
   <p:notesSz cx="6858000" cy="12192000"/>
@@ -120,7 +121,7 @@
   <p:extLst>
     <p:ext uri="{521415D9-36F7-43E2-AB2F-B90AF26B5E84}">
       <p14:sectionLst xmlns:p14="http://schemas.microsoft.com/office/powerpoint/2010/main">
-        <p14:section name="Pitch" id="{0860d3fa-10f4-9be6-8c33-43e43c376266}">
+        <p14:section name="Pitch" id="{1c43b395-56c8-1f21-f906-a08e5ab84751}">
           <p14:sldIdLst>
             <p14:sldId id="256"/>
             <p14:sldId id="257"/>
@@ -136,6 +137,7 @@
             <p14:sldId id="267"/>
             <p14:sldId id="268"/>
             <p14:sldId id="269"/>
+            <p14:sldId id="270"/>
           </p14:sldIdLst>
         </p14:section>
       </p14:sectionLst>
@@ -542,7 +544,7 @@
           <a:p>
             <a:r>
               <a:rPr lang="en-US" dirty="0"/>
-              <a:t>Audience: pilot families, family offices, channel and rails partners, and early investors. The ask is pilots and partners, not capital: investment only after the day-90 gate.</a:t>
+              <a:t>Audience: regional partners, pilot families, family offices, suppliers and rails partners, and early investors. Ask: pilots and partners per region; capital only after the day-90 gate.</a:t>
             </a:r>
             <a:endParaRPr lang="en-US" dirty="0"/>
           </a:p>
@@ -1006,6 +1008,94 @@
             <a:fld id="{F7021451-1387-4CA6-816F-3879F97B5CBC}" type="slidenum">
               <a:rPr lang="en-US"/>
               <a:t>14</a:t>
+            </a:fld>
+            <a:endParaRPr lang="en-US"/>
+          </a:p>
+        </p:txBody>
+      </p:sp>
+    </p:spTree>
+    <p:extLst>
+      <p:ext uri="{BB962C8B-B14F-4D97-AF65-F5344CB8AC3E}">
+        <p14:creationId xmlns:p14="http://schemas.microsoft.com/office/powerpoint/2010/main" val="1024086991"/>
+      </p:ext>
+    </p:extLst>
+  </p:cSld>
+  <p:clrMapOvr>
+    <a:masterClrMapping/>
+  </p:clrMapOvr>
+</p:notes>
+</file>
+
+<file path=ppt/notesSlides/notesSlide15.xml><?xml version="1.0" encoding="utf-8"?>
+<p:notes xmlns:a="http://schemas.openxmlformats.org/drawingml/2006/main" xmlns:r="http://schemas.openxmlformats.org/officeDocument/2006/relationships" xmlns:p="http://schemas.openxmlformats.org/presentationml/2006/main">
+  <p:cSld>
+    <p:spTree>
+      <p:nvGrpSpPr>
+        <p:cNvPr id="1" name=""/>
+        <p:cNvGrpSpPr/>
+        <p:nvPr/>
+      </p:nvGrpSpPr>
+      <p:grpSpPr>
+        <a:xfrm>
+          <a:off x="0" y="0"/>
+          <a:ext cx="0" cy="0"/>
+          <a:chOff x="0" y="0"/>
+          <a:chExt cx="0" cy="0"/>
+        </a:xfrm>
+      </p:grpSpPr>
+      <p:sp>
+        <p:nvSpPr>
+          <p:cNvPr id="2" name="Slide Image Placeholder 1"/>
+          <p:cNvSpPr>
+            <a:spLocks noGrp="1" noRot="1" noChangeAspect="1"/>
+          </p:cNvSpPr>
+          <p:nvPr>
+            <p:ph type="sldImg"/>
+          </p:nvPr>
+        </p:nvSpPr>
+        <p:spPr/>
+      </p:sp>
+      <p:sp>
+        <p:nvSpPr>
+          <p:cNvPr id="3" name="Notes Placeholder 2"/>
+          <p:cNvSpPr>
+            <a:spLocks noGrp="1"/>
+          </p:cNvSpPr>
+          <p:nvPr>
+            <p:ph type="body" idx="1"/>
+          </p:nvPr>
+        </p:nvSpPr>
+        <p:spPr/>
+        <p:txBody>
+          <a:bodyPr/>
+          <a:lstStyle/>
+          <a:p>
+            <a:r>
+              <a:rPr lang="en-US" dirty="0"/>
+              <a:t/>
+            </a:r>
+            <a:endParaRPr lang="en-US" dirty="0"/>
+          </a:p>
+        </p:txBody>
+      </p:sp>
+      <p:sp>
+        <p:nvSpPr>
+          <p:cNvPr id="4" name="Slide Number Placeholder 3"/>
+          <p:cNvSpPr>
+            <a:spLocks noGrp="1"/>
+          </p:cNvSpPr>
+          <p:nvPr>
+            <p:ph type="sldNum" sz="quarter" idx="10"/>
+          </p:nvPr>
+        </p:nvSpPr>
+        <p:spPr/>
+        <p:txBody>
+          <a:bodyPr/>
+          <a:lstStyle/>
+          <a:p>
+            <a:fld id="{F7021451-1387-4CA6-816F-3879F97B5CBC}" type="slidenum">
+              <a:rPr lang="en-US"/>
+              <a:t>15</a:t>
             </a:fld>
             <a:endParaRPr lang="en-US"/>
           </a:p>
@@ -2441,7 +2531,7 @@
         <p:spPr>
           <a:xfrm>
             <a:off x="5120640" y="1645920"/>
-            <a:ext cx="6492240" cy="1280160"/>
+            <a:ext cx="6492240" cy="1371600"/>
           </a:xfrm>
           <a:prstGeom prst="rect">
             <a:avLst/>
@@ -2457,14 +2547,14 @@
               <a:buNone/>
             </a:pPr>
             <a:r>
-              <a:rPr lang="en-US" sz="3800" b="1" dirty="0">
+              <a:rPr lang="en-US" sz="3600" b="1" dirty="0">
                 <a:solidFill>
                   <a:srgbClr val="FFFFFF"/>
                 </a:solidFill>
               </a:rPr>
-              <a:t>The family mobility office</a:t>
-            </a:r>
-            <a:endParaRPr lang="en-US" sz="3800" dirty="0"/>
+              <a:t>One platform for exclusive journeys</a:t>
+            </a:r>
+            <a:endParaRPr lang="en-US" sz="3600" dirty="0"/>
           </a:p>
         </p:txBody>
       </p:sp>
@@ -2476,8 +2566,8 @@
         </p:nvSpPr>
         <p:spPr>
           <a:xfrm>
-            <a:off x="5120640" y="3108960"/>
-            <a:ext cx="6400800" cy="1188720"/>
+            <a:off x="5120640" y="3154680"/>
+            <a:ext cx="6400800" cy="1097280"/>
           </a:xfrm>
           <a:prstGeom prst="rect">
             <a:avLst/>
@@ -2498,7 +2588,7 @@
                   <a:srgbClr val="B7C6DE"/>
                 </a:solidFill>
               </a:rPr>
-              <a:t>Trusted household staff who travel with the family — employed, insured and lawful in every country they go</a:t>
+              <a:t>Trips, private access, homes — and the staff who travel with the family, lawful in every country</a:t>
             </a:r>
             <a:endParaRPr lang="en-US" sz="1800" dirty="0"/>
           </a:p>
@@ -2536,7 +2626,7 @@
         <p:spPr>
           <a:xfrm>
             <a:off x="5120640" y="4937760"/>
-            <a:ext cx="6400800" cy="365760"/>
+            <a:ext cx="6492240" cy="365760"/>
           </a:xfrm>
           <a:prstGeom prst="rect">
             <a:avLst/>
@@ -2557,7 +2647,7 @@
                   <a:srgbClr val="FFFFFF"/>
                 </a:solidFill>
               </a:rPr>
-              <a:t>Otium Chigi Journeys · Confidential</a:t>
+              <a:t>Otium Chigi Journeys · Rome · Southern Italy · Santa Catarina · Confidential</a:t>
             </a:r>
             <a:endParaRPr lang="en-US" sz="1200" dirty="0"/>
           </a:p>
@@ -2620,7 +2710,7 @@
                   <a:schemeClr val="accent4"/>
                 </a:solidFill>
               </a:rPr>
-              <a:t>COMPETITION</a:t>
+              <a:t>UNIT ECONOMICS</a:t>
             </a:r>
             <a:endParaRPr lang="en-US" sz="1000" dirty="0"/>
           </a:p>
@@ -2658,7 +2748,7 @@
                   <a:schemeClr val="tx2"/>
                 </a:solidFill>
               </a:rPr>
-              <a:t>No one combines an employed rotating pool with cross-border compliance — the corner we take</a:t>
+              <a:t>The wedge must pay first: what families pay for guaranteed, lawful staff cover is the number our 90-day test measures</a:t>
             </a:r>
             <a:endParaRPr lang="en-US" sz="2200" dirty="0"/>
           </a:p>
@@ -2694,7 +2784,7 @@
                   <a:srgbClr val="6B6B6B"/>
                 </a:solidFill>
               </a:rPr>
-              <a:t>Source: raw/fmo_competitors.md (Oct 2026); our positioning assessment.</a:t>
+              <a:t>Source: research/fmo_strategy.md §5.3–5.5 (CALC, £ per position-year, 5 positions per reliever); temp rate from one ad (weak); assistant hours are an assumption. Priced on London rates; Wave-1 rates measured in the 90-day test.</a:t>
             </a:r>
             <a:endParaRPr lang="en-US" sz="850" dirty="0"/>
           </a:p>
@@ -2702,28 +2792,53 @@
       </p:sp>
       <p:sp>
         <p:nvSpPr>
-          <p:cNvPr id="5" name="Shape 3"/>
-          <p:cNvSpPr/>
-          <p:nvPr/>
-        </p:nvSpPr>
-        <p:spPr>
-          <a:xfrm>
-            <a:off x="1097280" y="1783080"/>
-            <a:ext cx="6035040" cy="3749040"/>
-          </a:xfrm>
-          <a:prstGeom prst="rect">
-            <a:avLst/>
-          </a:prstGeom>
-          <a:solidFill>
-            <a:srgbClr val="F6F7FA"/>
-          </a:solidFill>
-          <a:ln w="9525">
-            <a:solidFill>
-              <a:srgbClr val="D0D4DC"/>
-            </a:solidFill>
-            <a:prstDash val="solid"/>
-          </a:ln>
-        </p:spPr>
+          <p:cNvPr id="5" name="Text 3"/>
+          <p:cNvSpPr txBox="1"/>
+          <p:nvPr/>
+        </p:nvSpPr>
+        <p:spPr>
+          <a:xfrm>
+            <a:off x="548640" y="1874520"/>
+            <a:ext cx="2560320" cy="731520"/>
+          </a:xfrm>
+          <a:prstGeom prst="rect">
+            <a:avLst/>
+          </a:prstGeom>
+          <a:noFill/>
+          <a:ln/>
+        </p:spPr>
+        <p:txBody>
+          <a:bodyPr wrap="square" lIns="0" tIns="0" rIns="0" bIns="0" rtlCol="0" anchor="ctr"/>
+          <a:lstStyle/>
+          <a:p>
+            <a:pPr indent="0" marL="0">
+              <a:buNone/>
+            </a:pPr>
+            <a:r>
+              <a:rPr lang="en-US" sz="1200" b="1" dirty="0">
+                <a:solidFill>
+                  <a:srgbClr val="1B2A5C"/>
+                </a:solidFill>
+              </a:rPr>
+              <a:t>What families can save today</a:t>
+            </a:r>
+            <a:endParaRPr lang="en-US" sz="1200" dirty="0"/>
+          </a:p>
+          <a:p>
+            <a:pPr indent="0" marL="0">
+              <a:buNone/>
+            </a:pPr>
+            <a:r>
+              <a:rPr lang="en-US" sz="950" dirty="0">
+                <a:solidFill>
+                  <a:srgbClr val="6B6B6B"/>
+                </a:solidFill>
+              </a:rPr>
+              <a:t>Temps + assistant time</a:t>
+            </a:r>
+            <a:endParaRPr lang="en-US" sz="1200" dirty="0"/>
+          </a:p>
+        </p:txBody>
       </p:sp>
       <p:sp>
         <p:nvSpPr>
@@ -2733,138 +2848,18 @@
         </p:nvSpPr>
         <p:spPr>
           <a:xfrm>
-            <a:off x="4114800" y="1783080"/>
-            <a:ext cx="0" cy="3749040"/>
-          </a:xfrm>
-          <a:prstGeom prst="line">
-            <a:avLst/>
-          </a:prstGeom>
-          <a:noFill/>
-          <a:ln w="9525">
-            <a:solidFill>
-              <a:srgbClr val="D0D4DC"/>
-            </a:solidFill>
-            <a:prstDash val="dash"/>
-          </a:ln>
-        </p:spPr>
-      </p:sp>
-      <p:sp>
-        <p:nvSpPr>
-          <p:cNvPr id="7" name="Shape 5"/>
-          <p:cNvSpPr/>
-          <p:nvPr/>
-        </p:nvSpPr>
-        <p:spPr>
-          <a:xfrm>
-            <a:off x="1097280" y="3657600"/>
-            <a:ext cx="6035040" cy="0"/>
-          </a:xfrm>
-          <a:prstGeom prst="line">
-            <a:avLst/>
-          </a:prstGeom>
-          <a:noFill/>
-          <a:ln w="9525">
-            <a:solidFill>
-              <a:srgbClr val="D0D4DC"/>
-            </a:solidFill>
-            <a:prstDash val="dash"/>
-          </a:ln>
-        </p:spPr>
-      </p:sp>
-      <p:sp>
-        <p:nvSpPr>
-          <p:cNvPr id="8" name="Text 6"/>
-          <p:cNvSpPr txBox="1"/>
-          <p:nvPr/>
-        </p:nvSpPr>
-        <p:spPr>
-          <a:xfrm>
-            <a:off x="1097280" y="5577840"/>
-            <a:ext cx="6035040" cy="274320"/>
-          </a:xfrm>
-          <a:prstGeom prst="rect">
-            <a:avLst/>
-          </a:prstGeom>
-          <a:noFill/>
-          <a:ln/>
-        </p:spPr>
-        <p:txBody>
-          <a:bodyPr wrap="square" lIns="0" tIns="0" rIns="0" bIns="0" rtlCol="0" anchor="ctr"/>
-          <a:lstStyle/>
-          <a:p>
-            <a:pPr algn="ctr" indent="0" marL="0">
-              <a:buNone/>
-            </a:pPr>
-            <a:r>
-              <a:rPr lang="en-US" sz="1050" b="1" dirty="0">
-                <a:solidFill>
-                  <a:srgbClr val="6B6B6B"/>
-                </a:solidFill>
-              </a:rPr>
-              <a:t>Cross-border compliance →</a:t>
-            </a:r>
-            <a:endParaRPr lang="en-US" sz="1050" dirty="0"/>
-          </a:p>
-        </p:txBody>
-      </p:sp>
-      <p:sp>
-        <p:nvSpPr>
-          <p:cNvPr id="9" name="Text 7"/>
-          <p:cNvSpPr txBox="1"/>
-          <p:nvPr/>
-        </p:nvSpPr>
-        <p:spPr>
-          <a:xfrm>
-            <a:off x="274320" y="1490472"/>
-            <a:ext cx="2743200" cy="274320"/>
-          </a:xfrm>
-          <a:prstGeom prst="rect">
-            <a:avLst/>
-          </a:prstGeom>
-          <a:noFill/>
-          <a:ln/>
-        </p:spPr>
-        <p:txBody>
-          <a:bodyPr wrap="square" lIns="0" tIns="0" rIns="0" bIns="0" rtlCol="0" anchor="ctr"/>
-          <a:lstStyle/>
-          <a:p>
-            <a:pPr indent="0" marL="0">
-              <a:buNone/>
-            </a:pPr>
-            <a:r>
-              <a:rPr lang="en-US" sz="1050" b="1" dirty="0">
-                <a:solidFill>
-                  <a:srgbClr val="6B6B6B"/>
-                </a:solidFill>
-              </a:rPr>
-              <a:t>Employed relief pool ↑</a:t>
-            </a:r>
-            <a:endParaRPr lang="en-US" sz="1050" dirty="0"/>
-          </a:p>
-        </p:txBody>
-      </p:sp>
-      <p:sp>
-        <p:nvSpPr>
-          <p:cNvPr id="10" name="Shape 8"/>
-          <p:cNvSpPr/>
-          <p:nvPr/>
-        </p:nvSpPr>
-        <p:spPr>
-          <a:xfrm>
-            <a:off x="1572768" y="3024835"/>
-            <a:ext cx="1463040" cy="365760"/>
-          </a:xfrm>
-          <a:prstGeom prst="roundRect">
-            <a:avLst>
-              <a:gd name="adj" fmla="val 25000"/>
-            </a:avLst>
+            <a:off x="3200400" y="1984248"/>
+            <a:ext cx="3127248" cy="512064"/>
+          </a:xfrm>
+          <a:prstGeom prst="rect">
+            <a:avLst/>
           </a:prstGeom>
           <a:solidFill>
             <a:srgbClr val="B7C6DE"/>
           </a:solidFill>
           <a:ln w="12700">
             <a:solidFill>
-              <a:srgbClr val="FFFFFF"/>
+              <a:srgbClr val="B7C6DE"/>
             </a:solidFill>
             <a:prstDash val="solid"/>
           </a:ln>
@@ -2872,14 +2867,14 @@
       </p:sp>
       <p:sp>
         <p:nvSpPr>
-          <p:cNvPr id="11" name="Text 9"/>
+          <p:cNvPr id="7" name="Text 5"/>
           <p:cNvSpPr txBox="1"/>
           <p:nvPr/>
         </p:nvSpPr>
         <p:spPr>
           <a:xfrm>
-            <a:off x="1572768" y="3024835"/>
-            <a:ext cx="1463040" cy="365760"/>
+            <a:off x="3291840" y="1984248"/>
+            <a:ext cx="1828800" cy="512064"/>
           </a:xfrm>
           <a:prstGeom prst="rect">
             <a:avLst/>
@@ -2891,43 +2886,91 @@
           <a:bodyPr wrap="square" lIns="0" tIns="0" rIns="0" bIns="0" rtlCol="0" anchor="ctr"/>
           <a:lstStyle/>
           <a:p>
-            <a:pPr algn="ctr" indent="0" marL="0">
-              <a:buNone/>
-            </a:pPr>
-            <a:r>
-              <a:rPr lang="en-US" sz="1000" b="1" dirty="0">
+            <a:pPr indent="0" marL="0">
+              <a:buNone/>
+            </a:pPr>
+            <a:r>
+              <a:rPr lang="en-US" sz="1300" b="1" dirty="0">
                 <a:solidFill>
                   <a:srgbClr val="222222"/>
                 </a:solidFill>
               </a:rPr>
-              <a:t>Temp desks</a:t>
-            </a:r>
-            <a:endParaRPr lang="en-US" sz="1000" dirty="0"/>
-          </a:p>
-        </p:txBody>
-      </p:sp>
-      <p:sp>
-        <p:nvSpPr>
-          <p:cNvPr id="12" name="Shape 10"/>
+              <a:t>£11.5–17.0k</a:t>
+            </a:r>
+            <a:endParaRPr lang="en-US" sz="1300" dirty="0"/>
+          </a:p>
+        </p:txBody>
+      </p:sp>
+      <p:sp>
+        <p:nvSpPr>
+          <p:cNvPr id="8" name="Text 6"/>
+          <p:cNvSpPr txBox="1"/>
+          <p:nvPr/>
+        </p:nvSpPr>
+        <p:spPr>
+          <a:xfrm>
+            <a:off x="548640" y="2788920"/>
+            <a:ext cx="2560320" cy="731520"/>
+          </a:xfrm>
+          <a:prstGeom prst="rect">
+            <a:avLst/>
+          </a:prstGeom>
+          <a:noFill/>
+          <a:ln/>
+        </p:spPr>
+        <p:txBody>
+          <a:bodyPr wrap="square" lIns="0" tIns="0" rIns="0" bIns="0" rtlCol="0" anchor="ctr"/>
+          <a:lstStyle/>
+          <a:p>
+            <a:pPr indent="0" marL="0">
+              <a:buNone/>
+            </a:pPr>
+            <a:r>
+              <a:rPr lang="en-US" sz="1200" b="1" dirty="0">
+                <a:solidFill>
+                  <a:srgbClr val="1B2A5C"/>
+                </a:solidFill>
+              </a:rPr>
+              <a:t>Our cost per position</a:t>
+            </a:r>
+            <a:endParaRPr lang="en-US" sz="1200" dirty="0"/>
+          </a:p>
+          <a:p>
+            <a:pPr indent="0" marL="0">
+              <a:buNone/>
+            </a:pPr>
+            <a:r>
+              <a:rPr lang="en-US" sz="950" dirty="0">
+                <a:solidFill>
+                  <a:srgbClr val="6B6B6B"/>
+                </a:solidFill>
+              </a:rPr>
+              <a:t>Reliever, employer, recruiting, capital</a:t>
+            </a:r>
+            <a:endParaRPr lang="en-US" sz="1200" dirty="0"/>
+          </a:p>
+        </p:txBody>
+      </p:sp>
+      <p:sp>
+        <p:nvSpPr>
+          <p:cNvPr id="9" name="Shape 7"/>
           <p:cNvSpPr/>
           <p:nvPr/>
         </p:nvSpPr>
         <p:spPr>
           <a:xfrm>
-            <a:off x="952805" y="4037076"/>
-            <a:ext cx="1737360" cy="365760"/>
-          </a:xfrm>
-          <a:prstGeom prst="roundRect">
-            <a:avLst>
-              <a:gd name="adj" fmla="val 25000"/>
-            </a:avLst>
+            <a:off x="3200400" y="2898648"/>
+            <a:ext cx="5486400" cy="512064"/>
+          </a:xfrm>
+          <a:prstGeom prst="rect">
+            <a:avLst/>
           </a:prstGeom>
           <a:solidFill>
-            <a:srgbClr val="B7C6DE"/>
+            <a:srgbClr val="C9A24B"/>
           </a:solidFill>
           <a:ln w="12700">
             <a:solidFill>
-              <a:srgbClr val="FFFFFF"/>
+              <a:srgbClr val="C9A24B"/>
             </a:solidFill>
             <a:prstDash val="solid"/>
           </a:ln>
@@ -2935,14 +2978,14 @@
       </p:sp>
       <p:sp>
         <p:nvSpPr>
-          <p:cNvPr id="13" name="Text 11"/>
+          <p:cNvPr id="10" name="Text 8"/>
           <p:cNvSpPr txBox="1"/>
           <p:nvPr/>
         </p:nvSpPr>
         <p:spPr>
           <a:xfrm>
-            <a:off x="952805" y="4037076"/>
-            <a:ext cx="1737360" cy="365760"/>
+            <a:off x="3291840" y="2898648"/>
+            <a:ext cx="1828800" cy="512064"/>
           </a:xfrm>
           <a:prstGeom prst="rect">
             <a:avLst/>
@@ -2954,295 +2997,91 @@
           <a:bodyPr wrap="square" lIns="0" tIns="0" rIns="0" bIns="0" rtlCol="0" anchor="ctr"/>
           <a:lstStyle/>
           <a:p>
-            <a:pPr algn="ctr" indent="0" marL="0">
-              <a:buNone/>
-            </a:pPr>
-            <a:r>
-              <a:rPr lang="en-US" sz="1000" b="1" dirty="0">
+            <a:pPr indent="0" marL="0">
+              <a:buNone/>
+            </a:pPr>
+            <a:r>
+              <a:rPr lang="en-US" sz="1300" b="1" dirty="0">
                 <a:solidFill>
                   <a:srgbClr val="222222"/>
                 </a:solidFill>
               </a:rPr>
-              <a:t>Travel-nanny apps</a:t>
-            </a:r>
-            <a:endParaRPr lang="en-US" sz="1000" dirty="0"/>
-          </a:p>
-        </p:txBody>
-      </p:sp>
-      <p:sp>
-        <p:nvSpPr>
-          <p:cNvPr id="14" name="Shape 12"/>
+              <a:t>£24.6–25.4k</a:t>
+            </a:r>
+            <a:endParaRPr lang="en-US" sz="1300" dirty="0"/>
+          </a:p>
+        </p:txBody>
+      </p:sp>
+      <p:sp>
+        <p:nvSpPr>
+          <p:cNvPr id="11" name="Text 9"/>
+          <p:cNvSpPr txBox="1"/>
+          <p:nvPr/>
+        </p:nvSpPr>
+        <p:spPr>
+          <a:xfrm>
+            <a:off x="548640" y="3703320"/>
+            <a:ext cx="2560320" cy="731520"/>
+          </a:xfrm>
+          <a:prstGeom prst="rect">
+            <a:avLst/>
+          </a:prstGeom>
+          <a:noFill/>
+          <a:ln/>
+        </p:spPr>
+        <p:txBody>
+          <a:bodyPr wrap="square" lIns="0" tIns="0" rIns="0" bIns="0" rtlCol="0" anchor="ctr"/>
+          <a:lstStyle/>
+          <a:p>
+            <a:pPr indent="0" marL="0">
+              <a:buNone/>
+            </a:pPr>
+            <a:r>
+              <a:rPr lang="en-US" sz="1200" b="1" dirty="0">
+                <a:solidFill>
+                  <a:srgbClr val="1B2A5C"/>
+                </a:solidFill>
+              </a:rPr>
+              <a:t>Break-even fee, year 3</a:t>
+            </a:r>
+            <a:endParaRPr lang="en-US" sz="1200" dirty="0"/>
+          </a:p>
+          <a:p>
+            <a:pPr indent="0" marL="0">
+              <a:buNone/>
+            </a:pPr>
+            <a:r>
+              <a:rPr lang="en-US" sz="950" dirty="0">
+                <a:solidFill>
+                  <a:srgbClr val="6B6B6B"/>
+                </a:solidFill>
+              </a:rPr>
+              <a:t>15 positions incl. fixed costs</a:t>
+            </a:r>
+            <a:endParaRPr lang="en-US" sz="1200" dirty="0"/>
+          </a:p>
+        </p:txBody>
+      </p:sp>
+      <p:sp>
+        <p:nvSpPr>
+          <p:cNvPr id="12" name="Shape 10"/>
           <p:cNvSpPr/>
           <p:nvPr/>
         </p:nvSpPr>
         <p:spPr>
           <a:xfrm>
-            <a:off x="2340864" y="4899355"/>
-            <a:ext cx="1737360" cy="365760"/>
-          </a:xfrm>
-          <a:prstGeom prst="roundRect">
-            <a:avLst>
-              <a:gd name="adj" fmla="val 25000"/>
-            </a:avLst>
-          </a:prstGeom>
-          <a:solidFill>
-            <a:srgbClr val="B7C6DE"/>
-          </a:solidFill>
-          <a:ln w="12700">
-            <a:solidFill>
-              <a:srgbClr val="FFFFFF"/>
-            </a:solidFill>
-            <a:prstDash val="solid"/>
-          </a:ln>
-        </p:spPr>
-      </p:sp>
-      <p:sp>
-        <p:nvSpPr>
-          <p:cNvPr id="15" name="Text 13"/>
-          <p:cNvSpPr txBox="1"/>
-          <p:nvPr/>
-        </p:nvSpPr>
-        <p:spPr>
-          <a:xfrm>
-            <a:off x="2340864" y="4899355"/>
-            <a:ext cx="1737360" cy="365760"/>
-          </a:xfrm>
-          <a:prstGeom prst="rect">
-            <a:avLst/>
-          </a:prstGeom>
-          <a:noFill/>
-          <a:ln/>
-        </p:spPr>
-        <p:txBody>
-          <a:bodyPr wrap="square" lIns="0" tIns="0" rIns="0" bIns="0" rtlCol="0" anchor="ctr"/>
-          <a:lstStyle/>
-          <a:p>
-            <a:pPr algn="ctr" indent="0" marL="0">
-              <a:buNone/>
-            </a:pPr>
-            <a:r>
-              <a:rPr lang="en-US" sz="1000" b="1" dirty="0">
-                <a:solidFill>
-                  <a:srgbClr val="222222"/>
-                </a:solidFill>
-              </a:rPr>
-              <a:t>Household payroll</a:t>
-            </a:r>
-            <a:endParaRPr lang="en-US" sz="1000" dirty="0"/>
-          </a:p>
-        </p:txBody>
-      </p:sp>
-      <p:sp>
-        <p:nvSpPr>
-          <p:cNvPr id="16" name="Shape 14"/>
-          <p:cNvSpPr/>
-          <p:nvPr/>
-        </p:nvSpPr>
-        <p:spPr>
-          <a:xfrm>
-            <a:off x="2944368" y="4411980"/>
-            <a:ext cx="1737360" cy="365760"/>
-          </a:xfrm>
-          <a:prstGeom prst="roundRect">
-            <a:avLst>
-              <a:gd name="adj" fmla="val 25000"/>
-            </a:avLst>
-          </a:prstGeom>
-          <a:solidFill>
-            <a:srgbClr val="B7C6DE"/>
-          </a:solidFill>
-          <a:ln w="12700">
-            <a:solidFill>
-              <a:srgbClr val="FFFFFF"/>
-            </a:solidFill>
-            <a:prstDash val="solid"/>
-          </a:ln>
-        </p:spPr>
-      </p:sp>
-      <p:sp>
-        <p:nvSpPr>
-          <p:cNvPr id="17" name="Text 15"/>
-          <p:cNvSpPr txBox="1"/>
-          <p:nvPr/>
-        </p:nvSpPr>
-        <p:spPr>
-          <a:xfrm>
-            <a:off x="2944368" y="4411980"/>
-            <a:ext cx="1737360" cy="365760"/>
-          </a:xfrm>
-          <a:prstGeom prst="rect">
-            <a:avLst/>
-          </a:prstGeom>
-          <a:noFill/>
-          <a:ln/>
-        </p:spPr>
-        <p:txBody>
-          <a:bodyPr wrap="square" lIns="0" tIns="0" rIns="0" bIns="0" rtlCol="0" anchor="ctr"/>
-          <a:lstStyle/>
-          <a:p>
-            <a:pPr algn="ctr" indent="0" marL="0">
-              <a:buNone/>
-            </a:pPr>
-            <a:r>
-              <a:rPr lang="en-US" sz="1000" b="1" dirty="0">
-                <a:solidFill>
-                  <a:srgbClr val="222222"/>
-                </a:solidFill>
-              </a:rPr>
-              <a:t>Placement agencies</a:t>
-            </a:r>
-            <a:endParaRPr lang="en-US" sz="1000" dirty="0"/>
-          </a:p>
-        </p:txBody>
-      </p:sp>
-      <p:sp>
-        <p:nvSpPr>
-          <p:cNvPr id="18" name="Shape 16"/>
-          <p:cNvSpPr/>
-          <p:nvPr/>
-        </p:nvSpPr>
-        <p:spPr>
-          <a:xfrm>
-            <a:off x="4710989" y="4224528"/>
-            <a:ext cx="1463040" cy="365760"/>
-          </a:xfrm>
-          <a:prstGeom prst="roundRect">
-            <a:avLst>
-              <a:gd name="adj" fmla="val 25000"/>
-            </a:avLst>
-          </a:prstGeom>
-          <a:solidFill>
-            <a:srgbClr val="5B8DB8"/>
-          </a:solidFill>
-          <a:ln w="12700">
-            <a:solidFill>
-              <a:srgbClr val="FFFFFF"/>
-            </a:solidFill>
-            <a:prstDash val="solid"/>
-          </a:ln>
-        </p:spPr>
-      </p:sp>
-      <p:sp>
-        <p:nvSpPr>
-          <p:cNvPr id="19" name="Text 17"/>
-          <p:cNvSpPr txBox="1"/>
-          <p:nvPr/>
-        </p:nvSpPr>
-        <p:spPr>
-          <a:xfrm>
-            <a:off x="4710989" y="4224528"/>
-            <a:ext cx="1463040" cy="365760"/>
-          </a:xfrm>
-          <a:prstGeom prst="rect">
-            <a:avLst/>
-          </a:prstGeom>
-          <a:noFill/>
-          <a:ln/>
-        </p:spPr>
-        <p:txBody>
-          <a:bodyPr wrap="square" lIns="0" tIns="0" rIns="0" bIns="0" rtlCol="0" anchor="ctr"/>
-          <a:lstStyle/>
-          <a:p>
-            <a:pPr algn="ctr" indent="0" marL="0">
-              <a:buNone/>
-            </a:pPr>
-            <a:r>
-              <a:rPr lang="en-US" sz="1000" b="1" dirty="0">
-                <a:solidFill>
-                  <a:srgbClr val="FFFFFF"/>
-                </a:solidFill>
-              </a:rPr>
-              <a:t>Morgan &amp; Mallet</a:t>
-            </a:r>
-            <a:endParaRPr lang="en-US" sz="1000" dirty="0"/>
-          </a:p>
-        </p:txBody>
-      </p:sp>
-      <p:sp>
-        <p:nvSpPr>
-          <p:cNvPr id="20" name="Shape 18"/>
-          <p:cNvSpPr/>
-          <p:nvPr/>
-        </p:nvSpPr>
-        <p:spPr>
-          <a:xfrm>
-            <a:off x="5495544" y="5049317"/>
-            <a:ext cx="1463040" cy="365760"/>
-          </a:xfrm>
-          <a:prstGeom prst="roundRect">
-            <a:avLst>
-              <a:gd name="adj" fmla="val 25000"/>
-            </a:avLst>
-          </a:prstGeom>
-          <a:solidFill>
-            <a:srgbClr val="B7C6DE"/>
-          </a:solidFill>
-          <a:ln w="12700">
-            <a:solidFill>
-              <a:srgbClr val="FFFFFF"/>
-            </a:solidFill>
-            <a:prstDash val="solid"/>
-          </a:ln>
-        </p:spPr>
-      </p:sp>
-      <p:sp>
-        <p:nvSpPr>
-          <p:cNvPr id="21" name="Text 19"/>
-          <p:cNvSpPr txBox="1"/>
-          <p:nvPr/>
-        </p:nvSpPr>
-        <p:spPr>
-          <a:xfrm>
-            <a:off x="5495544" y="5049317"/>
-            <a:ext cx="1463040" cy="365760"/>
-          </a:xfrm>
-          <a:prstGeom prst="rect">
-            <a:avLst/>
-          </a:prstGeom>
-          <a:noFill/>
-          <a:ln/>
-        </p:spPr>
-        <p:txBody>
-          <a:bodyPr wrap="square" lIns="0" tIns="0" rIns="0" bIns="0" rtlCol="0" anchor="ctr"/>
-          <a:lstStyle/>
-          <a:p>
-            <a:pPr algn="ctr" indent="0" marL="0">
-              <a:buNone/>
-            </a:pPr>
-            <a:r>
-              <a:rPr lang="en-US" sz="1000" b="1" dirty="0">
-                <a:solidFill>
-                  <a:srgbClr val="222222"/>
-                </a:solidFill>
-              </a:rPr>
-              <a:t>Corporate EOR</a:t>
-            </a:r>
-            <a:endParaRPr lang="en-US" sz="1000" dirty="0"/>
-          </a:p>
-        </p:txBody>
-      </p:sp>
-      <p:sp>
-        <p:nvSpPr>
-          <p:cNvPr id="22" name="Shape 20"/>
-          <p:cNvSpPr/>
-          <p:nvPr/>
-        </p:nvSpPr>
-        <p:spPr>
-          <a:xfrm>
-            <a:off x="5056632" y="2275027"/>
-            <a:ext cx="1737360" cy="365760"/>
-          </a:xfrm>
-          <a:prstGeom prst="roundRect">
-            <a:avLst>
-              <a:gd name="adj" fmla="val 25000"/>
-            </a:avLst>
+            <a:off x="3200400" y="3813048"/>
+            <a:ext cx="6803136" cy="512064"/>
+          </a:xfrm>
+          <a:prstGeom prst="rect">
+            <a:avLst/>
           </a:prstGeom>
           <a:solidFill>
             <a:srgbClr val="1B2A5C"/>
           </a:solidFill>
           <a:ln w="12700">
             <a:solidFill>
-              <a:srgbClr val="FFFFFF"/>
+              <a:srgbClr val="1B2A5C"/>
             </a:solidFill>
             <a:prstDash val="solid"/>
           </a:ln>
@@ -3250,14 +3089,14 @@
       </p:sp>
       <p:sp>
         <p:nvSpPr>
-          <p:cNvPr id="23" name="Text 21"/>
+          <p:cNvPr id="13" name="Text 11"/>
           <p:cNvSpPr txBox="1"/>
           <p:nvPr/>
         </p:nvSpPr>
         <p:spPr>
           <a:xfrm>
-            <a:off x="5056632" y="2275027"/>
-            <a:ext cx="1737360" cy="365760"/>
+            <a:off x="3291840" y="3813048"/>
+            <a:ext cx="1828800" cy="512064"/>
           </a:xfrm>
           <a:prstGeom prst="rect">
             <a:avLst/>
@@ -3269,31 +3108,31 @@
           <a:bodyPr wrap="square" lIns="0" tIns="0" rIns="0" bIns="0" rtlCol="0" anchor="ctr"/>
           <a:lstStyle/>
           <a:p>
-            <a:pPr algn="ctr" indent="0" marL="0">
-              <a:buNone/>
-            </a:pPr>
-            <a:r>
-              <a:rPr lang="en-US" sz="1000" b="1" dirty="0">
+            <a:pPr indent="0" marL="0">
+              <a:buNone/>
+            </a:pPr>
+            <a:r>
+              <a:rPr lang="en-US" sz="1300" b="1" dirty="0">
                 <a:solidFill>
                   <a:srgbClr val="FFFFFF"/>
                 </a:solidFill>
               </a:rPr>
-              <a:t>Otium Chigi Journeys</a:t>
-            </a:r>
-            <a:endParaRPr lang="en-US" sz="1000" dirty="0"/>
-          </a:p>
-        </p:txBody>
-      </p:sp>
-      <p:sp>
-        <p:nvSpPr>
-          <p:cNvPr id="24" name="Shape 22"/>
+              <a:t>£30.6–31.4k</a:t>
+            </a:r>
+            <a:endParaRPr lang="en-US" sz="1300" dirty="0"/>
+          </a:p>
+        </p:txBody>
+      </p:sp>
+      <p:sp>
+        <p:nvSpPr>
+          <p:cNvPr id="14" name="Shape 12"/>
           <p:cNvSpPr/>
           <p:nvPr/>
         </p:nvSpPr>
         <p:spPr>
           <a:xfrm>
-            <a:off x="7589520" y="1783080"/>
-            <a:ext cx="4050792" cy="3749040"/>
+            <a:off x="548640" y="4709160"/>
+            <a:ext cx="11091672" cy="868680"/>
           </a:xfrm>
           <a:prstGeom prst="rect">
             <a:avLst/>
@@ -3301,7 +3140,7 @@
           <a:solidFill>
             <a:srgbClr val="1B2A5C"/>
           </a:solidFill>
-          <a:ln w="9525">
+          <a:ln w="12700">
             <a:solidFill>
               <a:srgbClr val="1B2A5C"/>
             </a:solidFill>
@@ -3311,81 +3150,35 @@
       </p:sp>
       <p:sp>
         <p:nvSpPr>
-          <p:cNvPr id="25" name="Text 23"/>
+          <p:cNvPr id="15" name="Text 13"/>
           <p:cNvSpPr txBox="1"/>
           <p:nvPr/>
         </p:nvSpPr>
         <p:spPr>
           <a:xfrm>
-            <a:off x="7726680" y="1874520"/>
-            <a:ext cx="3776472" cy="3566160"/>
-          </a:xfrm>
-          <a:prstGeom prst="rect">
-            <a:avLst/>
-          </a:prstGeom>
-          <a:noFill/>
-          <a:ln/>
-        </p:spPr>
-        <p:txBody>
-          <a:bodyPr wrap="square" lIns="0" tIns="0" rIns="0" bIns="0" rtlCol="0" anchor="t"/>
-          <a:lstStyle/>
-          <a:p>
-            <a:pPr indent="0" marL="0">
-              <a:spcAft>
-                <a:spcPts val="400"/>
-              </a:spcAft>
+            <a:off x="731520" y="4709160"/>
+            <a:ext cx="10789920" cy="868680"/>
+          </a:xfrm>
+          <a:prstGeom prst="rect">
+            <a:avLst/>
+          </a:prstGeom>
+          <a:noFill/>
+          <a:ln/>
+        </p:spPr>
+        <p:txBody>
+          <a:bodyPr wrap="square" lIns="0" tIns="0" rIns="0" bIns="0" rtlCol="0" anchor="ctr"/>
+          <a:lstStyle/>
+          <a:p>
+            <a:pPr indent="0" marL="0">
               <a:buNone/>
             </a:pPr>
             <a:r>
               <a:rPr lang="en-US" sz="1300" b="1" dirty="0">
                 <a:solidFill>
-                  <a:srgbClr val="C9A24B"/>
-                </a:solidFill>
-              </a:rPr>
-              <a:t>Honest about the moat</a:t>
-            </a:r>
-            <a:endParaRPr lang="en-US" sz="1300" dirty="0"/>
-          </a:p>
-          <a:p>
-            <a:pPr indent="0" marL="0">
-              <a:spcAft>
-                <a:spcPts val="400"/>
-              </a:spcAft>
-              <a:buNone/>
-            </a:pPr>
-            <a:r>
-              <a:rPr lang="en-US" sz="1200" dirty="0">
-                <a:solidFill>
                   <a:srgbClr val="FFFFFF"/>
                 </a:solidFill>
               </a:rPr>
-              <a:t>Morgan &amp; Mallet could copy within 12–24 months (assumption) and has a lower cost base.</a:t>
-            </a:r>
-            <a:endParaRPr lang="en-US" sz="1300" dirty="0"/>
-          </a:p>
-          <a:p>
-            <a:pPr indent="0" marL="0">
-              <a:spcAft>
-                <a:spcPts val="400"/>
-              </a:spcAft>
-              <a:buNone/>
-            </a:pPr>
-            <a:endParaRPr lang="en-US" sz="1300" dirty="0"/>
-          </a:p>
-          <a:p>
-            <a:pPr indent="0" marL="0">
-              <a:spcAft>
-                <a:spcPts val="400"/>
-              </a:spcAft>
-              <a:buNone/>
-            </a:pPr>
-            <a:r>
-              <a:rPr lang="en-US" sz="1200" dirty="0">
-                <a:solidFill>
-                  <a:srgbClr val="FFFFFF"/>
-                </a:solidFill>
-              </a:rPr>
-              <a:t>Our answer is speed, owning the reliever contracts, and partnering where it pays — not a claim of a permanent moat.</a:t>
+              <a:t>The value we must prove: £13.6–19.9k per position-year for the guarantee, continuity and lawful status — about what families already pay staff to travel (£16.5–23.6k). Bookings and membership add revenue on top only once both sides are on.</a:t>
             </a:r>
             <a:endParaRPr lang="en-US" sz="1300" dirty="0"/>
           </a:p>
@@ -3493,7 +3286,7 @@
                   <a:schemeClr val="accent4"/>
                 </a:solidFill>
               </a:rPr>
-              <a:t>GO-TO-MARKET</a:t>
+              <a:t>WAVES</a:t>
             </a:r>
             <a:endParaRPr lang="en-US" sz="1000" dirty="0"/>
           </a:p>
@@ -3531,7 +3324,7 @@
                   <a:schemeClr val="tx2"/>
                 </a:solidFill>
               </a:rPr>
-              <a:t>London first, through the people families already trust — foreign legs only once counsel clears them</a:t>
+              <a:t>Three waves: Rome, Southern Italy and Santa Catarina first — opposite seasons, partners on the ground</a:t>
             </a:r>
             <a:endParaRPr lang="en-US" sz="2200" dirty="0"/>
           </a:p>
@@ -3567,7 +3360,1288 @@
                   <a:srgbClr val="6B6B6B"/>
                 </a:solidFill>
               </a:rPr>
-              <a:t>Source: research/fmo_strategy.md §2.2, §2.5, §11. Channels are candidates; London chosen because the evidence is densest there.</a:t>
+              <a:t>Source: Euronews (Feb 2026: Capri); Made in Pompei (Feb 2025); The Roman Guy; Congresso em Foco (Jul 2026); NSC Total (Dec 2025); Civitatis via Brasilturis (Dec 2025). Triggers are assumptions.</a:t>
+            </a:r>
+            <a:endParaRPr lang="en-US" sz="850" dirty="0"/>
+          </a:p>
+        </p:txBody>
+      </p:sp>
+      <p:sp>
+        <p:nvSpPr>
+          <p:cNvPr id="5" name="Shape 3"/>
+          <p:cNvSpPr/>
+          <p:nvPr/>
+        </p:nvSpPr>
+        <p:spPr>
+          <a:xfrm>
+            <a:off x="548640" y="1737360"/>
+            <a:ext cx="3611880" cy="3886200"/>
+          </a:xfrm>
+          <a:prstGeom prst="rect">
+            <a:avLst/>
+          </a:prstGeom>
+          <a:solidFill>
+            <a:srgbClr val="1B2A5C"/>
+          </a:solidFill>
+          <a:ln w="12700">
+            <a:solidFill>
+              <a:srgbClr val="1B2A5C"/>
+            </a:solidFill>
+            <a:prstDash val="solid"/>
+          </a:ln>
+        </p:spPr>
+      </p:sp>
+      <p:sp>
+        <p:nvSpPr>
+          <p:cNvPr id="6" name="Text 4"/>
+          <p:cNvSpPr txBox="1"/>
+          <p:nvPr/>
+        </p:nvSpPr>
+        <p:spPr>
+          <a:xfrm>
+            <a:off x="731520" y="1828800"/>
+            <a:ext cx="3246120" cy="1005840"/>
+          </a:xfrm>
+          <a:prstGeom prst="rect">
+            <a:avLst/>
+          </a:prstGeom>
+          <a:noFill/>
+          <a:ln/>
+        </p:spPr>
+        <p:txBody>
+          <a:bodyPr wrap="square" lIns="0" tIns="0" rIns="0" bIns="0" rtlCol="0" anchor="t"/>
+          <a:lstStyle/>
+          <a:p>
+            <a:pPr indent="0" marL="0">
+              <a:buNone/>
+            </a:pPr>
+            <a:r>
+              <a:rPr lang="en-US" sz="2200" b="1" dirty="0">
+                <a:solidFill>
+                  <a:srgbClr val="C9A24B"/>
+                </a:solidFill>
+              </a:rPr>
+              <a:t>Wave 1</a:t>
+            </a:r>
+            <a:endParaRPr lang="en-US" sz="2200" dirty="0"/>
+          </a:p>
+          <a:p>
+            <a:pPr indent="0" marL="0">
+              <a:buNone/>
+            </a:pPr>
+            <a:r>
+              <a:rPr lang="en-US" sz="1300" b="1" dirty="0">
+                <a:solidFill>
+                  <a:srgbClr val="FFFFFF"/>
+                </a:solidFill>
+              </a:rPr>
+              <a:t>Rome · Southern Italy · Santa Catarina</a:t>
+            </a:r>
+            <a:endParaRPr lang="en-US" sz="2200" dirty="0"/>
+          </a:p>
+        </p:txBody>
+      </p:sp>
+      <p:sp>
+        <p:nvSpPr>
+          <p:cNvPr id="7" name="Text 5"/>
+          <p:cNvSpPr txBox="1"/>
+          <p:nvPr/>
+        </p:nvSpPr>
+        <p:spPr>
+          <a:xfrm>
+            <a:off x="731520" y="2880360"/>
+            <a:ext cx="3246120" cy="2651760"/>
+          </a:xfrm>
+          <a:prstGeom prst="rect">
+            <a:avLst/>
+          </a:prstGeom>
+          <a:noFill/>
+          <a:ln/>
+        </p:spPr>
+        <p:txBody>
+          <a:bodyPr wrap="square" lIns="0" tIns="0" rIns="0" bIns="0" rtlCol="0" anchor="t"/>
+          <a:lstStyle/>
+          <a:p>
+            <a:pPr marL="342900" indent="-342900">
+              <a:spcAft>
+                <a:spcPts val="600"/>
+              </a:spcAft>
+              <a:buSzPct val="100000"/>
+              <a:buChar char="•"/>
+            </a:pPr>
+            <a:r>
+              <a:rPr lang="en-US" sz="1100" dirty="0">
+                <a:solidFill>
+                  <a:srgbClr val="FFFFFF"/>
+                </a:solidFill>
+              </a:rPr>
+              <a:t>Rome: private access at 9–23× the standard ticket</a:t>
+            </a:r>
+            <a:endParaRPr lang="en-US" sz="1100" dirty="0"/>
+          </a:p>
+          <a:p>
+            <a:pPr marL="342900" indent="-342900">
+              <a:spcAft>
+                <a:spcPts val="600"/>
+              </a:spcAft>
+              <a:buSzPct val="100000"/>
+              <a:buChar char="•"/>
+            </a:pPr>
+            <a:r>
+              <a:rPr lang="en-US" sz="1100" dirty="0">
+                <a:solidFill>
+                  <a:srgbClr val="FFFFFF"/>
+                </a:solidFill>
+              </a:rPr>
+              <a:t>Southern Italy: up to 50,000 day visitors a day on Capri; Pompeii capped at 20,000</a:t>
+            </a:r>
+            <a:endParaRPr lang="en-US" sz="1100" dirty="0"/>
+          </a:p>
+          <a:p>
+            <a:pPr marL="342900" indent="-342900">
+              <a:spcAft>
+                <a:spcPts val="600"/>
+              </a:spcAft>
+              <a:buSzPct val="100000"/>
+              <a:buChar char="•"/>
+            </a:pPr>
+            <a:r>
+              <a:rPr lang="en-US" sz="1100" dirty="0">
+                <a:solidFill>
+                  <a:srgbClr val="FFFFFF"/>
+                </a:solidFill>
+              </a:rPr>
+              <a:t>Santa Catarina: a third of Rio’s violent-death rate; seclusion by villa and boat</a:t>
+            </a:r>
+            <a:endParaRPr lang="en-US" sz="1100" dirty="0"/>
+          </a:p>
+          <a:p>
+            <a:pPr marL="342900" indent="-342900">
+              <a:spcAft>
+                <a:spcPts val="600"/>
+              </a:spcAft>
+              <a:buSzPct val="100000"/>
+              <a:buChar char="•"/>
+            </a:pPr>
+            <a:r>
+              <a:rPr lang="en-US" sz="1100" dirty="0">
+                <a:solidFill>
+                  <a:srgbClr val="FFFFFF"/>
+                </a:solidFill>
+              </a:rPr>
+              <a:t>Regional partner in each</a:t>
+            </a:r>
+            <a:endParaRPr lang="en-US" sz="1100" dirty="0"/>
+          </a:p>
+        </p:txBody>
+      </p:sp>
+      <p:sp>
+        <p:nvSpPr>
+          <p:cNvPr id="8" name="Shape 6"/>
+          <p:cNvSpPr/>
+          <p:nvPr/>
+        </p:nvSpPr>
+        <p:spPr>
+          <a:xfrm>
+            <a:off x="4297680" y="1737360"/>
+            <a:ext cx="3611880" cy="3886200"/>
+          </a:xfrm>
+          <a:prstGeom prst="rect">
+            <a:avLst/>
+          </a:prstGeom>
+          <a:solidFill>
+            <a:srgbClr val="5B8DB8"/>
+          </a:solidFill>
+          <a:ln w="12700">
+            <a:solidFill>
+              <a:srgbClr val="5B8DB8"/>
+            </a:solidFill>
+            <a:prstDash val="solid"/>
+          </a:ln>
+        </p:spPr>
+      </p:sp>
+      <p:sp>
+        <p:nvSpPr>
+          <p:cNvPr id="9" name="Text 7"/>
+          <p:cNvSpPr txBox="1"/>
+          <p:nvPr/>
+        </p:nvSpPr>
+        <p:spPr>
+          <a:xfrm>
+            <a:off x="4480560" y="1828800"/>
+            <a:ext cx="3246120" cy="1005840"/>
+          </a:xfrm>
+          <a:prstGeom prst="rect">
+            <a:avLst/>
+          </a:prstGeom>
+          <a:noFill/>
+          <a:ln/>
+        </p:spPr>
+        <p:txBody>
+          <a:bodyPr wrap="square" lIns="0" tIns="0" rIns="0" bIns="0" rtlCol="0" anchor="t"/>
+          <a:lstStyle/>
+          <a:p>
+            <a:pPr indent="0" marL="0">
+              <a:buNone/>
+            </a:pPr>
+            <a:r>
+              <a:rPr lang="en-US" sz="2200" b="1" dirty="0">
+                <a:solidFill>
+                  <a:srgbClr val="FFFFFF"/>
+                </a:solidFill>
+              </a:rPr>
+              <a:t>Wave 2</a:t>
+            </a:r>
+            <a:endParaRPr lang="en-US" sz="2200" dirty="0"/>
+          </a:p>
+          <a:p>
+            <a:pPr indent="0" marL="0">
+              <a:buNone/>
+            </a:pPr>
+            <a:r>
+              <a:rPr lang="en-US" sz="1300" b="1" dirty="0">
+                <a:solidFill>
+                  <a:srgbClr val="FFFFFF"/>
+                </a:solidFill>
+              </a:rPr>
+              <a:t>Rest of Italy · Greece · Ibiza · the Alps</a:t>
+            </a:r>
+            <a:endParaRPr lang="en-US" sz="2200" dirty="0"/>
+          </a:p>
+        </p:txBody>
+      </p:sp>
+      <p:sp>
+        <p:nvSpPr>
+          <p:cNvPr id="10" name="Text 8"/>
+          <p:cNvSpPr txBox="1"/>
+          <p:nvPr/>
+        </p:nvSpPr>
+        <p:spPr>
+          <a:xfrm>
+            <a:off x="4480560" y="2880360"/>
+            <a:ext cx="3246120" cy="2651760"/>
+          </a:xfrm>
+          <a:prstGeom prst="rect">
+            <a:avLst/>
+          </a:prstGeom>
+          <a:noFill/>
+          <a:ln/>
+        </p:spPr>
+        <p:txBody>
+          <a:bodyPr wrap="square" lIns="0" tIns="0" rIns="0" bIns="0" rtlCol="0" anchor="t"/>
+          <a:lstStyle/>
+          <a:p>
+            <a:pPr marL="342900" indent="-342900">
+              <a:spcAft>
+                <a:spcPts val="600"/>
+              </a:spcAft>
+              <a:buSzPct val="100000"/>
+              <a:buChar char="•"/>
+            </a:pPr>
+            <a:r>
+              <a:rPr lang="en-US" sz="1100" dirty="0">
+                <a:solidFill>
+                  <a:srgbClr val="FFFFFF"/>
+                </a:solidFill>
+              </a:rPr>
+              <a:t>Trigger: Wave-1 staff wedge at economic profit ≥ 0</a:t>
+            </a:r>
+            <a:endParaRPr lang="en-US" sz="1100" dirty="0"/>
+          </a:p>
+          <a:p>
+            <a:pPr marL="342900" indent="-342900">
+              <a:spcAft>
+                <a:spcPts val="600"/>
+              </a:spcAft>
+              <a:buSzPct val="100000"/>
+              <a:buChar char="•"/>
+            </a:pPr>
+            <a:r>
+              <a:rPr lang="en-US" sz="1100" dirty="0">
+                <a:solidFill>
+                  <a:srgbClr val="FFFFFF"/>
+                </a:solidFill>
+              </a:rPr>
+              <a:t>Trigger: ≥ 20 live suppliers per Wave-1 region</a:t>
+            </a:r>
+            <a:endParaRPr lang="en-US" sz="1100" dirty="0"/>
+          </a:p>
+          <a:p>
+            <a:pPr marL="342900" indent="-342900">
+              <a:spcAft>
+                <a:spcPts val="600"/>
+              </a:spcAft>
+              <a:buSzPct val="100000"/>
+              <a:buChar char="•"/>
+            </a:pPr>
+            <a:r>
+              <a:rPr lang="en-US" sz="1100" dirty="0">
+                <a:solidFill>
+                  <a:srgbClr val="FFFFFF"/>
+                </a:solidFill>
+              </a:rPr>
+              <a:t>Summer islands and winter ski for the same families</a:t>
+            </a:r>
+            <a:endParaRPr lang="en-US" sz="1100" dirty="0"/>
+          </a:p>
+        </p:txBody>
+      </p:sp>
+      <p:sp>
+        <p:nvSpPr>
+          <p:cNvPr id="11" name="Shape 9"/>
+          <p:cNvSpPr/>
+          <p:nvPr/>
+        </p:nvSpPr>
+        <p:spPr>
+          <a:xfrm>
+            <a:off x="8046720" y="1737360"/>
+            <a:ext cx="3611880" cy="3886200"/>
+          </a:xfrm>
+          <a:prstGeom prst="rect">
+            <a:avLst/>
+          </a:prstGeom>
+          <a:solidFill>
+            <a:srgbClr val="B7C6DE"/>
+          </a:solidFill>
+          <a:ln w="12700">
+            <a:solidFill>
+              <a:srgbClr val="B7C6DE"/>
+            </a:solidFill>
+            <a:prstDash val="solid"/>
+          </a:ln>
+        </p:spPr>
+      </p:sp>
+      <p:sp>
+        <p:nvSpPr>
+          <p:cNvPr id="12" name="Text 10"/>
+          <p:cNvSpPr txBox="1"/>
+          <p:nvPr/>
+        </p:nvSpPr>
+        <p:spPr>
+          <a:xfrm>
+            <a:off x="8229600" y="1828800"/>
+            <a:ext cx="3246120" cy="1005840"/>
+          </a:xfrm>
+          <a:prstGeom prst="rect">
+            <a:avLst/>
+          </a:prstGeom>
+          <a:noFill/>
+          <a:ln/>
+        </p:spPr>
+        <p:txBody>
+          <a:bodyPr wrap="square" lIns="0" tIns="0" rIns="0" bIns="0" rtlCol="0" anchor="t"/>
+          <a:lstStyle/>
+          <a:p>
+            <a:pPr indent="0" marL="0">
+              <a:buNone/>
+            </a:pPr>
+            <a:r>
+              <a:rPr lang="en-US" sz="2200" b="1" dirty="0">
+                <a:solidFill>
+                  <a:srgbClr val="1B2A5C"/>
+                </a:solidFill>
+              </a:rPr>
+              <a:t>Wave 3</a:t>
+            </a:r>
+            <a:endParaRPr lang="en-US" sz="2200" dirty="0"/>
+          </a:p>
+          <a:p>
+            <a:pPr indent="0" marL="0">
+              <a:buNone/>
+            </a:pPr>
+            <a:r>
+              <a:rPr lang="en-US" sz="1300" b="1" dirty="0">
+                <a:solidFill>
+                  <a:srgbClr val="1B2A5C"/>
+                </a:solidFill>
+              </a:rPr>
+              <a:t>Global</a:t>
+            </a:r>
+            <a:endParaRPr lang="en-US" sz="2200" dirty="0"/>
+          </a:p>
+        </p:txBody>
+      </p:sp>
+      <p:sp>
+        <p:nvSpPr>
+          <p:cNvPr id="13" name="Text 11"/>
+          <p:cNvSpPr txBox="1"/>
+          <p:nvPr/>
+        </p:nvSpPr>
+        <p:spPr>
+          <a:xfrm>
+            <a:off x="8229600" y="2880360"/>
+            <a:ext cx="3246120" cy="2651760"/>
+          </a:xfrm>
+          <a:prstGeom prst="rect">
+            <a:avLst/>
+          </a:prstGeom>
+          <a:noFill/>
+          <a:ln/>
+        </p:spPr>
+        <p:txBody>
+          <a:bodyPr wrap="square" lIns="0" tIns="0" rIns="0" bIns="0" rtlCol="0" anchor="t"/>
+          <a:lstStyle/>
+          <a:p>
+            <a:pPr marL="342900" indent="-342900">
+              <a:spcAft>
+                <a:spcPts val="600"/>
+              </a:spcAft>
+              <a:buSzPct val="100000"/>
+              <a:buChar char="•"/>
+            </a:pPr>
+            <a:r>
+              <a:rPr lang="en-US" sz="1100" dirty="0">
+                <a:solidFill>
+                  <a:srgbClr val="1B2A5C"/>
+                </a:solidFill>
+              </a:rPr>
+              <a:t>Trigger: repeat families across ≥ 2 regions</a:t>
+            </a:r>
+            <a:endParaRPr lang="en-US" sz="1100" dirty="0"/>
+          </a:p>
+          <a:p>
+            <a:pPr marL="342900" indent="-342900">
+              <a:spcAft>
+                <a:spcPts val="600"/>
+              </a:spcAft>
+              <a:buSzPct val="100000"/>
+              <a:buChar char="•"/>
+            </a:pPr>
+            <a:r>
+              <a:rPr lang="en-US" sz="1100" dirty="0">
+                <a:solidFill>
+                  <a:srgbClr val="1B2A5C"/>
+                </a:solidFill>
+              </a:rPr>
+              <a:t>Partner-led; never own homes, yachts or aircraft</a:t>
+            </a:r>
+            <a:endParaRPr lang="en-US" sz="1100" dirty="0"/>
+          </a:p>
+        </p:txBody>
+      </p:sp>
+      <p:sp>
+        <p:nvSpPr>
+          <p:cNvPr id="14" name="callout"/>
+          <p:cNvSpPr/>
+          <p:nvPr/>
+        </p:nvSpPr>
+        <p:spPr>
+          <a:xfrm>
+            <a:off x="548640" y="5760720"/>
+            <a:ext cx="11091672" cy="438912"/>
+          </a:xfrm>
+          <a:prstGeom prst="rect">
+            <a:avLst/>
+          </a:prstGeom>
+          <a:solidFill>
+            <a:srgbClr val="EEF1F7"/>
+          </a:solidFill>
+          <a:ln w="12700">
+            <a:solidFill>
+              <a:srgbClr val="EEF1F7"/>
+            </a:solidFill>
+            <a:prstDash val="solid"/>
+          </a:ln>
+        </p:spPr>
+      </p:sp>
+      <p:sp>
+        <p:nvSpPr>
+          <p:cNvPr id="15" name="Text 13"/>
+          <p:cNvSpPr txBox="1"/>
+          <p:nvPr/>
+        </p:nvSpPr>
+        <p:spPr>
+          <a:xfrm>
+            <a:off x="731520" y="5760720"/>
+            <a:ext cx="10789920" cy="438912"/>
+          </a:xfrm>
+          <a:prstGeom prst="rect">
+            <a:avLst/>
+          </a:prstGeom>
+          <a:noFill/>
+          <a:ln/>
+        </p:spPr>
+        <p:txBody>
+          <a:bodyPr wrap="square" lIns="0" tIns="0" rIns="0" bIns="0" rtlCol="0" anchor="ctr"/>
+          <a:lstStyle/>
+          <a:p>
+            <a:pPr indent="0" marL="0">
+              <a:buNone/>
+            </a:pPr>
+            <a:r>
+              <a:rPr lang="en-US" sz="1300" b="1" dirty="0">
+                <a:solidFill>
+                  <a:srgbClr val="1B2A5C"/>
+                </a:solidFill>
+              </a:rPr>
+              <a:t>Go region by region: a region enters the next stage only when its own gates pass.</a:t>
+            </a:r>
+            <a:endParaRPr lang="en-US" sz="1300" dirty="0"/>
+          </a:p>
+        </p:txBody>
+      </p:sp>
+      <p:sp>
+        <p:nvSpPr>
+          <p:cNvPr id="25" name="Slide Number Placeholder 0"/>
+          <p:cNvSpPr>
+            <a:spLocks noGrp="1"/>
+          </p:cNvSpPr>
+          <p:nvPr>
+            <p:ph type="sldNum" sz="quarter" idx="4294967295"/>
+          </p:nvPr>
+        </p:nvSpPr>
+        <p:spPr>
+          <a:xfrm>
+            <a:off x="11201400" y="6400800"/>
+            <a:ext cx="457200" cy="274320"/>
+          </a:xfrm>
+          <a:prstGeom prst="rect">
+            <a:avLst/>
+          </a:prstGeom>
+          <a:extLst>
+            <a:ext uri="{C572A759-6A51-4108-AA02-DFA0A04FC94B}">
+              <ma14:wrappingTextBoxFlag xmlns:ma14="http://schemas.microsoft.com/office/mac/drawingml/2011/main" val="0"/>
+            </a:ext>
+          </a:extLst>
+        </p:spPr>
+        <p:txBody>
+          <a:bodyPr/>
+          <a:lstStyle>
+            <a:lvl1pPr>
+              <a:defRPr sz="900">
+                <a:solidFill>
+                  <a:srgbClr val="6B6B6B"/>
+                </a:solidFill>
+              </a:defRPr>
+            </a:lvl1pPr>
+          </a:lstStyle>
+          <a:p>
+            <a:pPr algn="r"/>
+            <a:fld id="{F7021451-1387-4CA6-816F-3879F97B5CBC}" type="slidenum">
+              <a:rPr b="0" lang="en-US"/>
+              <a:t>11</a:t>
+            </a:fld>
+            <a:endParaRPr lang="en-US"/>
+          </a:p>
+        </p:txBody>
+      </p:sp>
+    </p:spTree>
+  </p:cSld>
+  <p:clrMapOvr>
+    <a:masterClrMapping/>
+  </p:clrMapOvr>
+</p:sld>
+</file>
+
+<file path=ppt/slides/slide12.xml><?xml version="1.0" encoding="utf-8"?>
+<p:sld xmlns:a="http://schemas.openxmlformats.org/drawingml/2006/main" xmlns:r="http://schemas.openxmlformats.org/officeDocument/2006/relationships" xmlns:p="http://schemas.openxmlformats.org/presentationml/2006/main">
+  <p:cSld name="Slide 12">
+    <p:spTree>
+      <p:nvGrpSpPr>
+        <p:cNvPr id="1" name=""/>
+        <p:cNvGrpSpPr/>
+        <p:nvPr/>
+      </p:nvGrpSpPr>
+      <p:grpSpPr>
+        <a:xfrm>
+          <a:off x="0" y="0"/>
+          <a:ext cx="0" cy="0"/>
+          <a:chOff x="0" y="0"/>
+          <a:chExt cx="0" cy="0"/>
+        </a:xfrm>
+      </p:grpSpPr>
+      <p:sp>
+        <p:nvSpPr>
+          <p:cNvPr id="2" name="Text 0"/>
+          <p:cNvSpPr/>
+          <p:nvPr>
+            <p:ph idx="100" type="body" hasCustomPrompt="1"/>
+          </p:nvPr>
+        </p:nvSpPr>
+        <p:spPr>
+          <a:xfrm>
+            <a:off x="548640" y="292608"/>
+            <a:ext cx="9144000" cy="274320"/>
+          </a:xfrm>
+          <a:prstGeom prst="rect">
+            <a:avLst/>
+          </a:prstGeom>
+          <a:noFill/>
+          <a:ln/>
+        </p:spPr>
+        <p:txBody>
+          <a:bodyPr wrap="square" lIns="0" tIns="0" rIns="0" bIns="0" rtlCol="0" anchor="ctr"/>
+          <a:lstStyle/>
+          <a:p>
+            <a:pPr algn="l" indent="0" marL="0">
+              <a:buNone/>
+            </a:pPr>
+            <a:r>
+              <a:rPr lang="en-US" sz="1000" b="1" spc="200" kern="0" dirty="0">
+                <a:solidFill>
+                  <a:schemeClr val="accent4"/>
+                </a:solidFill>
+              </a:rPr>
+              <a:t>ROADMAP</a:t>
+            </a:r>
+            <a:endParaRPr lang="en-US" sz="1000" dirty="0"/>
+          </a:p>
+        </p:txBody>
+      </p:sp>
+      <p:sp>
+        <p:nvSpPr>
+          <p:cNvPr id="3" name="Text 0"/>
+          <p:cNvSpPr/>
+          <p:nvPr>
+            <p:ph idx="101" type="title" hasCustomPrompt="1"/>
+          </p:nvPr>
+        </p:nvSpPr>
+        <p:spPr>
+          <a:xfrm>
+            <a:off x="548640" y="566928"/>
+            <a:ext cx="11064240" cy="868680"/>
+          </a:xfrm>
+          <a:prstGeom prst="rect">
+            <a:avLst/>
+          </a:prstGeom>
+          <a:noFill/>
+          <a:ln/>
+        </p:spPr>
+        <p:txBody>
+          <a:bodyPr wrap="square" lIns="0" tIns="0" rIns="0" bIns="0" rtlCol="0" anchor="t"/>
+          <a:lstStyle/>
+          <a:p>
+            <a:pPr algn="l" indent="0" marL="0">
+              <a:buNone/>
+            </a:pPr>
+            <a:r>
+              <a:rPr lang="en-US" sz="2200" b="1" dirty="0">
+                <a:solidFill>
+                  <a:schemeClr val="tx2"/>
+                </a:solidFill>
+              </a:rPr>
+              <a:t>Prove the wedge in 90 days with no capital, pilot it with paying families in Wave 1, then add the other modules</a:t>
+            </a:r>
+            <a:endParaRPr lang="en-US" sz="2200" dirty="0"/>
+          </a:p>
+        </p:txBody>
+      </p:sp>
+      <p:sp>
+        <p:nvSpPr>
+          <p:cNvPr id="4" name="Text 2"/>
+          <p:cNvSpPr txBox="1"/>
+          <p:nvPr/>
+        </p:nvSpPr>
+        <p:spPr>
+          <a:xfrm>
+            <a:off x="548640" y="6291072"/>
+            <a:ext cx="10424160" cy="411480"/>
+          </a:xfrm>
+          <a:prstGeom prst="rect">
+            <a:avLst/>
+          </a:prstGeom>
+          <a:noFill/>
+          <a:ln/>
+        </p:spPr>
+        <p:txBody>
+          <a:bodyPr wrap="square" lIns="0" tIns="0" rIns="0" bIns="0" rtlCol="0" anchor="t"/>
+          <a:lstStyle/>
+          <a:p>
+            <a:pPr indent="0" marL="0">
+              <a:buNone/>
+            </a:pPr>
+            <a:r>
+              <a:rPr lang="en-US" sz="850" dirty="0">
+                <a:solidFill>
+                  <a:srgbClr val="6B6B6B"/>
+                </a:solidFill>
+              </a:rPr>
+              <a:t>Source: Strategy deck validation plan and research/fmo_strategy.md §8–9. Thresholds are assumptions; pass marks for the family test and paid pilots derive from the economics.</a:t>
+            </a:r>
+            <a:endParaRPr lang="en-US" sz="850" dirty="0"/>
+          </a:p>
+        </p:txBody>
+      </p:sp>
+      <p:sp>
+        <p:nvSpPr>
+          <p:cNvPr id="5" name="Shape 3"/>
+          <p:cNvSpPr/>
+          <p:nvPr/>
+        </p:nvSpPr>
+        <p:spPr>
+          <a:xfrm>
+            <a:off x="548640" y="1828800"/>
+            <a:ext cx="3611880" cy="3291840"/>
+          </a:xfrm>
+          <a:prstGeom prst="rect">
+            <a:avLst/>
+          </a:prstGeom>
+          <a:solidFill>
+            <a:srgbClr val="1B2A5C"/>
+          </a:solidFill>
+          <a:ln w="12700">
+            <a:solidFill>
+              <a:srgbClr val="1B2A5C"/>
+            </a:solidFill>
+            <a:prstDash val="solid"/>
+          </a:ln>
+        </p:spPr>
+      </p:sp>
+      <p:sp>
+        <p:nvSpPr>
+          <p:cNvPr id="6" name="Text 4"/>
+          <p:cNvSpPr txBox="1"/>
+          <p:nvPr/>
+        </p:nvSpPr>
+        <p:spPr>
+          <a:xfrm>
+            <a:off x="777240" y="1965960"/>
+            <a:ext cx="3154680" cy="3017520"/>
+          </a:xfrm>
+          <a:prstGeom prst="rect">
+            <a:avLst/>
+          </a:prstGeom>
+          <a:noFill/>
+          <a:ln/>
+        </p:spPr>
+        <p:txBody>
+          <a:bodyPr wrap="square" lIns="0" tIns="0" rIns="0" bIns="0" rtlCol="0" anchor="t"/>
+          <a:lstStyle/>
+          <a:p>
+            <a:pPr indent="0" marL="0">
+              <a:spcAft>
+                <a:spcPts val="800"/>
+              </a:spcAft>
+              <a:buNone/>
+            </a:pPr>
+            <a:r>
+              <a:rPr lang="en-US" sz="1200" b="1" dirty="0">
+                <a:solidFill>
+                  <a:srgbClr val="C9A24B"/>
+                </a:solidFill>
+              </a:rPr>
+              <a:t>Days 0–90</a:t>
+            </a:r>
+            <a:endParaRPr lang="en-US" sz="1200" dirty="0"/>
+          </a:p>
+          <a:p>
+            <a:pPr indent="0" marL="0">
+              <a:spcAft>
+                <a:spcPts val="800"/>
+              </a:spcAft>
+              <a:buNone/>
+            </a:pPr>
+            <a:r>
+              <a:rPr lang="en-US" sz="2200" b="1" dirty="0">
+                <a:solidFill>
+                  <a:srgbClr val="FFFFFF"/>
+                </a:solidFill>
+              </a:rPr>
+              <a:t>Validate</a:t>
+            </a:r>
+            <a:endParaRPr lang="en-US" sz="1200" dirty="0"/>
+          </a:p>
+          <a:p>
+            <a:pPr indent="0" marL="0">
+              <a:spcAft>
+                <a:spcPts val="800"/>
+              </a:spcAft>
+              <a:buNone/>
+            </a:pPr>
+            <a:r>
+              <a:rPr lang="en-US" sz="1250" dirty="0">
+                <a:solidFill>
+                  <a:srgbClr val="FFFFFF"/>
+                </a:solidFill>
+              </a:rPr>
+              <a:t>9 tests, ~160 hours, no capital. Kill gates: lawful route and employer route. Family trade-off interviews. Suppliers signed per region</a:t>
+            </a:r>
+            <a:endParaRPr lang="en-US" sz="1200" dirty="0"/>
+          </a:p>
+        </p:txBody>
+      </p:sp>
+      <p:sp>
+        <p:nvSpPr>
+          <p:cNvPr id="7" name="Shape 5"/>
+          <p:cNvSpPr/>
+          <p:nvPr/>
+        </p:nvSpPr>
+        <p:spPr>
+          <a:xfrm>
+            <a:off x="4160520" y="3474720"/>
+            <a:ext cx="137160" cy="0"/>
+          </a:xfrm>
+          <a:prstGeom prst="line">
+            <a:avLst/>
+          </a:prstGeom>
+          <a:noFill/>
+          <a:ln w="25400">
+            <a:solidFill>
+              <a:srgbClr val="1B2A5C"/>
+            </a:solidFill>
+            <a:prstDash val="solid"/>
+            <a:tailEnd type="triangle"/>
+          </a:ln>
+        </p:spPr>
+      </p:sp>
+      <p:sp>
+        <p:nvSpPr>
+          <p:cNvPr id="8" name="Shape 6"/>
+          <p:cNvSpPr/>
+          <p:nvPr/>
+        </p:nvSpPr>
+        <p:spPr>
+          <a:xfrm>
+            <a:off x="4297680" y="1828800"/>
+            <a:ext cx="3611880" cy="3291840"/>
+          </a:xfrm>
+          <a:prstGeom prst="rect">
+            <a:avLst/>
+          </a:prstGeom>
+          <a:solidFill>
+            <a:srgbClr val="5B8DB8"/>
+          </a:solidFill>
+          <a:ln w="12700">
+            <a:solidFill>
+              <a:srgbClr val="5B8DB8"/>
+            </a:solidFill>
+            <a:prstDash val="solid"/>
+          </a:ln>
+        </p:spPr>
+      </p:sp>
+      <p:sp>
+        <p:nvSpPr>
+          <p:cNvPr id="9" name="Text 7"/>
+          <p:cNvSpPr txBox="1"/>
+          <p:nvPr/>
+        </p:nvSpPr>
+        <p:spPr>
+          <a:xfrm>
+            <a:off x="4526280" y="1965960"/>
+            <a:ext cx="3154680" cy="3017520"/>
+          </a:xfrm>
+          <a:prstGeom prst="rect">
+            <a:avLst/>
+          </a:prstGeom>
+          <a:noFill/>
+          <a:ln/>
+        </p:spPr>
+        <p:txBody>
+          <a:bodyPr wrap="square" lIns="0" tIns="0" rIns="0" bIns="0" rtlCol="0" anchor="t"/>
+          <a:lstStyle/>
+          <a:p>
+            <a:pPr indent="0" marL="0">
+              <a:spcAft>
+                <a:spcPts val="800"/>
+              </a:spcAft>
+              <a:buNone/>
+            </a:pPr>
+            <a:r>
+              <a:rPr lang="en-US" sz="1200" b="1" dirty="0">
+                <a:solidFill>
+                  <a:srgbClr val="C9A24B"/>
+                </a:solidFill>
+              </a:rPr>
+              <a:t>Months 4–15</a:t>
+            </a:r>
+            <a:endParaRPr lang="en-US" sz="1200" dirty="0"/>
+          </a:p>
+          <a:p>
+            <a:pPr indent="0" marL="0">
+              <a:spcAft>
+                <a:spcPts val="800"/>
+              </a:spcAft>
+              <a:buNone/>
+            </a:pPr>
+            <a:r>
+              <a:rPr lang="en-US" sz="2200" b="1" dirty="0">
+                <a:solidFill>
+                  <a:srgbClr val="FFFFFF"/>
+                </a:solidFill>
+              </a:rPr>
+              <a:t>Pilot Wave 1</a:t>
+            </a:r>
+            <a:endParaRPr lang="en-US" sz="1200" dirty="0"/>
+          </a:p>
+          <a:p>
+            <a:pPr indent="0" marL="0">
+              <a:spcAft>
+                <a:spcPts val="800"/>
+              </a:spcAft>
+              <a:buNone/>
+            </a:pPr>
+            <a:r>
+              <a:rPr lang="en-US" sz="1250" dirty="0">
+                <a:solidFill>
+                  <a:srgbClr val="FFFFFF"/>
+                </a:solidFill>
+              </a:rPr>
+              <a:t>Staff + compliance with 2–3 paying families per region; first suppliers live; deposits cover the cash outlay</a:t>
+            </a:r>
+            <a:endParaRPr lang="en-US" sz="1200" dirty="0"/>
+          </a:p>
+        </p:txBody>
+      </p:sp>
+      <p:sp>
+        <p:nvSpPr>
+          <p:cNvPr id="10" name="Shape 8"/>
+          <p:cNvSpPr/>
+          <p:nvPr/>
+        </p:nvSpPr>
+        <p:spPr>
+          <a:xfrm>
+            <a:off x="7909560" y="3474720"/>
+            <a:ext cx="137160" cy="0"/>
+          </a:xfrm>
+          <a:prstGeom prst="line">
+            <a:avLst/>
+          </a:prstGeom>
+          <a:noFill/>
+          <a:ln w="25400">
+            <a:solidFill>
+              <a:srgbClr val="1B2A5C"/>
+            </a:solidFill>
+            <a:prstDash val="solid"/>
+            <a:tailEnd type="triangle"/>
+          </a:ln>
+        </p:spPr>
+      </p:sp>
+      <p:sp>
+        <p:nvSpPr>
+          <p:cNvPr id="11" name="Shape 9"/>
+          <p:cNvSpPr/>
+          <p:nvPr/>
+        </p:nvSpPr>
+        <p:spPr>
+          <a:xfrm>
+            <a:off x="8046720" y="1828800"/>
+            <a:ext cx="3611880" cy="3291840"/>
+          </a:xfrm>
+          <a:prstGeom prst="rect">
+            <a:avLst/>
+          </a:prstGeom>
+          <a:solidFill>
+            <a:srgbClr val="B7C6DE"/>
+          </a:solidFill>
+          <a:ln w="12700">
+            <a:solidFill>
+              <a:srgbClr val="B7C6DE"/>
+            </a:solidFill>
+            <a:prstDash val="solid"/>
+          </a:ln>
+        </p:spPr>
+      </p:sp>
+      <p:sp>
+        <p:nvSpPr>
+          <p:cNvPr id="12" name="Text 10"/>
+          <p:cNvSpPr txBox="1"/>
+          <p:nvPr/>
+        </p:nvSpPr>
+        <p:spPr>
+          <a:xfrm>
+            <a:off x="8275320" y="1965960"/>
+            <a:ext cx="3154680" cy="3017520"/>
+          </a:xfrm>
+          <a:prstGeom prst="rect">
+            <a:avLst/>
+          </a:prstGeom>
+          <a:noFill/>
+          <a:ln/>
+        </p:spPr>
+        <p:txBody>
+          <a:bodyPr wrap="square" lIns="0" tIns="0" rIns="0" bIns="0" rtlCol="0" anchor="t"/>
+          <a:lstStyle/>
+          <a:p>
+            <a:pPr indent="0" marL="0">
+              <a:spcAft>
+                <a:spcPts val="800"/>
+              </a:spcAft>
+              <a:buNone/>
+            </a:pPr>
+            <a:r>
+              <a:rPr lang="en-US" sz="1200" b="1" dirty="0">
+                <a:solidFill>
+                  <a:srgbClr val="8C6D23"/>
+                </a:solidFill>
+              </a:rPr>
+              <a:t>Months 16–36</a:t>
+            </a:r>
+            <a:endParaRPr lang="en-US" sz="1200" dirty="0"/>
+          </a:p>
+          <a:p>
+            <a:pPr indent="0" marL="0">
+              <a:spcAft>
+                <a:spcPts val="800"/>
+              </a:spcAft>
+              <a:buNone/>
+            </a:pPr>
+            <a:r>
+              <a:rPr lang="en-US" sz="2200" b="1" dirty="0">
+                <a:solidFill>
+                  <a:srgbClr val="1B2A5C"/>
+                </a:solidFill>
+              </a:rPr>
+              <a:t>Add modules</a:t>
+            </a:r>
+            <a:endParaRPr lang="en-US" sz="1200" dirty="0"/>
+          </a:p>
+          <a:p>
+            <a:pPr indent="0" marL="0">
+              <a:spcAft>
+                <a:spcPts val="800"/>
+              </a:spcAft>
+              <a:buNone/>
+            </a:pPr>
+            <a:r>
+              <a:rPr lang="en-US" sz="1250" dirty="0">
+                <a:solidFill>
+                  <a:srgbClr val="1B2A5C"/>
+                </a:solidFill>
+              </a:rPr>
+              <a:t>Journey design, booking and access on the same families; data layer; then Wave 2 on its triggers</a:t>
+            </a:r>
+            <a:endParaRPr lang="en-US" sz="1200" dirty="0"/>
+          </a:p>
+        </p:txBody>
+      </p:sp>
+      <p:sp>
+        <p:nvSpPr>
+          <p:cNvPr id="13" name="callout"/>
+          <p:cNvSpPr/>
+          <p:nvPr/>
+        </p:nvSpPr>
+        <p:spPr>
+          <a:xfrm>
+            <a:off x="548640" y="5303520"/>
+            <a:ext cx="11091672" cy="457200"/>
+          </a:xfrm>
+          <a:prstGeom prst="rect">
+            <a:avLst/>
+          </a:prstGeom>
+          <a:solidFill>
+            <a:srgbClr val="EEF1F7"/>
+          </a:solidFill>
+          <a:ln w="12700">
+            <a:solidFill>
+              <a:srgbClr val="EEF1F7"/>
+            </a:solidFill>
+            <a:prstDash val="solid"/>
+          </a:ln>
+        </p:spPr>
+      </p:sp>
+      <p:sp>
+        <p:nvSpPr>
+          <p:cNvPr id="14" name="Text 12"/>
+          <p:cNvSpPr txBox="1"/>
+          <p:nvPr/>
+        </p:nvSpPr>
+        <p:spPr>
+          <a:xfrm>
+            <a:off x="731520" y="5303520"/>
+            <a:ext cx="10789920" cy="457200"/>
+          </a:xfrm>
+          <a:prstGeom prst="rect">
+            <a:avLst/>
+          </a:prstGeom>
+          <a:noFill/>
+          <a:ln/>
+        </p:spPr>
+        <p:txBody>
+          <a:bodyPr wrap="square" lIns="0" tIns="0" rIns="0" bIns="0" rtlCol="0" anchor="ctr"/>
+          <a:lstStyle/>
+          <a:p>
+            <a:pPr indent="0" marL="0">
+              <a:buNone/>
+            </a:pPr>
+            <a:r>
+              <a:rPr lang="en-US" sz="1300" b="1" dirty="0">
+                <a:solidFill>
+                  <a:srgbClr val="1B2A5C"/>
+                </a:solidFill>
+              </a:rPr>
+              <a:t>Go only if every gate passes and the measured value makes economic profit positive — otherwise we stop with nothing lost.</a:t>
+            </a:r>
+            <a:endParaRPr lang="en-US" sz="1300" dirty="0"/>
+          </a:p>
+        </p:txBody>
+      </p:sp>
+      <p:sp>
+        <p:nvSpPr>
+          <p:cNvPr id="25" name="Slide Number Placeholder 0"/>
+          <p:cNvSpPr>
+            <a:spLocks noGrp="1"/>
+          </p:cNvSpPr>
+          <p:nvPr>
+            <p:ph type="sldNum" sz="quarter" idx="4294967295"/>
+          </p:nvPr>
+        </p:nvSpPr>
+        <p:spPr>
+          <a:xfrm>
+            <a:off x="11201400" y="6400800"/>
+            <a:ext cx="457200" cy="274320"/>
+          </a:xfrm>
+          <a:prstGeom prst="rect">
+            <a:avLst/>
+          </a:prstGeom>
+          <a:extLst>
+            <a:ext uri="{C572A759-6A51-4108-AA02-DFA0A04FC94B}">
+              <ma14:wrappingTextBoxFlag xmlns:ma14="http://schemas.microsoft.com/office/mac/drawingml/2011/main" val="0"/>
+            </a:ext>
+          </a:extLst>
+        </p:spPr>
+        <p:txBody>
+          <a:bodyPr/>
+          <a:lstStyle>
+            <a:lvl1pPr>
+              <a:defRPr sz="900">
+                <a:solidFill>
+                  <a:srgbClr val="6B6B6B"/>
+                </a:solidFill>
+              </a:defRPr>
+            </a:lvl1pPr>
+          </a:lstStyle>
+          <a:p>
+            <a:pPr algn="r"/>
+            <a:fld id="{F7021451-1387-4CA6-816F-3879F97B5CBC}" type="slidenum">
+              <a:rPr b="0" lang="en-US"/>
+              <a:t>12</a:t>
+            </a:fld>
+            <a:endParaRPr lang="en-US"/>
+          </a:p>
+        </p:txBody>
+      </p:sp>
+    </p:spTree>
+  </p:cSld>
+  <p:clrMapOvr>
+    <a:masterClrMapping/>
+  </p:clrMapOvr>
+</p:sld>
+</file>
+
+<file path=ppt/slides/slide13.xml><?xml version="1.0" encoding="utf-8"?>
+<p:sld xmlns:a="http://schemas.openxmlformats.org/drawingml/2006/main" xmlns:r="http://schemas.openxmlformats.org/officeDocument/2006/relationships" xmlns:p="http://schemas.openxmlformats.org/presentationml/2006/main">
+  <p:cSld name="Slide 13">
+    <p:spTree>
+      <p:nvGrpSpPr>
+        <p:cNvPr id="1" name=""/>
+        <p:cNvGrpSpPr/>
+        <p:nvPr/>
+      </p:nvGrpSpPr>
+      <p:grpSpPr>
+        <a:xfrm>
+          <a:off x="0" y="0"/>
+          <a:ext cx="0" cy="0"/>
+          <a:chOff x="0" y="0"/>
+          <a:chExt cx="0" cy="0"/>
+        </a:xfrm>
+      </p:grpSpPr>
+      <p:sp>
+        <p:nvSpPr>
+          <p:cNvPr id="2" name="Text 0"/>
+          <p:cNvSpPr/>
+          <p:nvPr>
+            <p:ph idx="100" type="body" hasCustomPrompt="1"/>
+          </p:nvPr>
+        </p:nvSpPr>
+        <p:spPr>
+          <a:xfrm>
+            <a:off x="548640" y="292608"/>
+            <a:ext cx="9144000" cy="274320"/>
+          </a:xfrm>
+          <a:prstGeom prst="rect">
+            <a:avLst/>
+          </a:prstGeom>
+          <a:noFill/>
+          <a:ln/>
+        </p:spPr>
+        <p:txBody>
+          <a:bodyPr wrap="square" lIns="0" tIns="0" rIns="0" bIns="0" rtlCol="0" anchor="ctr"/>
+          <a:lstStyle/>
+          <a:p>
+            <a:pPr algn="l" indent="0" marL="0">
+              <a:buNone/>
+            </a:pPr>
+            <a:r>
+              <a:rPr lang="en-US" sz="1000" b="1" spc="200" kern="0" dirty="0">
+                <a:solidFill>
+                  <a:schemeClr val="accent4"/>
+                </a:solidFill>
+              </a:rPr>
+              <a:t>PARTNERS</a:t>
+            </a:r>
+            <a:endParaRPr lang="en-US" sz="1000" dirty="0"/>
+          </a:p>
+        </p:txBody>
+      </p:sp>
+      <p:sp>
+        <p:nvSpPr>
+          <p:cNvPr id="3" name="Text 0"/>
+          <p:cNvSpPr/>
+          <p:nvPr>
+            <p:ph idx="101" type="title" hasCustomPrompt="1"/>
+          </p:nvPr>
+        </p:nvSpPr>
+        <p:spPr>
+          <a:xfrm>
+            <a:off x="548640" y="566928"/>
+            <a:ext cx="11064240" cy="868680"/>
+          </a:xfrm>
+          <a:prstGeom prst="rect">
+            <a:avLst/>
+          </a:prstGeom>
+          <a:noFill/>
+          <a:ln/>
+        </p:spPr>
+        <p:txBody>
+          <a:bodyPr wrap="square" lIns="0" tIns="0" rIns="0" bIns="0" rtlCol="0" anchor="t"/>
+          <a:lstStyle/>
+          <a:p>
+            <a:pPr algn="l" indent="0" marL="0">
+              <a:buNone/>
+            </a:pPr>
+            <a:r>
+              <a:rPr lang="en-US" sz="2200" b="1" dirty="0">
+                <a:solidFill>
+                  <a:schemeClr val="tx2"/>
+                </a:solidFill>
+              </a:rPr>
+              <a:t>Partners on the ground: named targets in every Wave-1 region — prospects today, signed with free content for net rates</a:t>
+            </a:r>
+            <a:endParaRPr lang="en-US" sz="2200" dirty="0"/>
+          </a:p>
+        </p:txBody>
+      </p:sp>
+      <p:sp>
+        <p:nvSpPr>
+          <p:cNvPr id="4" name="Text 2"/>
+          <p:cNvSpPr txBox="1"/>
+          <p:nvPr/>
+        </p:nvSpPr>
+        <p:spPr>
+          <a:xfrm>
+            <a:off x="548640" y="6291072"/>
+            <a:ext cx="10424160" cy="411480"/>
+          </a:xfrm>
+          <a:prstGeom prst="rect">
+            <a:avLst/>
+          </a:prstGeom>
+          <a:noFill/>
+          <a:ln/>
+        </p:spPr>
+        <p:txBody>
+          <a:bodyPr wrap="square" lIns="0" tIns="0" rIns="0" bIns="0" rtlCol="0" anchor="t"/>
+          <a:lstStyle/>
+          <a:p>
+            <a:pPr indent="0" marL="0">
+              <a:buNone/>
+            </a:pPr>
+            <a:r>
+              <a:rPr lang="en-US" sz="850" dirty="0">
+                <a:solidFill>
+                  <a:srgbClr val="6B6B6B"/>
+                </a:solidFill>
+              </a:rPr>
+              <a:t>Source: Our earlier target lists for Rome, Southern Italy and Santa Catarina, and our Southern Italy supplier, partnership and pricing sheets (Sep 2026). Prospects, not agreements; verify licences, prices and MICHELIN stars before contracting.</a:t>
             </a:r>
             <a:endParaRPr lang="en-US" sz="850" dirty="0"/>
           </a:p>
@@ -3575,7 +4649,7 @@
       </p:sp>
       <p:graphicFrame>
         <p:nvGraphicFramePr>
-          <p:cNvPr id="12" name="Table 0"/>
+          <p:cNvPr id="14" name="Table 0"/>
           <p:cNvGraphicFramePr>
             <a:graphicFrameLocks noGrp="1"/>
           </p:cNvGraphicFramePr>
@@ -3596,11 +4670,44 @@
             <a:tbl>
               <a:tblPr/>
               <a:tblGrid>
-                <a:gridCol w="1737360"/>
-                <a:gridCol w="5120640"/>
-                <a:gridCol w="4233672"/>
+                <a:gridCol w="1463040"/>
+                <a:gridCol w="2971800"/>
+                <a:gridCol w="3822192"/>
+                <a:gridCol w="2834640"/>
               </a:tblGrid>
-              <a:tr h="685800">
+              <a:tr h="731520">
+                <a:tc>
+                  <a:txBody>
+                    <a:bodyPr/>
+                    <a:lstStyle/>
+                    <a:p>
+                      <a:pPr indent="0" marL="0">
+                        <a:buNone/>
+                      </a:pPr>
+                      <a:endParaRPr lang="en-US" sz="1050" dirty="0"/>
+                    </a:p>
+                  </a:txBody>
+                  <a:tcPr marL="76200" marR="76200" marT="38100" marB="38100" anchor="b">
+                    <a:lnL w="0" cap="flat" cmpd="sng" algn="ctr">
+                      <a:noFill/>
+                    </a:lnL>
+                    <a:lnR w="0" cap="flat" cmpd="sng" algn="ctr">
+                      <a:noFill/>
+                    </a:lnR>
+                    <a:lnT w="0" cap="flat" cmpd="sng" algn="ctr">
+                      <a:noFill/>
+                    </a:lnT>
+                    <a:lnB w="22225" cap="flat" cmpd="sng" algn="ctr">
+                      <a:solidFill>
+                        <a:srgbClr val="1B2A5C"/>
+                      </a:solidFill>
+                      <a:prstDash val="solid"/>
+                      <a:round/>
+                      <a:headEnd type="none" w="med" len="med"/>
+                      <a:tailEnd type="none" w="med" len="med"/>
+                    </a:lnB>
+                  </a:tcPr>
+                </a:tc>
                 <a:tc>
                   <a:txBody>
                     <a:bodyPr/>
@@ -3615,7 +4722,7 @@
                             <a:srgbClr val="1B2A5C"/>
                           </a:solidFill>
                         </a:rPr>
-                        <a:t>Step</a:t>
+                        <a:t>Rome</a:t>
                       </a:r>
                       <a:endParaRPr lang="en-US" sz="1050" dirty="0"/>
                     </a:p>
@@ -3655,7 +4762,7 @@
                             <a:srgbClr val="1B2A5C"/>
                           </a:solidFill>
                         </a:rPr>
-                        <a:t>What</a:t>
+                        <a:t>Southern Italy</a:t>
                       </a:r>
                       <a:endParaRPr lang="en-US" sz="1050" dirty="0"/>
                     </a:p>
@@ -3695,7 +4802,7 @@
                             <a:srgbClr val="1B2A5C"/>
                           </a:solidFill>
                         </a:rPr>
-                        <a:t>Why</a:t>
+                        <a:t>Santa Catarina</a:t>
                       </a:r>
                       <a:endParaRPr lang="en-US" sz="1050" dirty="0"/>
                     </a:p>
@@ -3722,7 +4829,7 @@
                   </a:tcPr>
                 </a:tc>
               </a:tr>
-              <a:tr h="685800">
+              <a:tr h="731520">
                 <a:tc>
                   <a:txBody>
                     <a:bodyPr/>
@@ -3732,14 +4839,14 @@
                         <a:buNone/>
                       </a:pPr>
                       <a:r>
-                        <a:rPr lang="en-US" sz="1150" b="1" dirty="0">
+                        <a:rPr lang="en-US" sz="950" b="1" dirty="0">
                           <a:solidFill>
                             <a:srgbClr val="1B2A5C"/>
                           </a:solidFill>
                         </a:rPr>
-                        <a:t>1 · Channel</a:t>
+                        <a:t>Stays</a:t>
                       </a:r>
-                      <a:endParaRPr lang="en-US" sz="1150" dirty="0"/>
+                      <a:endParaRPr lang="en-US" sz="950" dirty="0"/>
                     </a:p>
                   </a:txBody>
                   <a:tcPr marL="76200" marR="76200" marT="38100" marB="38100" anchor="ctr">
@@ -3772,14 +4879,14 @@
                         <a:buNone/>
                       </a:pPr>
                       <a:r>
-                        <a:rPr lang="en-US" sz="1150" dirty="0">
+                        <a:rPr lang="en-US" sz="950" dirty="0">
                           <a:solidFill>
                             <a:srgbClr val="222222"/>
                           </a:solidFill>
                         </a:rPr>
-                        <a:t>Family-office directories, private banks, multi-family offices, agencies with unfilled rota roles</a:t>
+                        <a:t>Hotel de la Ville · Hotel Hassler · Six Senses Rome · Bulgari Hotel Roma</a:t>
                       </a:r>
-                      <a:endParaRPr lang="en-US" sz="1150" dirty="0"/>
+                      <a:endParaRPr lang="en-US" sz="950" dirty="0"/>
                     </a:p>
                   </a:txBody>
                   <a:tcPr marL="76200" marR="76200" marT="38100" marB="38100" anchor="ctr">
@@ -3812,56 +4919,14 @@
                         <a:buNone/>
                       </a:pPr>
                       <a:r>
-                        <a:rPr lang="en-US" sz="1150" dirty="0">
+                        <a:rPr lang="en-US" sz="950" dirty="0">
                           <a:solidFill>
                             <a:srgbClr val="222222"/>
                           </a:solidFill>
                         </a:rPr>
-                        <a:t>Trust ranks first in household hiring (72% of family offices, UBS 2025)</a:t>
+                        <a:t>Le Sirenuse · Il San Pietro di Positano · Monastero Santa Rosa · Capri Palace · Punta Tragara · direct villa owners</a:t>
                       </a:r>
-                      <a:endParaRPr lang="en-US" sz="1150" dirty="0"/>
-                    </a:p>
-                  </a:txBody>
-                  <a:tcPr marL="76200" marR="76200" marT="38100" marB="38100" anchor="ctr">
-                    <a:lnL w="0" cap="flat" cmpd="sng" algn="ctr">
-                      <a:noFill/>
-                    </a:lnL>
-                    <a:lnR w="0" cap="flat" cmpd="sng" algn="ctr">
-                      <a:noFill/>
-                    </a:lnR>
-                    <a:lnT w="0" cap="flat" cmpd="sng" algn="ctr">
-                      <a:noFill/>
-                    </a:lnT>
-                    <a:lnB w="6350" cap="flat" cmpd="sng" algn="ctr">
-                      <a:solidFill>
-                        <a:srgbClr val="D0D4DC"/>
-                      </a:solidFill>
-                      <a:prstDash val="solid"/>
-                      <a:round/>
-                      <a:headEnd type="none" w="med" len="med"/>
-                      <a:tailEnd type="none" w="med" len="med"/>
-                    </a:lnB>
-                  </a:tcPr>
-                </a:tc>
-              </a:tr>
-              <a:tr h="685800">
-                <a:tc>
-                  <a:txBody>
-                    <a:bodyPr/>
-                    <a:lstStyle/>
-                    <a:p>
-                      <a:pPr indent="0" marL="0">
-                        <a:buNone/>
-                      </a:pPr>
-                      <a:r>
-                        <a:rPr lang="en-US" sz="1150" b="1" dirty="0">
-                          <a:solidFill>
-                            <a:srgbClr val="1B2A5C"/>
-                          </a:solidFill>
-                        </a:rPr>
-                        <a:t>2 · Base city</a:t>
-                      </a:r>
-                      <a:endParaRPr lang="en-US" sz="1150" dirty="0"/>
+                      <a:endParaRPr lang="en-US" sz="950" dirty="0"/>
                     </a:p>
                   </a:txBody>
                   <a:tcPr marL="76200" marR="76200" marT="38100" marB="38100" anchor="ctr">
@@ -3894,14 +4959,56 @@
                         <a:buNone/>
                       </a:pPr>
                       <a:r>
-                        <a:rPr lang="en-US" sz="1150" dirty="0">
+                        <a:rPr lang="en-US" sz="950" dirty="0">
                           <a:solidFill>
                             <a:srgbClr val="222222"/>
                           </a:solidFill>
                         </a:rPr>
-                        <a:t>London; staff with UK work rights</a:t>
+                        <a:t>Awasi Santa Catarina (Relais &amp; Châteaux) · pousadas at Praia do Rosa · Jurerê houses</a:t>
                       </a:r>
-                      <a:endParaRPr lang="en-US" sz="1150" dirty="0"/>
+                      <a:endParaRPr lang="en-US" sz="950" dirty="0"/>
+                    </a:p>
+                  </a:txBody>
+                  <a:tcPr marL="76200" marR="76200" marT="38100" marB="38100" anchor="ctr">
+                    <a:lnL w="0" cap="flat" cmpd="sng" algn="ctr">
+                      <a:noFill/>
+                    </a:lnL>
+                    <a:lnR w="0" cap="flat" cmpd="sng" algn="ctr">
+                      <a:noFill/>
+                    </a:lnR>
+                    <a:lnT w="0" cap="flat" cmpd="sng" algn="ctr">
+                      <a:noFill/>
+                    </a:lnT>
+                    <a:lnB w="6350" cap="flat" cmpd="sng" algn="ctr">
+                      <a:solidFill>
+                        <a:srgbClr val="D0D4DC"/>
+                      </a:solidFill>
+                      <a:prstDash val="solid"/>
+                      <a:round/>
+                      <a:headEnd type="none" w="med" len="med"/>
+                      <a:tailEnd type="none" w="med" len="med"/>
+                    </a:lnB>
+                  </a:tcPr>
+                </a:tc>
+              </a:tr>
+              <a:tr h="731520">
+                <a:tc>
+                  <a:txBody>
+                    <a:bodyPr/>
+                    <a:lstStyle/>
+                    <a:p>
+                      <a:pPr indent="0" marL="0">
+                        <a:buNone/>
+                      </a:pPr>
+                      <a:r>
+                        <a:rPr lang="en-US" sz="950" b="1" dirty="0">
+                          <a:solidFill>
+                            <a:srgbClr val="1B2A5C"/>
+                          </a:solidFill>
+                        </a:rPr>
+                        <a:t>Access + dining</a:t>
+                      </a:r>
+                      <a:endParaRPr lang="en-US" sz="950" dirty="0"/>
                     </a:p>
                   </a:txBody>
                   <a:tcPr marL="76200" marR="76200" marT="38100" marB="38100" anchor="ctr">
@@ -3934,56 +5041,14 @@
                         <a:buNone/>
                       </a:pPr>
                       <a:r>
-                        <a:rPr lang="en-US" sz="1150" dirty="0">
+                        <a:rPr lang="en-US" sz="950" dirty="0">
                           <a:solidFill>
                             <a:srgbClr val="222222"/>
                           </a:solidFill>
                         </a:rPr>
-                        <a:t>Densest evidence; UK route rules are known</a:t>
+                        <a:t>Vatican before opening · Colosseum underground · palazzo dinners · La Pergola · Imàgo · Il Pagliaccio</a:t>
                       </a:r>
-                      <a:endParaRPr lang="en-US" sz="1150" dirty="0"/>
-                    </a:p>
-                  </a:txBody>
-                  <a:tcPr marL="76200" marR="76200" marT="38100" marB="38100" anchor="ctr">
-                    <a:lnL w="0" cap="flat" cmpd="sng" algn="ctr">
-                      <a:noFill/>
-                    </a:lnL>
-                    <a:lnR w="0" cap="flat" cmpd="sng" algn="ctr">
-                      <a:noFill/>
-                    </a:lnR>
-                    <a:lnT w="0" cap="flat" cmpd="sng" algn="ctr">
-                      <a:noFill/>
-                    </a:lnT>
-                    <a:lnB w="6350" cap="flat" cmpd="sng" algn="ctr">
-                      <a:solidFill>
-                        <a:srgbClr val="D0D4DC"/>
-                      </a:solidFill>
-                      <a:prstDash val="solid"/>
-                      <a:round/>
-                      <a:headEnd type="none" w="med" len="med"/>
-                      <a:tailEnd type="none" w="med" len="med"/>
-                    </a:lnB>
-                  </a:tcPr>
-                </a:tc>
-              </a:tr>
-              <a:tr h="685800">
-                <a:tc>
-                  <a:txBody>
-                    <a:bodyPr/>
-                    <a:lstStyle/>
-                    <a:p>
-                      <a:pPr indent="0" marL="0">
-                        <a:buNone/>
-                      </a:pPr>
-                      <a:r>
-                        <a:rPr lang="en-US" sz="1150" b="1" dirty="0">
-                          <a:solidFill>
-                            <a:srgbClr val="1B2A5C"/>
-                          </a:solidFill>
-                        </a:rPr>
-                        <a:t>3 · Cleared legs</a:t>
-                      </a:r>
-                      <a:endParaRPr lang="en-US" sz="1150" dirty="0"/>
+                      <a:endParaRPr lang="en-US" sz="950" dirty="0"/>
                     </a:p>
                   </a:txBody>
                   <a:tcPr marL="76200" marR="76200" marT="38100" marB="38100" anchor="ctr">
@@ -4016,14 +5081,14 @@
                         <a:buNone/>
                       </a:pPr>
                       <a:r>
-                        <a:rPr lang="en-US" sz="1150" dirty="0">
+                        <a:rPr lang="en-US" sz="950" dirty="0">
                           <a:solidFill>
                             <a:srgbClr val="222222"/>
                           </a:solidFill>
                         </a:rPr>
-                        <a:t>France and the UAE only after written counsel opinions</a:t>
+                        <a:t>Pompeii archaeological park (early access) · Don Alfonso 1890 · Torre del Saracino · Zass · L’Olivo · George</a:t>
                       </a:r>
-                      <a:endParaRPr lang="en-US" sz="1150" dirty="0"/>
+                      <a:endParaRPr lang="en-US" sz="950" dirty="0"/>
                     </a:p>
                   </a:txBody>
                   <a:tcPr marL="76200" marR="76200" marT="38100" marB="38100" anchor="ctr">
@@ -4056,14 +5121,14 @@
                         <a:buNone/>
                       </a:pPr>
                       <a:r>
-                        <a:rPr lang="en-US" sz="1150" dirty="0">
+                        <a:rPr lang="en-US" sz="950" dirty="0">
                           <a:solidFill>
                             <a:srgbClr val="222222"/>
                           </a:solidFill>
                         </a:rPr>
-                        <a:t>No leg is sold before it is lawful</a:t>
+                        <a:t>P12 Parador Internacional · Café de la Musique · whale watching at Praia do Rosa (Jul–Nov) · sailing the bay</a:t>
                       </a:r>
-                      <a:endParaRPr lang="en-US" sz="1150" dirty="0"/>
+                      <a:endParaRPr lang="en-US" sz="950" dirty="0"/>
                     </a:p>
                   </a:txBody>
                   <a:tcPr marL="76200" marR="76200" marT="38100" marB="38100" anchor="ctr">
@@ -4088,7 +5153,7 @@
                   </a:tcPr>
                 </a:tc>
               </a:tr>
-              <a:tr h="685800">
+              <a:tr h="731520">
                 <a:tc>
                   <a:txBody>
                     <a:bodyPr/>
@@ -4098,14 +5163,14 @@
                         <a:buNone/>
                       </a:pPr>
                       <a:r>
-                        <a:rPr lang="en-US" sz="1150" b="1" dirty="0">
+                        <a:rPr lang="en-US" sz="950" b="1" dirty="0">
                           <a:solidFill>
                             <a:srgbClr val="1B2A5C"/>
                           </a:solidFill>
                         </a:rPr>
-                        <a:t>4 · References</a:t>
+                        <a:t>Mobility</a:t>
                       </a:r>
-                      <a:endParaRPr lang="en-US" sz="1150" dirty="0"/>
+                      <a:endParaRPr lang="en-US" sz="950" dirty="0"/>
                     </a:p>
                   </a:txBody>
                   <a:tcPr marL="76200" marR="76200" marT="38100" marB="38100" anchor="ctr">
@@ -4138,14 +5203,14 @@
                         <a:buNone/>
                       </a:pPr>
                       <a:r>
-                        <a:rPr lang="en-US" sz="1150" dirty="0">
+                        <a:rPr lang="en-US" sz="950" dirty="0">
                           <a:solidFill>
                             <a:srgbClr val="222222"/>
                           </a:solidFill>
                         </a:rPr>
-                        <a:t>2–3 paid pilot families with deposits</a:t>
+                        <a:t>Licensed NCC chauffeurs · a helicopter to the Amalfi Coast</a:t>
                       </a:r>
-                      <a:endParaRPr lang="en-US" sz="1150" dirty="0"/>
+                      <a:endParaRPr lang="en-US" sz="950" dirty="0"/>
                     </a:p>
                   </a:txBody>
                   <a:tcPr marL="76200" marR="76200" marT="38100" marB="38100" anchor="ctr">
@@ -4178,14 +5243,54 @@
                         <a:buNone/>
                       </a:pPr>
                       <a:r>
-                        <a:rPr lang="en-US" sz="1150" dirty="0">
+                        <a:rPr lang="en-US" sz="950" dirty="0">
                           <a:solidFill>
                             <a:srgbClr val="222222"/>
                           </a:solidFill>
                         </a:rPr>
-                        <a:t>In an NDA market, references travel by word of mouth</a:t>
+                        <a:t>Muto Travel NCC · Hoverfly (Naples–Capri from ~€1,900) · Amalfi Coast Dream (yacht days from ~€4,500) · D-Marin marinas (warm contact)</a:t>
                       </a:r>
-                      <a:endParaRPr lang="en-US" sz="1150" dirty="0"/>
+                      <a:endParaRPr lang="en-US" sz="950" dirty="0"/>
+                    </a:p>
+                  </a:txBody>
+                  <a:tcPr marL="76200" marR="76200" marT="38100" marB="38100" anchor="ctr">
+                    <a:lnL w="0" cap="flat" cmpd="sng" algn="ctr">
+                      <a:noFill/>
+                    </a:lnL>
+                    <a:lnR w="0" cap="flat" cmpd="sng" algn="ctr">
+                      <a:noFill/>
+                    </a:lnR>
+                    <a:lnT w="0" cap="flat" cmpd="sng" algn="ctr">
+                      <a:noFill/>
+                    </a:lnT>
+                    <a:lnB w="6350" cap="flat" cmpd="sng" algn="ctr">
+                      <a:solidFill>
+                        <a:srgbClr val="D0D4DC"/>
+                      </a:solidFill>
+                      <a:prstDash val="solid"/>
+                      <a:round/>
+                      <a:headEnd type="none" w="med" len="med"/>
+                      <a:tailEnd type="none" w="med" len="med"/>
+                    </a:lnB>
+                  </a:tcPr>
+                </a:tc>
+                <a:tc>
+                  <a:txBody>
+                    <a:bodyPr/>
+                    <a:lstStyle/>
+                    <a:p>
+                      <a:pPr indent="0" marL="0">
+                        <a:buNone/>
+                      </a:pPr>
+                      <a:r>
+                        <a:rPr lang="en-US" sz="950" dirty="0">
+                          <a:solidFill>
+                            <a:srgbClr val="222222"/>
+                          </a:solidFill>
+                        </a:rPr>
+                        <a:t>Chauffeurs · boats · a helicopter</a:t>
+                      </a:r>
+                      <a:endParaRPr lang="en-US" sz="950" dirty="0"/>
                     </a:p>
                   </a:txBody>
                   <a:tcPr marL="76200" marR="76200" marT="38100" marB="38100" anchor="ctr">
@@ -4210,7 +5315,7 @@
                   </a:tcPr>
                 </a:tc>
               </a:tr>
-              <a:tr h="685800">
+              <a:tr h="731520">
                 <a:tc>
                   <a:txBody>
                     <a:bodyPr/>
@@ -4220,14 +5325,14 @@
                         <a:buNone/>
                       </a:pPr>
                       <a:r>
-                        <a:rPr lang="en-US" sz="1150" b="1" dirty="0">
+                        <a:rPr lang="en-US" sz="950" b="1" dirty="0">
                           <a:solidFill>
                             <a:srgbClr val="1B2A5C"/>
                           </a:solidFill>
                         </a:rPr>
-                        <a:t>5 · Expand</a:t>
+                        <a:t>Local care + chefs</a:t>
                       </a:r>
-                      <a:endParaRPr lang="en-US" sz="1150" dirty="0"/>
+                      <a:endParaRPr lang="en-US" sz="950" dirty="0"/>
                     </a:p>
                   </a:txBody>
                   <a:tcPr marL="76200" marR="76200" marT="38100" marB="38100" anchor="ctr">
@@ -4260,14 +5365,14 @@
                         <a:buNone/>
                       </a:pPr>
                       <a:r>
-                        <a:rPr lang="en-US" sz="1150" dirty="0">
+                        <a:rPr lang="en-US" sz="950" dirty="0">
                           <a:solidFill>
                             <a:srgbClr val="222222"/>
                           </a:solidFill>
                         </a:rPr>
-                        <a:t>More relievers and positions; then the staff record and a residency day-count ledger</a:t>
+                        <a:t>To source, same vetting standard</a:t>
                       </a:r>
-                      <a:endParaRPr lang="en-US" sz="1150" dirty="0"/>
+                      <a:endParaRPr lang="en-US" sz="950" dirty="0"/>
                     </a:p>
                   </a:txBody>
                   <a:tcPr marL="76200" marR="76200" marT="38100" marB="38100" anchor="ctr">
@@ -4300,14 +5405,54 @@
                         <a:buNone/>
                       </a:pPr>
                       <a:r>
-                        <a:rPr lang="en-US" sz="1150" dirty="0">
+                        <a:rPr lang="en-US" sz="950" dirty="0">
                           <a:solidFill>
                             <a:srgbClr val="222222"/>
                           </a:solidFill>
                         </a:rPr>
-                        <a:t>Each step has its own trigger</a:t>
+                        <a:t>Amalfi Sitters · International Sitters · licensed home-care agencies · Take a Chef (client price: nanny €247, companion €221 a day)</a:t>
                       </a:r>
-                      <a:endParaRPr lang="en-US" sz="1150" dirty="0"/>
+                      <a:endParaRPr lang="en-US" sz="950" dirty="0"/>
+                    </a:p>
+                  </a:txBody>
+                  <a:tcPr marL="76200" marR="76200" marT="38100" marB="38100" anchor="ctr">
+                    <a:lnL w="0" cap="flat" cmpd="sng" algn="ctr">
+                      <a:noFill/>
+                    </a:lnL>
+                    <a:lnR w="0" cap="flat" cmpd="sng" algn="ctr">
+                      <a:noFill/>
+                    </a:lnR>
+                    <a:lnT w="0" cap="flat" cmpd="sng" algn="ctr">
+                      <a:noFill/>
+                    </a:lnT>
+                    <a:lnB w="12700" cap="flat" cmpd="sng" algn="ctr">
+                      <a:solidFill>
+                        <a:srgbClr val="1B2A5C"/>
+                      </a:solidFill>
+                      <a:prstDash val="solid"/>
+                      <a:round/>
+                      <a:headEnd type="none" w="med" len="med"/>
+                      <a:tailEnd type="none" w="med" len="med"/>
+                    </a:lnB>
+                  </a:tcPr>
+                </a:tc>
+                <a:tc>
+                  <a:txBody>
+                    <a:bodyPr/>
+                    <a:lstStyle/>
+                    <a:p>
+                      <a:pPr indent="0" marL="0">
+                        <a:buNone/>
+                      </a:pPr>
+                      <a:r>
+                        <a:rPr lang="en-US" sz="950" dirty="0">
+                          <a:solidFill>
+                            <a:srgbClr val="222222"/>
+                          </a:solidFill>
+                        </a:rPr>
+                        <a:t>To source, same vetting standard</a:t>
+                      </a:r>
+                      <a:endParaRPr lang="en-US" sz="950" dirty="0"/>
                     </a:p>
                   </a:txBody>
                   <a:tcPr marL="76200" marR="76200" marT="38100" marB="38100" anchor="ctr">
@@ -4338,6 +5483,67 @@
       </p:graphicFrame>
       <p:sp>
         <p:nvSpPr>
+          <p:cNvPr id="6" name="callout"/>
+          <p:cNvSpPr/>
+          <p:nvPr/>
+        </p:nvSpPr>
+        <p:spPr>
+          <a:xfrm>
+            <a:off x="548640" y="5257800"/>
+            <a:ext cx="11091672" cy="457200"/>
+          </a:xfrm>
+          <a:prstGeom prst="rect">
+            <a:avLst/>
+          </a:prstGeom>
+          <a:solidFill>
+            <a:srgbClr val="EEF1F7"/>
+          </a:solidFill>
+          <a:ln w="12700">
+            <a:solidFill>
+              <a:srgbClr val="EEF1F7"/>
+            </a:solidFill>
+            <a:prstDash val="solid"/>
+          </a:ln>
+        </p:spPr>
+      </p:sp>
+      <p:sp>
+        <p:nvSpPr>
+          <p:cNvPr id="7" name="Text 4"/>
+          <p:cNvSpPr txBox="1"/>
+          <p:nvPr/>
+        </p:nvSpPr>
+        <p:spPr>
+          <a:xfrm>
+            <a:off x="731520" y="5257800"/>
+            <a:ext cx="10789920" cy="457200"/>
+          </a:xfrm>
+          <a:prstGeom prst="rect">
+            <a:avLst/>
+          </a:prstGeom>
+          <a:noFill/>
+          <a:ln/>
+        </p:spPr>
+        <p:txBody>
+          <a:bodyPr wrap="square" lIns="0" tIns="0" rIns="0" bIns="0" rtlCol="0" anchor="ctr"/>
+          <a:lstStyle/>
+          <a:p>
+            <a:pPr indent="0" marL="0">
+              <a:buNone/>
+            </a:pPr>
+            <a:r>
+              <a:rPr lang="en-US" sz="1300" b="1" dirty="0">
+                <a:solidFill>
+                  <a:srgbClr val="1B2A5C"/>
+                </a:solidFill>
+              </a:rPr>
+              <a:t>One warm channel today (D-Marin marinas); every other name is a target to sign before the pilot.</a:t>
+            </a:r>
+            <a:endParaRPr lang="en-US" sz="1300" dirty="0"/>
+          </a:p>
+        </p:txBody>
+      </p:sp>
+      <p:sp>
+        <p:nvSpPr>
           <p:cNvPr id="25" name="Slide Number Placeholder 0"/>
           <p:cNvSpPr>
             <a:spLocks noGrp="1"/>
@@ -4375,7 +5581,7 @@
             <a:pPr algn="r"/>
             <a:fld id="{F7021451-1387-4CA6-816F-3879F97B5CBC}" type="slidenum">
               <a:rPr b="0" lang="en-US"/>
-              <a:t>11</a:t>
+              <a:t>13</a:t>
             </a:fld>
             <a:endParaRPr lang="en-US"/>
           </a:p>
@@ -4389,9 +5595,9 @@
 </p:sld>
 </file>
 
-<file path=ppt/slides/slide12.xml><?xml version="1.0" encoding="utf-8"?>
+<file path=ppt/slides/slide14.xml><?xml version="1.0" encoding="utf-8"?>
 <p:sld xmlns:a="http://schemas.openxmlformats.org/drawingml/2006/main" xmlns:r="http://schemas.openxmlformats.org/officeDocument/2006/relationships" xmlns:p="http://schemas.openxmlformats.org/presentationml/2006/main">
-  <p:cSld name="Slide 12">
+  <p:cSld name="Slide 14">
     <p:spTree>
       <p:nvGrpSpPr>
         <p:cNvPr id="1" name=""/>
@@ -4438,7 +5644,7 @@
                   <a:schemeClr val="accent4"/>
                 </a:solidFill>
               </a:rPr>
-              <a:t>ROADMAP</a:t>
+              <a:t>TEAM</a:t>
             </a:r>
             <a:endParaRPr lang="en-US" sz="1000" dirty="0"/>
           </a:p>
@@ -4476,7 +5682,7 @@
                   <a:schemeClr val="tx2"/>
                 </a:solidFill>
               </a:rPr>
-              <a:t>Prove it in 90 days with no capital, pilot it with paying families, then scale to 15 positions</a:t>
+              <a:t>A founder and two regional partner seats — one team across Rome, Southern Italy and Santa Catarina</a:t>
             </a:r>
             <a:endParaRPr lang="en-US" sz="2200" dirty="0"/>
           </a:p>
@@ -4512,7 +5718,7 @@
                   <a:srgbClr val="6B6B6B"/>
                 </a:solidFill>
               </a:rPr>
-              <a:t>Source: research/fmo_strategy.md §8–9. Thresholds are assumptions; pass marks for the family test and paid pilots are derived from the economics.</a:t>
+              <a:t>Source: Founder profile (Oct 2026). Regional seats describe roles; partners to be confirmed.</a:t>
             </a:r>
             <a:endParaRPr lang="en-US" sz="850" dirty="0"/>
           </a:p>
@@ -4526,8 +5732,8 @@
         </p:nvSpPr>
         <p:spPr>
           <a:xfrm>
-            <a:off x="548640" y="1828800"/>
-            <a:ext cx="3611880" cy="3291840"/>
+            <a:off x="548640" y="1783080"/>
+            <a:ext cx="3611880" cy="3017520"/>
           </a:xfrm>
           <a:prstGeom prst="rect">
             <a:avLst/>
@@ -4535,7 +5741,7 @@
           <a:solidFill>
             <a:srgbClr val="1B2A5C"/>
           </a:solidFill>
-          <a:ln w="12700">
+          <a:ln w="9525">
             <a:solidFill>
               <a:srgbClr val="1B2A5C"/>
             </a:solidFill>
@@ -4551,8 +5757,58 @@
         </p:nvSpPr>
         <p:spPr>
           <a:xfrm>
-            <a:off x="777240" y="1965960"/>
-            <a:ext cx="3154680" cy="3017520"/>
+            <a:off x="731520" y="1920240"/>
+            <a:ext cx="3246120" cy="822960"/>
+          </a:xfrm>
+          <a:prstGeom prst="rect">
+            <a:avLst/>
+          </a:prstGeom>
+          <a:noFill/>
+          <a:ln/>
+        </p:spPr>
+        <p:txBody>
+          <a:bodyPr wrap="square" lIns="0" tIns="0" rIns="0" bIns="0" rtlCol="0" anchor="ctr"/>
+          <a:lstStyle/>
+          <a:p>
+            <a:pPr indent="0" marL="0">
+              <a:buNone/>
+            </a:pPr>
+            <a:r>
+              <a:rPr lang="en-US" sz="1700" b="1" dirty="0">
+                <a:solidFill>
+                  <a:srgbClr val="FFFFFF"/>
+                </a:solidFill>
+              </a:rPr>
+              <a:t>Calebe Garcia</a:t>
+            </a:r>
+            <a:endParaRPr lang="en-US" sz="1700" dirty="0"/>
+          </a:p>
+          <a:p>
+            <a:pPr indent="0" marL="0">
+              <a:buNone/>
+            </a:pPr>
+            <a:r>
+              <a:rPr lang="en-US" sz="1100" i="1" dirty="0">
+                <a:solidFill>
+                  <a:srgbClr val="C9A24B"/>
+                </a:solidFill>
+              </a:rPr>
+              <a:t>Founder · Santa Catarina, Brazil</a:t>
+            </a:r>
+            <a:endParaRPr lang="en-US" sz="1700" dirty="0"/>
+          </a:p>
+        </p:txBody>
+      </p:sp>
+      <p:sp>
+        <p:nvSpPr>
+          <p:cNvPr id="7" name="Text 5"/>
+          <p:cNvSpPr txBox="1"/>
+          <p:nvPr/>
+        </p:nvSpPr>
+        <p:spPr>
+          <a:xfrm>
+            <a:off x="731520" y="2788920"/>
+            <a:ext cx="3246120" cy="1920240"/>
           </a:xfrm>
           <a:prstGeom prst="rect">
             <a:avLst/>
@@ -4564,81 +5820,60 @@
           <a:bodyPr wrap="square" lIns="0" tIns="0" rIns="0" bIns="0" rtlCol="0" anchor="t"/>
           <a:lstStyle/>
           <a:p>
-            <a:pPr indent="0" marL="0">
+            <a:pPr marL="342900" indent="-342900">
               <a:spcAft>
-                <a:spcPts val="800"/>
+                <a:spcPts val="600"/>
               </a:spcAft>
-              <a:buNone/>
-            </a:pPr>
-            <a:r>
-              <a:rPr lang="en-US" sz="1200" b="1" dirty="0">
-                <a:solidFill>
-                  <a:srgbClr val="C9A24B"/>
-                </a:solidFill>
-              </a:rPr>
-              <a:t>Days 0–90</a:t>
-            </a:r>
-            <a:endParaRPr lang="en-US" sz="1200" dirty="0"/>
-          </a:p>
-          <a:p>
-            <a:pPr indent="0" marL="0">
+              <a:buSzPct val="100000"/>
+              <a:buChar char="•"/>
+            </a:pPr>
+            <a:r>
+              <a:rPr lang="en-US" sz="1150" dirty="0">
+                <a:solidFill>
+                  <a:srgbClr val="FFFFFF"/>
+                </a:solidFill>
+              </a:rPr>
+              <a:t>10+ years in investment banking, corporate finance and strategy, incl. Advent International and Whirlpool</a:t>
+            </a:r>
+            <a:endParaRPr lang="en-US" sz="1150" dirty="0"/>
+          </a:p>
+          <a:p>
+            <a:pPr marL="342900" indent="-342900">
               <a:spcAft>
-                <a:spcPts val="800"/>
+                <a:spcPts val="600"/>
               </a:spcAft>
-              <a:buNone/>
-            </a:pPr>
-            <a:r>
-              <a:rPr lang="en-US" sz="2200" b="1" dirty="0">
+              <a:buSzPct val="100000"/>
+              <a:buChar char="•"/>
+            </a:pPr>
+            <a:r>
+              <a:rPr lang="en-US" sz="1150" dirty="0">
                 <a:solidFill>
                   <a:srgbClr val="FFFFFF"/>
                 </a:solidFill>
               </a:rPr>
-              <a:t>Validate</a:t>
-            </a:r>
-            <a:endParaRPr lang="en-US" sz="1200" dirty="0"/>
-          </a:p>
-          <a:p>
-            <a:pPr indent="0" marL="0">
+              <a:t>MBA and Master of Finance (Hult)</a:t>
+            </a:r>
+            <a:endParaRPr lang="en-US" sz="1150" dirty="0"/>
+          </a:p>
+          <a:p>
+            <a:pPr marL="342900" indent="-342900">
               <a:spcAft>
-                <a:spcPts val="800"/>
+                <a:spcPts val="600"/>
               </a:spcAft>
-              <a:buNone/>
-            </a:pPr>
-            <a:r>
-              <a:rPr lang="en-US" sz="1250" dirty="0">
+              <a:buSzPct val="100000"/>
+              <a:buChar char="•"/>
+            </a:pPr>
+            <a:r>
+              <a:rPr lang="en-US" sz="1150" dirty="0">
                 <a:solidFill>
                   <a:srgbClr val="FFFFFF"/>
                 </a:solidFill>
               </a:rPr>
-              <a:t>9 tests, ~160 hours, no capital. Kill gates: lawful route and employer route. Family trade-off interviews (n = 12). 2 paid pilots signed</a:t>
-            </a:r>
-            <a:endParaRPr lang="en-US" sz="1200" dirty="0"/>
-          </a:p>
-        </p:txBody>
-      </p:sp>
-      <p:sp>
-        <p:nvSpPr>
-          <p:cNvPr id="7" name="Shape 5"/>
-          <p:cNvSpPr/>
-          <p:nvPr/>
-        </p:nvSpPr>
-        <p:spPr>
-          <a:xfrm>
-            <a:off x="4160520" y="3474720"/>
-            <a:ext cx="137160" cy="0"/>
-          </a:xfrm>
-          <a:prstGeom prst="line">
-            <a:avLst/>
-          </a:prstGeom>
-          <a:noFill/>
-          <a:ln w="25400">
-            <a:solidFill>
-              <a:srgbClr val="1B2A5C"/>
-            </a:solidFill>
-            <a:prstDash val="solid"/>
-            <a:tailEnd type="triangle"/>
-          </a:ln>
-        </p:spPr>
+              <a:t>Portuguese, Spanish and English</a:t>
+            </a:r>
+            <a:endParaRPr lang="en-US" sz="1150" dirty="0"/>
+          </a:p>
+        </p:txBody>
       </p:sp>
       <p:sp>
         <p:nvSpPr>
@@ -4648,471 +5883,8 @@
         </p:nvSpPr>
         <p:spPr>
           <a:xfrm>
-            <a:off x="4297680" y="1828800"/>
-            <a:ext cx="3611880" cy="3291840"/>
-          </a:xfrm>
-          <a:prstGeom prst="rect">
-            <a:avLst/>
-          </a:prstGeom>
-          <a:solidFill>
-            <a:srgbClr val="5B8DB8"/>
-          </a:solidFill>
-          <a:ln w="12700">
-            <a:solidFill>
-              <a:srgbClr val="5B8DB8"/>
-            </a:solidFill>
-            <a:prstDash val="solid"/>
-          </a:ln>
-        </p:spPr>
-      </p:sp>
-      <p:sp>
-        <p:nvSpPr>
-          <p:cNvPr id="9" name="Text 7"/>
-          <p:cNvSpPr txBox="1"/>
-          <p:nvPr/>
-        </p:nvSpPr>
-        <p:spPr>
-          <a:xfrm>
-            <a:off x="4526280" y="1965960"/>
-            <a:ext cx="3154680" cy="3017520"/>
-          </a:xfrm>
-          <a:prstGeom prst="rect">
-            <a:avLst/>
-          </a:prstGeom>
-          <a:noFill/>
-          <a:ln/>
-        </p:spPr>
-        <p:txBody>
-          <a:bodyPr wrap="square" lIns="0" tIns="0" rIns="0" bIns="0" rtlCol="0" anchor="t"/>
-          <a:lstStyle/>
-          <a:p>
-            <a:pPr indent="0" marL="0">
-              <a:spcAft>
-                <a:spcPts val="800"/>
-              </a:spcAft>
-              <a:buNone/>
-            </a:pPr>
-            <a:r>
-              <a:rPr lang="en-US" sz="1200" b="1" dirty="0">
-                <a:solidFill>
-                  <a:srgbClr val="C9A24B"/>
-                </a:solidFill>
-              </a:rPr>
-              <a:t>Months 4–15</a:t>
-            </a:r>
-            <a:endParaRPr lang="en-US" sz="1200" dirty="0"/>
-          </a:p>
-          <a:p>
-            <a:pPr indent="0" marL="0">
-              <a:spcAft>
-                <a:spcPts val="800"/>
-              </a:spcAft>
-              <a:buNone/>
-            </a:pPr>
-            <a:r>
-              <a:rPr lang="en-US" sz="2200" b="1" dirty="0">
-                <a:solidFill>
-                  <a:srgbClr val="FFFFFF"/>
-                </a:solidFill>
-              </a:rPr>
-              <a:t>Pilot</a:t>
-            </a:r>
-            <a:endParaRPr lang="en-US" sz="1200" dirty="0"/>
-          </a:p>
-          <a:p>
-            <a:pPr indent="0" marL="0">
-              <a:spcAft>
-                <a:spcPts val="800"/>
-              </a:spcAft>
-              <a:buNone/>
-            </a:pPr>
-            <a:r>
-              <a:rPr lang="en-US" sz="1250" dirty="0">
-                <a:solidFill>
-                  <a:srgbClr val="FFFFFF"/>
-                </a:solidFill>
-              </a:rPr>
-              <a:t>1 reliever, 4–6 positions, 2–3 families; deposits cover the cash outlay</a:t>
-            </a:r>
-            <a:endParaRPr lang="en-US" sz="1200" dirty="0"/>
-          </a:p>
-        </p:txBody>
-      </p:sp>
-      <p:sp>
-        <p:nvSpPr>
-          <p:cNvPr id="10" name="Shape 8"/>
-          <p:cNvSpPr/>
-          <p:nvPr/>
-        </p:nvSpPr>
-        <p:spPr>
-          <a:xfrm>
-            <a:off x="7909560" y="3474720"/>
-            <a:ext cx="137160" cy="0"/>
-          </a:xfrm>
-          <a:prstGeom prst="line">
-            <a:avLst/>
-          </a:prstGeom>
-          <a:noFill/>
-          <a:ln w="25400">
-            <a:solidFill>
-              <a:srgbClr val="1B2A5C"/>
-            </a:solidFill>
-            <a:prstDash val="solid"/>
-            <a:tailEnd type="triangle"/>
-          </a:ln>
-        </p:spPr>
-      </p:sp>
-      <p:sp>
-        <p:nvSpPr>
-          <p:cNvPr id="11" name="Shape 9"/>
-          <p:cNvSpPr/>
-          <p:nvPr/>
-        </p:nvSpPr>
-        <p:spPr>
-          <a:xfrm>
-            <a:off x="8046720" y="1828800"/>
-            <a:ext cx="3611880" cy="3291840"/>
-          </a:xfrm>
-          <a:prstGeom prst="rect">
-            <a:avLst/>
-          </a:prstGeom>
-          <a:solidFill>
-            <a:srgbClr val="B7C6DE"/>
-          </a:solidFill>
-          <a:ln w="12700">
-            <a:solidFill>
-              <a:srgbClr val="B7C6DE"/>
-            </a:solidFill>
-            <a:prstDash val="solid"/>
-          </a:ln>
-        </p:spPr>
-      </p:sp>
-      <p:sp>
-        <p:nvSpPr>
-          <p:cNvPr id="12" name="Text 10"/>
-          <p:cNvSpPr txBox="1"/>
-          <p:nvPr/>
-        </p:nvSpPr>
-        <p:spPr>
-          <a:xfrm>
-            <a:off x="8275320" y="1965960"/>
-            <a:ext cx="3154680" cy="3017520"/>
-          </a:xfrm>
-          <a:prstGeom prst="rect">
-            <a:avLst/>
-          </a:prstGeom>
-          <a:noFill/>
-          <a:ln/>
-        </p:spPr>
-        <p:txBody>
-          <a:bodyPr wrap="square" lIns="0" tIns="0" rIns="0" bIns="0" rtlCol="0" anchor="t"/>
-          <a:lstStyle/>
-          <a:p>
-            <a:pPr indent="0" marL="0">
-              <a:spcAft>
-                <a:spcPts val="800"/>
-              </a:spcAft>
-              <a:buNone/>
-            </a:pPr>
-            <a:r>
-              <a:rPr lang="en-US" sz="1200" b="1" dirty="0">
-                <a:solidFill>
-                  <a:srgbClr val="8C6D23"/>
-                </a:solidFill>
-              </a:rPr>
-              <a:t>Months 16–36</a:t>
-            </a:r>
-            <a:endParaRPr lang="en-US" sz="1200" dirty="0"/>
-          </a:p>
-          <a:p>
-            <a:pPr indent="0" marL="0">
-              <a:spcAft>
-                <a:spcPts val="800"/>
-              </a:spcAft>
-              <a:buNone/>
-            </a:pPr>
-            <a:r>
-              <a:rPr lang="en-US" sz="2200" b="1" dirty="0">
-                <a:solidFill>
-                  <a:srgbClr val="1B2A5C"/>
-                </a:solidFill>
-              </a:rPr>
-              <a:t>Scale</a:t>
-            </a:r>
-            <a:endParaRPr lang="en-US" sz="1200" dirty="0"/>
-          </a:p>
-          <a:p>
-            <a:pPr indent="0" marL="0">
-              <a:spcAft>
-                <a:spcPts val="800"/>
-              </a:spcAft>
-              <a:buNone/>
-            </a:pPr>
-            <a:r>
-              <a:rPr lang="en-US" sz="1250" dirty="0">
-                <a:solidFill>
-                  <a:srgbClr val="1B2A5C"/>
-                </a:solidFill>
-              </a:rPr>
-              <a:t>3 relievers, 15 positions; ≥ 68% utilisation; economic profit ≥ 0</a:t>
-            </a:r>
-            <a:endParaRPr lang="en-US" sz="1200" dirty="0"/>
-          </a:p>
-        </p:txBody>
-      </p:sp>
-      <p:sp>
-        <p:nvSpPr>
-          <p:cNvPr id="13" name="callout"/>
-          <p:cNvSpPr/>
-          <p:nvPr/>
-        </p:nvSpPr>
-        <p:spPr>
-          <a:xfrm>
-            <a:off x="548640" y="5303520"/>
-            <a:ext cx="11091672" cy="457200"/>
-          </a:xfrm>
-          <a:prstGeom prst="rect">
-            <a:avLst/>
-          </a:prstGeom>
-          <a:solidFill>
-            <a:srgbClr val="EEF1F7"/>
-          </a:solidFill>
-          <a:ln w="12700">
-            <a:solidFill>
-              <a:srgbClr val="EEF1F7"/>
-            </a:solidFill>
-            <a:prstDash val="solid"/>
-          </a:ln>
-        </p:spPr>
-      </p:sp>
-      <p:sp>
-        <p:nvSpPr>
-          <p:cNvPr id="14" name="Text 12"/>
-          <p:cNvSpPr txBox="1"/>
-          <p:nvPr/>
-        </p:nvSpPr>
-        <p:spPr>
-          <a:xfrm>
-            <a:off x="731520" y="5303520"/>
-            <a:ext cx="10789920" cy="457200"/>
-          </a:xfrm>
-          <a:prstGeom prst="rect">
-            <a:avLst/>
-          </a:prstGeom>
-          <a:noFill/>
-          <a:ln/>
-        </p:spPr>
-        <p:txBody>
-          <a:bodyPr wrap="square" lIns="0" tIns="0" rIns="0" bIns="0" rtlCol="0" anchor="ctr"/>
-          <a:lstStyle/>
-          <a:p>
-            <a:pPr indent="0" marL="0">
-              <a:buNone/>
-            </a:pPr>
-            <a:r>
-              <a:rPr lang="en-US" sz="1300" b="1" dirty="0">
-                <a:solidFill>
-                  <a:srgbClr val="1B2A5C"/>
-                </a:solidFill>
-              </a:rPr>
-              <a:t>Go only if every gate passes and the measured value makes economic profit positive — otherwise we stop with nothing lost.</a:t>
-            </a:r>
-            <a:endParaRPr lang="en-US" sz="1300" dirty="0"/>
-          </a:p>
-        </p:txBody>
-      </p:sp>
-      <p:sp>
-        <p:nvSpPr>
-          <p:cNvPr id="25" name="Slide Number Placeholder 0"/>
-          <p:cNvSpPr>
-            <a:spLocks noGrp="1"/>
-          </p:cNvSpPr>
-          <p:nvPr>
-            <p:ph type="sldNum" sz="quarter" idx="4294967295"/>
-          </p:nvPr>
-        </p:nvSpPr>
-        <p:spPr>
-          <a:xfrm>
-            <a:off x="11201400" y="6400800"/>
-            <a:ext cx="457200" cy="274320"/>
-          </a:xfrm>
-          <a:prstGeom prst="rect">
-            <a:avLst/>
-          </a:prstGeom>
-          <a:extLst>
-            <a:ext uri="{C572A759-6A51-4108-AA02-DFA0A04FC94B}">
-              <ma14:wrappingTextBoxFlag xmlns:ma14="http://schemas.microsoft.com/office/mac/drawingml/2011/main" val="0"/>
-            </a:ext>
-          </a:extLst>
-        </p:spPr>
-        <p:txBody>
-          <a:bodyPr/>
-          <a:lstStyle>
-            <a:lvl1pPr>
-              <a:defRPr sz="900">
-                <a:solidFill>
-                  <a:srgbClr val="6B6B6B"/>
-                </a:solidFill>
-              </a:defRPr>
-            </a:lvl1pPr>
-          </a:lstStyle>
-          <a:p>
-            <a:pPr algn="r"/>
-            <a:fld id="{F7021451-1387-4CA6-816F-3879F97B5CBC}" type="slidenum">
-              <a:rPr b="0" lang="en-US"/>
-              <a:t>12</a:t>
-            </a:fld>
-            <a:endParaRPr lang="en-US"/>
-          </a:p>
-        </p:txBody>
-      </p:sp>
-    </p:spTree>
-  </p:cSld>
-  <p:clrMapOvr>
-    <a:masterClrMapping/>
-  </p:clrMapOvr>
-</p:sld>
-</file>
-
-<file path=ppt/slides/slide13.xml><?xml version="1.0" encoding="utf-8"?>
-<p:sld xmlns:a="http://schemas.openxmlformats.org/drawingml/2006/main" xmlns:r="http://schemas.openxmlformats.org/officeDocument/2006/relationships" xmlns:p="http://schemas.openxmlformats.org/presentationml/2006/main">
-  <p:cSld name="Slide 13">
-    <p:spTree>
-      <p:nvGrpSpPr>
-        <p:cNvPr id="1" name=""/>
-        <p:cNvGrpSpPr/>
-        <p:nvPr/>
-      </p:nvGrpSpPr>
-      <p:grpSpPr>
-        <a:xfrm>
-          <a:off x="0" y="0"/>
-          <a:ext cx="0" cy="0"/>
-          <a:chOff x="0" y="0"/>
-          <a:chExt cx="0" cy="0"/>
-        </a:xfrm>
-      </p:grpSpPr>
-      <p:sp>
-        <p:nvSpPr>
-          <p:cNvPr id="2" name="Text 0"/>
-          <p:cNvSpPr/>
-          <p:nvPr>
-            <p:ph idx="100" type="body" hasCustomPrompt="1"/>
-          </p:nvPr>
-        </p:nvSpPr>
-        <p:spPr>
-          <a:xfrm>
-            <a:off x="548640" y="292608"/>
-            <a:ext cx="9144000" cy="274320"/>
-          </a:xfrm>
-          <a:prstGeom prst="rect">
-            <a:avLst/>
-          </a:prstGeom>
-          <a:noFill/>
-          <a:ln/>
-        </p:spPr>
-        <p:txBody>
-          <a:bodyPr wrap="square" lIns="0" tIns="0" rIns="0" bIns="0" rtlCol="0" anchor="ctr"/>
-          <a:lstStyle/>
-          <a:p>
-            <a:pPr algn="l" indent="0" marL="0">
-              <a:buNone/>
-            </a:pPr>
-            <a:r>
-              <a:rPr lang="en-US" sz="1000" b="1" spc="200" kern="0" dirty="0">
-                <a:solidFill>
-                  <a:schemeClr val="accent4"/>
-                </a:solidFill>
-              </a:rPr>
-              <a:t>TEAM</a:t>
-            </a:r>
-            <a:endParaRPr lang="en-US" sz="1000" dirty="0"/>
-          </a:p>
-        </p:txBody>
-      </p:sp>
-      <p:sp>
-        <p:nvSpPr>
-          <p:cNvPr id="3" name="Text 0"/>
-          <p:cNvSpPr/>
-          <p:nvPr>
-            <p:ph idx="101" type="title" hasCustomPrompt="1"/>
-          </p:nvPr>
-        </p:nvSpPr>
-        <p:spPr>
-          <a:xfrm>
-            <a:off x="548640" y="566928"/>
-            <a:ext cx="11064240" cy="868680"/>
-          </a:xfrm>
-          <a:prstGeom prst="rect">
-            <a:avLst/>
-          </a:prstGeom>
-          <a:noFill/>
-          <a:ln/>
-        </p:spPr>
-        <p:txBody>
-          <a:bodyPr wrap="square" lIns="0" tIns="0" rIns="0" bIns="0" rtlCol="0" anchor="t"/>
-          <a:lstStyle/>
-          <a:p>
-            <a:pPr algn="l" indent="0" marL="0">
-              <a:buNone/>
-            </a:pPr>
-            <a:r>
-              <a:rPr lang="en-US" sz="2200" b="1" dirty="0">
-                <a:solidFill>
-                  <a:schemeClr val="tx2"/>
-                </a:solidFill>
-              </a:rPr>
-              <a:t>Two founders across Brazil and Rome — finance and pricing on one side, HNW clients and hospitality on the other</a:t>
-            </a:r>
-            <a:endParaRPr lang="en-US" sz="2200" dirty="0"/>
-          </a:p>
-        </p:txBody>
-      </p:sp>
-      <p:sp>
-        <p:nvSpPr>
-          <p:cNvPr id="4" name="Text 2"/>
-          <p:cNvSpPr txBox="1"/>
-          <p:nvPr/>
-        </p:nvSpPr>
-        <p:spPr>
-          <a:xfrm>
-            <a:off x="548640" y="6291072"/>
-            <a:ext cx="10424160" cy="411480"/>
-          </a:xfrm>
-          <a:prstGeom prst="rect">
-            <a:avLst/>
-          </a:prstGeom>
-          <a:noFill/>
-          <a:ln/>
-        </p:spPr>
-        <p:txBody>
-          <a:bodyPr wrap="square" lIns="0" tIns="0" rIns="0" bIns="0" rtlCol="0" anchor="t"/>
-          <a:lstStyle/>
-          <a:p>
-            <a:pPr indent="0" marL="0">
-              <a:buNone/>
-            </a:pPr>
-            <a:r>
-              <a:rPr lang="en-US" sz="850" dirty="0">
-                <a:solidFill>
-                  <a:srgbClr val="6B6B6B"/>
-                </a:solidFill>
-              </a:rPr>
-              <a:t>Source: Founders’ LinkedIn profiles and résumé (Oct 2026).</a:t>
-            </a:r>
-            <a:endParaRPr lang="en-US" sz="850" dirty="0"/>
-          </a:p>
-        </p:txBody>
-      </p:sp>
-      <p:sp>
-        <p:nvSpPr>
-          <p:cNvPr id="5" name="Shape 3"/>
-          <p:cNvSpPr/>
-          <p:nvPr/>
-        </p:nvSpPr>
-        <p:spPr>
-          <a:xfrm>
-            <a:off x="548640" y="1783080"/>
-            <a:ext cx="5486400" cy="3017520"/>
+            <a:off x="4297680" y="1783080"/>
+            <a:ext cx="3611880" cy="3017520"/>
           </a:xfrm>
           <a:prstGeom prst="rect">
             <a:avLst/>
@@ -5130,14 +5902,14 @@
       </p:sp>
       <p:sp>
         <p:nvSpPr>
-          <p:cNvPr id="6" name="Text 4"/>
+          <p:cNvPr id="9" name="Text 7"/>
           <p:cNvSpPr txBox="1"/>
           <p:nvPr/>
         </p:nvSpPr>
         <p:spPr>
           <a:xfrm>
-            <a:off x="777240" y="1920240"/>
-            <a:ext cx="5029200" cy="777240"/>
+            <a:off x="4480560" y="1920240"/>
+            <a:ext cx="3246120" cy="822960"/>
           </a:xfrm>
           <a:prstGeom prst="rect">
             <a:avLst/>
@@ -5153,41 +5925,41 @@
               <a:buNone/>
             </a:pPr>
             <a:r>
-              <a:rPr lang="en-US" sz="2000" b="1" dirty="0">
+              <a:rPr lang="en-US" sz="1700" b="1" dirty="0">
                 <a:solidFill>
                   <a:srgbClr val="1B2A5C"/>
                 </a:solidFill>
               </a:rPr>
-              <a:t>Calebe Garcia</a:t>
-            </a:r>
-            <a:endParaRPr lang="en-US" sz="2000" dirty="0"/>
-          </a:p>
-          <a:p>
-            <a:pPr indent="0" marL="0">
-              <a:buNone/>
-            </a:pPr>
-            <a:r>
-              <a:rPr lang="en-US" sz="1200" i="1" dirty="0">
+              <a:t>Regional partner · Rome</a:t>
+            </a:r>
+            <a:endParaRPr lang="en-US" sz="1700" dirty="0"/>
+          </a:p>
+          <a:p>
+            <a:pPr indent="0" marL="0">
+              <a:buNone/>
+            </a:pPr>
+            <a:r>
+              <a:rPr lang="en-US" sz="1100" i="1" dirty="0">
                 <a:solidFill>
                   <a:srgbClr val="8C6D23"/>
                 </a:solidFill>
               </a:rPr>
-              <a:t>Santa Catarina, Brazil</a:t>
-            </a:r>
-            <a:endParaRPr lang="en-US" sz="2000" dirty="0"/>
-          </a:p>
-        </p:txBody>
-      </p:sp>
-      <p:sp>
-        <p:nvSpPr>
-          <p:cNvPr id="7" name="Text 5"/>
+              <a:t>Partner seat</a:t>
+            </a:r>
+            <a:endParaRPr lang="en-US" sz="1700" dirty="0"/>
+          </a:p>
+        </p:txBody>
+      </p:sp>
+      <p:sp>
+        <p:nvSpPr>
+          <p:cNvPr id="10" name="Text 8"/>
           <p:cNvSpPr txBox="1"/>
           <p:nvPr/>
         </p:nvSpPr>
         <p:spPr>
           <a:xfrm>
-            <a:off x="777240" y="2743200"/>
-            <a:ext cx="5029200" cy="1920240"/>
+            <a:off x="4480560" y="2788920"/>
+            <a:ext cx="3246120" cy="1920240"/>
           </a:xfrm>
           <a:prstGeom prst="rect">
             <a:avLst/>
@@ -5207,14 +5979,14 @@
               <a:buChar char="•"/>
             </a:pPr>
             <a:r>
-              <a:rPr lang="en-US" sz="1200" dirty="0">
-                <a:solidFill>
-                  <a:srgbClr val="222222"/>
-                </a:solidFill>
-              </a:rPr>
-              <a:t>10+ years in investment banking, corporate finance and strategy, incl. Advent International and Whirlpool</a:t>
-            </a:r>
-            <a:endParaRPr lang="en-US" sz="1200" dirty="0"/>
+              <a:rPr lang="en-US" sz="1150" dirty="0">
+                <a:solidFill>
+                  <a:srgbClr val="1B2A5C"/>
+                </a:solidFill>
+              </a:rPr>
+              <a:t>Private doors and HNW client relationships in Rome</a:t>
+            </a:r>
+            <a:endParaRPr lang="en-US" sz="1150" dirty="0"/>
           </a:p>
           <a:p>
             <a:pPr marL="342900" indent="-342900">
@@ -5225,14 +5997,14 @@
               <a:buChar char="•"/>
             </a:pPr>
             <a:r>
-              <a:rPr lang="en-US" sz="1200" dirty="0">
-                <a:solidFill>
-                  <a:srgbClr val="222222"/>
-                </a:solidFill>
-              </a:rPr>
-              <a:t>MBA and Master of Finance (Hult)</a:t>
-            </a:r>
-            <a:endParaRPr lang="en-US" sz="1200" dirty="0"/>
+              <a:rPr lang="en-US" sz="1150" dirty="0">
+                <a:solidFill>
+                  <a:srgbClr val="1B2A5C"/>
+                </a:solidFill>
+              </a:rPr>
+              <a:t>Hospitality operations and B2B pricing</a:t>
+            </a:r>
+            <a:endParaRPr lang="en-US" sz="1150" dirty="0"/>
           </a:p>
           <a:p>
             <a:pPr marL="342900" indent="-342900">
@@ -5243,27 +6015,27 @@
               <a:buChar char="•"/>
             </a:pPr>
             <a:r>
-              <a:rPr lang="en-US" sz="1200" dirty="0">
-                <a:solidFill>
-                  <a:srgbClr val="222222"/>
-                </a:solidFill>
-              </a:rPr>
-              <a:t>Portuguese, Spanish and English</a:t>
-            </a:r>
-            <a:endParaRPr lang="en-US" sz="1200" dirty="0"/>
-          </a:p>
-        </p:txBody>
-      </p:sp>
-      <p:sp>
-        <p:nvSpPr>
-          <p:cNvPr id="8" name="Shape 6"/>
+              <a:rPr lang="en-US" sz="1150" dirty="0">
+                <a:solidFill>
+                  <a:srgbClr val="1B2A5C"/>
+                </a:solidFill>
+              </a:rPr>
+              <a:t>Italian and English</a:t>
+            </a:r>
+            <a:endParaRPr lang="en-US" sz="1150" dirty="0"/>
+          </a:p>
+        </p:txBody>
+      </p:sp>
+      <p:sp>
+        <p:nvSpPr>
+          <p:cNvPr id="11" name="Shape 9"/>
           <p:cNvSpPr/>
           <p:nvPr/>
         </p:nvSpPr>
         <p:spPr>
           <a:xfrm>
-            <a:off x="6144768" y="1783080"/>
-            <a:ext cx="5486400" cy="3017520"/>
+            <a:off x="8046720" y="1783080"/>
+            <a:ext cx="3611880" cy="3017520"/>
           </a:xfrm>
           <a:prstGeom prst="rect">
             <a:avLst/>
@@ -5281,14 +6053,14 @@
       </p:sp>
       <p:sp>
         <p:nvSpPr>
-          <p:cNvPr id="9" name="Text 7"/>
+          <p:cNvPr id="12" name="Text 10"/>
           <p:cNvSpPr txBox="1"/>
           <p:nvPr/>
         </p:nvSpPr>
         <p:spPr>
           <a:xfrm>
-            <a:off x="6373368" y="1920240"/>
-            <a:ext cx="5029200" cy="777240"/>
+            <a:off x="8229600" y="1920240"/>
+            <a:ext cx="3246120" cy="822960"/>
           </a:xfrm>
           <a:prstGeom prst="rect">
             <a:avLst/>
@@ -5304,41 +6076,41 @@
               <a:buNone/>
             </a:pPr>
             <a:r>
-              <a:rPr lang="en-US" sz="2000" b="1" dirty="0">
+              <a:rPr lang="en-US" sz="1700" b="1" dirty="0">
                 <a:solidFill>
                   <a:srgbClr val="1B2A5C"/>
                 </a:solidFill>
               </a:rPr>
-              <a:t>Francesco Ficorilli</a:t>
-            </a:r>
-            <a:endParaRPr lang="en-US" sz="2000" dirty="0"/>
-          </a:p>
-          <a:p>
-            <a:pPr indent="0" marL="0">
-              <a:buNone/>
-            </a:pPr>
-            <a:r>
-              <a:rPr lang="en-US" sz="1200" i="1" dirty="0">
+              <a:t>Regional partner · Southern Italy</a:t>
+            </a:r>
+            <a:endParaRPr lang="en-US" sz="1700" dirty="0"/>
+          </a:p>
+          <a:p>
+            <a:pPr indent="0" marL="0">
+              <a:buNone/>
+            </a:pPr>
+            <a:r>
+              <a:rPr lang="en-US" sz="1100" i="1" dirty="0">
                 <a:solidFill>
                   <a:srgbClr val="8C6D23"/>
                 </a:solidFill>
               </a:rPr>
-              <a:t>Rome, Italy</a:t>
-            </a:r>
-            <a:endParaRPr lang="en-US" sz="2000" dirty="0"/>
-          </a:p>
-        </p:txBody>
-      </p:sp>
-      <p:sp>
-        <p:nvSpPr>
-          <p:cNvPr id="10" name="Text 8"/>
+              <a:t>Partner seat · to be confirmed</a:t>
+            </a:r>
+            <a:endParaRPr lang="en-US" sz="1700" dirty="0"/>
+          </a:p>
+        </p:txBody>
+      </p:sp>
+      <p:sp>
+        <p:nvSpPr>
+          <p:cNvPr id="13" name="Text 11"/>
           <p:cNvSpPr txBox="1"/>
           <p:nvPr/>
         </p:nvSpPr>
         <p:spPr>
           <a:xfrm>
-            <a:off x="6373368" y="2743200"/>
-            <a:ext cx="5029200" cy="1920240"/>
+            <a:off x="8229600" y="2788920"/>
+            <a:ext cx="3246120" cy="1920240"/>
           </a:xfrm>
           <a:prstGeom prst="rect">
             <a:avLst/>
@@ -5358,14 +6130,14 @@
               <a:buChar char="•"/>
             </a:pPr>
             <a:r>
-              <a:rPr lang="en-US" sz="1200" dirty="0">
-                <a:solidFill>
-                  <a:srgbClr val="222222"/>
-                </a:solidFill>
-              </a:rPr>
-              <a:t>Luxury real-estate advisor at Berkshire Hathaway HomeServices: historic palazzi and HNW clients</a:t>
-            </a:r>
-            <a:endParaRPr lang="en-US" sz="1200" dirty="0"/>
+              <a:rPr lang="en-US" sz="1150" dirty="0">
+                <a:solidFill>
+                  <a:srgbClr val="1B2A5C"/>
+                </a:solidFill>
+              </a:rPr>
+              <a:t>Naples, Amalfi Coast and Capri supply on the ground</a:t>
+            </a:r>
+            <a:endParaRPr lang="en-US" sz="1150" dirty="0"/>
           </a:p>
           <a:p>
             <a:pPr marL="342900" indent="-342900">
@@ -5376,14 +6148,14 @@
               <a:buChar char="•"/>
             </a:pPr>
             <a:r>
-              <a:rPr lang="en-US" sz="1200" dirty="0">
-                <a:solidFill>
-                  <a:srgbClr val="222222"/>
-                </a:solidFill>
-              </a:rPr>
-              <a:t>Founder of Monster Burger and Monster Hospitality Group (12 years in hospitality); co-founder of GRAFF (B2B pricing)</a:t>
-            </a:r>
-            <a:endParaRPr lang="en-US" sz="1200" dirty="0"/>
+              <a:rPr lang="en-US" sz="1150" dirty="0">
+                <a:solidFill>
+                  <a:srgbClr val="1B2A5C"/>
+                </a:solidFill>
+              </a:rPr>
+              <a:t>Local hosts, boats, chefs and access</a:t>
+            </a:r>
+            <a:endParaRPr lang="en-US" sz="1150" dirty="0"/>
           </a:p>
           <a:p>
             <a:pPr marL="342900" indent="-342900">
@@ -5394,20 +6166,20 @@
               <a:buChar char="•"/>
             </a:pPr>
             <a:r>
-              <a:rPr lang="en-US" sz="1200" dirty="0">
-                <a:solidFill>
-                  <a:srgbClr val="222222"/>
-                </a:solidFill>
-              </a:rPr>
-              <a:t>MBA and MS Finance (Hult); Italian and English</a:t>
-            </a:r>
-            <a:endParaRPr lang="en-US" sz="1200" dirty="0"/>
+              <a:rPr lang="en-US" sz="1150" dirty="0">
+                <a:solidFill>
+                  <a:srgbClr val="1B2A5C"/>
+                </a:solidFill>
+              </a:rPr>
+              <a:t>Italian</a:t>
+            </a:r>
+            <a:endParaRPr lang="en-US" sz="1150" dirty="0"/>
           </a:p>
         </p:txBody>
       </p:sp>
       <p:graphicFrame>
         <p:nvGraphicFramePr>
-          <p:cNvPr id="14" name="Table 0"/>
+          <p:cNvPr id="15" name="Table 0"/>
           <p:cNvGraphicFramePr>
             <a:graphicFrameLocks noGrp="1"/>
           </p:cNvGraphicFramePr>
@@ -5528,7 +6300,7 @@
                             <a:srgbClr val="1B2A5C"/>
                           </a:solidFill>
                         </a:rPr>
-                        <a:t>An operator to run relief scheduling and staff welfare</a:t>
+                        <a:t>An operator to run relief scheduling, staff welfare and supplier onboarding</a:t>
                       </a:r>
                       <a:endParaRPr lang="en-US" sz="1100" dirty="0"/>
                     </a:p>
@@ -5638,7 +6410,7 @@
             <a:pPr algn="r"/>
             <a:fld id="{F7021451-1387-4CA6-816F-3879F97B5CBC}" type="slidenum">
               <a:rPr b="0" lang="en-US"/>
-              <a:t>13</a:t>
+              <a:t>14</a:t>
             </a:fld>
             <a:endParaRPr lang="en-US"/>
           </a:p>
@@ -5652,9 +6424,9 @@
 </p:sld>
 </file>
 
-<file path=ppt/slides/slide14.xml><?xml version="1.0" encoding="utf-8"?>
+<file path=ppt/slides/slide15.xml><?xml version="1.0" encoding="utf-8"?>
 <p:sld xmlns:a="http://schemas.openxmlformats.org/drawingml/2006/main" xmlns:r="http://schemas.openxmlformats.org/officeDocument/2006/relationships" xmlns:p="http://schemas.openxmlformats.org/presentationml/2006/main">
-  <p:cSld name="Slide 14">
+  <p:cSld name="Slide 15">
     <p:spTree>
       <p:nvGrpSpPr>
         <p:cNvPr id="1" name=""/>
@@ -5735,7 +6507,7 @@
                   <a:srgbClr val="FFFFFF"/>
                 </a:solidFill>
               </a:rPr>
-              <a:t>The ask: three pilot families, one channel, three partners — no capital until the gate passes</a:t>
+              <a:t>The ask: a partner, pilot families and suppliers in each Wave-1 region — no capital until the gate passes</a:t>
             </a:r>
             <a:endParaRPr lang="en-US" sz="2600" dirty="0"/>
           </a:p>
@@ -5750,7 +6522,7 @@
         <p:spPr>
           <a:xfrm>
             <a:off x="548640" y="2011680"/>
-            <a:ext cx="3566160" cy="2743200"/>
+            <a:ext cx="2697480" cy="2743200"/>
           </a:xfrm>
           <a:prstGeom prst="rect">
             <a:avLst/>
@@ -5774,8 +6546,8 @@
         </p:nvSpPr>
         <p:spPr>
           <a:xfrm>
-            <a:off x="777240" y="2148840"/>
-            <a:ext cx="3108960" cy="2468880"/>
+            <a:off x="731520" y="2148840"/>
+            <a:ext cx="2331720" cy="2468880"/>
           </a:xfrm>
           <a:prstGeom prst="rect">
             <a:avLst/>
@@ -5794,14 +6566,14 @@
               <a:buNone/>
             </a:pPr>
             <a:r>
-              <a:rPr lang="en-US" sz="4400" b="1" dirty="0">
+              <a:rPr lang="en-US" sz="4000" b="1" dirty="0">
                 <a:solidFill>
                   <a:srgbClr val="C9A24B"/>
                 </a:solidFill>
               </a:rPr>
-              <a:t>2–3</a:t>
-            </a:r>
-            <a:endParaRPr lang="en-US" sz="4400" dirty="0"/>
+              <a:t>1</a:t>
+            </a:r>
+            <a:endParaRPr lang="en-US" sz="4000" dirty="0"/>
           </a:p>
           <a:p>
             <a:pPr indent="0" marL="0">
@@ -5811,14 +6583,14 @@
               <a:buNone/>
             </a:pPr>
             <a:r>
-              <a:rPr lang="en-US" sz="1800" b="1" dirty="0">
+              <a:rPr lang="en-US" sz="1500" b="1" dirty="0">
                 <a:solidFill>
                   <a:srgbClr val="FFFFFF"/>
                 </a:solidFill>
               </a:rPr>
-              <a:t>pilot families</a:t>
-            </a:r>
-            <a:endParaRPr lang="en-US" sz="4400" dirty="0"/>
+              <a:t>partner per region</a:t>
+            </a:r>
+            <a:endParaRPr lang="en-US" sz="4000" dirty="0"/>
           </a:p>
           <a:p>
             <a:pPr indent="0" marL="0">
@@ -5828,14 +6600,14 @@
               <a:buNone/>
             </a:pPr>
             <a:r>
-              <a:rPr lang="en-US" sz="1250" dirty="0">
+              <a:rPr lang="en-US" sz="1150" dirty="0">
                 <a:solidFill>
                   <a:srgbClr val="B7C6DE"/>
                 </a:solidFill>
               </a:rPr>
-              <a:t>who pay a deposit for a London relief membership</a:t>
-            </a:r>
-            <a:endParaRPr lang="en-US" sz="4400" dirty="0"/>
+              <a:t>Rome and Southern Italy, alongside Santa Catarina</a:t>
+            </a:r>
+            <a:endParaRPr lang="en-US" sz="4000" dirty="0"/>
           </a:p>
         </p:txBody>
       </p:sp>
@@ -5847,8 +6619,8 @@
         </p:nvSpPr>
         <p:spPr>
           <a:xfrm>
-            <a:off x="4297680" y="2011680"/>
-            <a:ext cx="3566160" cy="2743200"/>
+            <a:off x="3346704" y="2011680"/>
+            <a:ext cx="2697480" cy="2743200"/>
           </a:xfrm>
           <a:prstGeom prst="rect">
             <a:avLst/>
@@ -5872,8 +6644,8 @@
         </p:nvSpPr>
         <p:spPr>
           <a:xfrm>
-            <a:off x="4526280" y="2148840"/>
-            <a:ext cx="3108960" cy="2468880"/>
+            <a:off x="3529584" y="2148840"/>
+            <a:ext cx="2331720" cy="2468880"/>
           </a:xfrm>
           <a:prstGeom prst="rect">
             <a:avLst/>
@@ -5892,14 +6664,14 @@
               <a:buNone/>
             </a:pPr>
             <a:r>
-              <a:rPr lang="en-US" sz="4400" b="1" dirty="0">
+              <a:rPr lang="en-US" sz="4000" b="1" dirty="0">
                 <a:solidFill>
                   <a:srgbClr val="C9A24B"/>
                 </a:solidFill>
               </a:rPr>
-              <a:t>1</a:t>
-            </a:r>
-            <a:endParaRPr lang="en-US" sz="4400" dirty="0"/>
+              <a:t>2–3</a:t>
+            </a:r>
+            <a:endParaRPr lang="en-US" sz="4000" dirty="0"/>
           </a:p>
           <a:p>
             <a:pPr indent="0" marL="0">
@@ -5909,14 +6681,14 @@
               <a:buNone/>
             </a:pPr>
             <a:r>
-              <a:rPr lang="en-US" sz="1800" b="1" dirty="0">
+              <a:rPr lang="en-US" sz="1500" b="1" dirty="0">
                 <a:solidFill>
                   <a:srgbClr val="FFFFFF"/>
                 </a:solidFill>
               </a:rPr>
-              <a:t>vouching channel</a:t>
-            </a:r>
-            <a:endParaRPr lang="en-US" sz="4400" dirty="0"/>
+              <a:t>pilot families per region</a:t>
+            </a:r>
+            <a:endParaRPr lang="en-US" sz="4000" dirty="0"/>
           </a:p>
           <a:p>
             <a:pPr indent="0" marL="0">
@@ -5926,14 +6698,14 @@
               <a:buNone/>
             </a:pPr>
             <a:r>
-              <a:rPr lang="en-US" sz="1250" dirty="0">
+              <a:rPr lang="en-US" sz="1150" dirty="0">
                 <a:solidFill>
                   <a:srgbClr val="B7C6DE"/>
                 </a:solidFill>
               </a:rPr>
-              <a:t>a family-office directory, private bank or multi-family office</a:t>
-            </a:r>
-            <a:endParaRPr lang="en-US" sz="4400" dirty="0"/>
+              <a:t>who pay a deposit for staff + compliance</a:t>
+            </a:r>
+            <a:endParaRPr lang="en-US" sz="4000" dirty="0"/>
           </a:p>
         </p:txBody>
       </p:sp>
@@ -5945,8 +6717,8 @@
         </p:nvSpPr>
         <p:spPr>
           <a:xfrm>
-            <a:off x="8046720" y="2011680"/>
-            <a:ext cx="3566160" cy="2743200"/>
+            <a:off x="6144768" y="2011680"/>
+            <a:ext cx="2697480" cy="2743200"/>
           </a:xfrm>
           <a:prstGeom prst="rect">
             <a:avLst/>
@@ -5970,8 +6742,8 @@
         </p:nvSpPr>
         <p:spPr>
           <a:xfrm>
-            <a:off x="8275320" y="2148840"/>
-            <a:ext cx="3108960" cy="2468880"/>
+            <a:off x="6327648" y="2148840"/>
+            <a:ext cx="2331720" cy="2468880"/>
           </a:xfrm>
           <a:prstGeom prst="rect">
             <a:avLst/>
@@ -5990,14 +6762,14 @@
               <a:buNone/>
             </a:pPr>
             <a:r>
-              <a:rPr lang="en-US" sz="4400" b="1" dirty="0">
+              <a:rPr lang="en-US" sz="4000" b="1" dirty="0">
                 <a:solidFill>
                   <a:srgbClr val="C9A24B"/>
                 </a:solidFill>
               </a:rPr>
-              <a:t>3</a:t>
-            </a:r>
-            <a:endParaRPr lang="en-US" sz="4400" dirty="0"/>
+              <a:t>20</a:t>
+            </a:r>
+            <a:endParaRPr lang="en-US" sz="4000" dirty="0"/>
           </a:p>
           <a:p>
             <a:pPr indent="0" marL="0">
@@ -6007,14 +6779,14 @@
               <a:buNone/>
             </a:pPr>
             <a:r>
-              <a:rPr lang="en-US" sz="1800" b="1" dirty="0">
+              <a:rPr lang="en-US" sz="1500" b="1" dirty="0">
                 <a:solidFill>
                   <a:srgbClr val="FFFFFF"/>
                 </a:solidFill>
               </a:rPr>
-              <a:t>rails partners</a:t>
-            </a:r>
-            <a:endParaRPr lang="en-US" sz="4400" dirty="0"/>
+              <a:t>supplier letters per region</a:t>
+            </a:r>
+            <a:endParaRPr lang="en-US" sz="4000" dirty="0"/>
           </a:p>
           <a:p>
             <a:pPr indent="0" marL="0">
@@ -6024,20 +6796,118 @@
               <a:buNone/>
             </a:pPr>
             <a:r>
-              <a:rPr lang="en-US" sz="1250" dirty="0">
+              <a:rPr lang="en-US" sz="1150" dirty="0">
                 <a:solidFill>
                   <a:srgbClr val="B7C6DE"/>
                 </a:solidFill>
               </a:rPr>
-              <a:t>employment or immigration counsel, an employer of record, an insurance broker</a:t>
-            </a:r>
-            <a:endParaRPr lang="en-US" sz="4400" dirty="0"/>
-          </a:p>
-        </p:txBody>
-      </p:sp>
-      <p:sp>
-        <p:nvSpPr>
-          <p:cNvPr id="10" name="Text 8"/>
+              <a:t>from our named target lists; net rates for free content, paid only on stays</a:t>
+            </a:r>
+            <a:endParaRPr lang="en-US" sz="4000" dirty="0"/>
+          </a:p>
+        </p:txBody>
+      </p:sp>
+      <p:sp>
+        <p:nvSpPr>
+          <p:cNvPr id="10" name="Shape 8"/>
+          <p:cNvSpPr/>
+          <p:nvPr/>
+        </p:nvSpPr>
+        <p:spPr>
+          <a:xfrm>
+            <a:off x="8942832" y="2011680"/>
+            <a:ext cx="2697480" cy="2743200"/>
+          </a:xfrm>
+          <a:prstGeom prst="rect">
+            <a:avLst/>
+          </a:prstGeom>
+          <a:solidFill>
+            <a:srgbClr val="243672"/>
+          </a:solidFill>
+          <a:ln w="12700">
+            <a:solidFill>
+              <a:srgbClr val="243672"/>
+            </a:solidFill>
+            <a:prstDash val="solid"/>
+          </a:ln>
+        </p:spPr>
+      </p:sp>
+      <p:sp>
+        <p:nvSpPr>
+          <p:cNvPr id="11" name="Text 9"/>
+          <p:cNvSpPr txBox="1"/>
+          <p:nvPr/>
+        </p:nvSpPr>
+        <p:spPr>
+          <a:xfrm>
+            <a:off x="9125712" y="2148840"/>
+            <a:ext cx="2331720" cy="2468880"/>
+          </a:xfrm>
+          <a:prstGeom prst="rect">
+            <a:avLst/>
+          </a:prstGeom>
+          <a:noFill/>
+          <a:ln/>
+        </p:spPr>
+        <p:txBody>
+          <a:bodyPr wrap="square" lIns="0" tIns="0" rIns="0" bIns="0" rtlCol="0" anchor="t"/>
+          <a:lstStyle/>
+          <a:p>
+            <a:pPr indent="0" marL="0">
+              <a:spcAft>
+                <a:spcPts val="600"/>
+              </a:spcAft>
+              <a:buNone/>
+            </a:pPr>
+            <a:r>
+              <a:rPr lang="en-US" sz="4000" b="1" dirty="0">
+                <a:solidFill>
+                  <a:srgbClr val="C9A24B"/>
+                </a:solidFill>
+              </a:rPr>
+              <a:t>3</a:t>
+            </a:r>
+            <a:endParaRPr lang="en-US" sz="4000" dirty="0"/>
+          </a:p>
+          <a:p>
+            <a:pPr indent="0" marL="0">
+              <a:spcAft>
+                <a:spcPts val="600"/>
+              </a:spcAft>
+              <a:buNone/>
+            </a:pPr>
+            <a:r>
+              <a:rPr lang="en-US" sz="1500" b="1" dirty="0">
+                <a:solidFill>
+                  <a:srgbClr val="FFFFFF"/>
+                </a:solidFill>
+              </a:rPr>
+              <a:t>rails partners</a:t>
+            </a:r>
+            <a:endParaRPr lang="en-US" sz="4000" dirty="0"/>
+          </a:p>
+          <a:p>
+            <a:pPr indent="0" marL="0">
+              <a:spcAft>
+                <a:spcPts val="600"/>
+              </a:spcAft>
+              <a:buNone/>
+            </a:pPr>
+            <a:r>
+              <a:rPr lang="en-US" sz="1150" dirty="0">
+                <a:solidFill>
+                  <a:srgbClr val="B7C6DE"/>
+                </a:solidFill>
+              </a:rPr>
+              <a:t>counsel, employer of record, insurance broker</a:t>
+            </a:r>
+            <a:endParaRPr lang="en-US" sz="4000" dirty="0"/>
+          </a:p>
+        </p:txBody>
+      </p:sp>
+      <p:sp>
+        <p:nvSpPr>
+          <p:cNvPr id="12" name="Text 10"/>
           <p:cNvSpPr txBox="1"/>
           <p:nvPr/>
         </p:nvSpPr>
@@ -6073,7 +6943,7 @@
       </p:sp>
       <p:sp>
         <p:nvSpPr>
-          <p:cNvPr id="11" name="Text 9"/>
+          <p:cNvPr id="13" name="Text 11"/>
           <p:cNvSpPr txBox="1"/>
           <p:nvPr/>
         </p:nvSpPr>
@@ -6202,7 +7072,7 @@
                   <a:schemeClr val="tx2"/>
                 </a:solidFill>
               </a:rPr>
-              <a:t>Wealthy families move across borders — their trusted staff cannot follow them lawfully</a:t>
+              <a:t>A luxury journey is bought from a dozen vendors — and the people who travel with the family cannot follow lawfully</a:t>
             </a:r>
             <a:endParaRPr lang="en-US" sz="2200" dirty="0"/>
           </a:p>
@@ -6238,7 +7108,7 @@
                   <a:srgbClr val="6B6B6B"/>
                 </a:solidFill>
               </a:rPr>
-              <a:t>Source: Morgan &amp; Mallet, Beyond The Butler 2025/26 and agency pages (read 2026-10-06); GOV.UK Overseas Domestic Worker visa (2026); Home Office PQ55427 (Jun 2025); UAE Decree-Law 9/2022.</a:t>
+              <a:t>Source: Priceline (Jan 2024, n = 3,024); The Roman Guy and operator listings (Vatican); Morgan &amp; Mallet, Beyond The Butler 2025/26; press commentary on OneFlight (Sep 2026).</a:t>
             </a:r>
             <a:endParaRPr lang="en-US" sz="850" dirty="0"/>
           </a:p>
@@ -6299,7 +7169,7 @@
                   <a:srgbClr val="C9A24B"/>
                 </a:solidFill>
               </a:rPr>
-              <a:t>2.36%</a:t>
+              <a:t>16 hours</a:t>
             </a:r>
             <a:endParaRPr lang="en-US" sz="2600" dirty="0"/>
           </a:p>
@@ -6335,7 +7205,7 @@
                   <a:srgbClr val="FFFFFF"/>
                 </a:solidFill>
               </a:rPr>
-              <a:t>of one agency’s childcare candidates can work rotations; 4.82% travel regularly</a:t>
+              <a:t>to plan and book one trip — before any staff, access or paperwork</a:t>
             </a:r>
             <a:endParaRPr lang="en-US" sz="1200" dirty="0"/>
           </a:p>
@@ -6396,7 +7266,7 @@
                   <a:srgbClr val="1B2A5C"/>
                 </a:solidFill>
               </a:rPr>
-              <a:t>6 months</a:t>
+              <a:t>9–23×</a:t>
             </a:r>
             <a:endParaRPr lang="en-US" sz="2600" dirty="0"/>
           </a:p>
@@ -6432,7 +7302,7 @@
                   <a:srgbClr val="222222"/>
                 </a:solidFill>
               </a:rPr>
-              <a:t>maximum UK stay for a domestic worker — and 12 months’ prior work for the same employer is required</a:t>
+              <a:t>the standard ticket for private Vatican access: exclusivity is bought piece by piece</a:t>
             </a:r>
             <a:endParaRPr lang="en-US" sz="1200" dirty="0"/>
           </a:p>
@@ -6493,7 +7363,7 @@
                   <a:srgbClr val="1B2A5C"/>
                 </a:solidFill>
               </a:rPr>
-              <a:t>AED 50k–200k</a:t>
+              <a:t>2.36%</a:t>
             </a:r>
             <a:endParaRPr lang="en-US" sz="2600" dirty="0"/>
           </a:p>
@@ -6529,7 +7399,7 @@
                   <a:srgbClr val="222222"/>
                 </a:solidFill>
               </a:rPr>
-              <a:t>UAE fine for illegally employing a domestic worker (about US$13.6–54.5k)</a:t>
+              <a:t>of one agency’s childcare candidates can work rotations that follow the family</a:t>
             </a:r>
             <a:endParaRPr lang="en-US" sz="1200" dirty="0"/>
           </a:p>
@@ -6590,7 +7460,7 @@
                   <a:srgbClr val="1B2A5C"/>
                 </a:solidFill>
               </a:rPr>
-              <a:t>25–40%</a:t>
+              <a:t>~US$150M</a:t>
             </a:r>
             <a:endParaRPr lang="en-US" sz="2600" dirty="0"/>
           </a:p>
@@ -6626,7 +7496,7 @@
                   <a:srgbClr val="222222"/>
                 </a:solidFill>
               </a:rPr>
-              <a:t>travel premium families already pay staff to move with them</a:t>
+              <a:t>of deposits at risk when a private-aviation provider paused flights (Sep 2026)</a:t>
             </a:r>
             <a:endParaRPr lang="en-US" sz="1200" dirty="0"/>
           </a:p>
@@ -6662,7 +7532,7 @@
                   <a:srgbClr val="1B2A5C"/>
                 </a:solidFill>
               </a:rPr>
-              <a:t>Every move creates an immigration, employment and liability question — and today the family answers it alone, trip by trip.</a:t>
+              <a:t>Families stitch it together themselves — and carry the legal and financial risk at every border.</a:t>
             </a:r>
             <a:endParaRPr lang="en-US" sz="1500" dirty="0"/>
           </a:p>
@@ -6808,7 +7678,7 @@
                   <a:schemeClr val="tx2"/>
                 </a:solidFill>
               </a:rPr>
-              <a:t>Multi-home families and the family offices that run them: few in number, very high in stakes</a:t>
+              <a:t>Two sides: multi-home families who need it all to work, and suppliers who want qualified guests without paying 16–30% to platforms</a:t>
             </a:r>
             <a:endParaRPr lang="en-US" sz="2200" dirty="0"/>
           </a:p>
@@ -6844,7 +7714,7 @@
                   <a:srgbClr val="6B6B6B"/>
                 </a:solidFill>
               </a:rPr>
-              <a:t>Source: Altrata World Ultra Wealth Report 2026; Knight Frank Wealth Report 2026; Deloitte Family Office Landscape 2024; UBS Global Family Office Report 2024; Morgan &amp; Mallet 2025/26.</a:t>
+              <a:t>Source: Altrata 2026; Knight Frank 2026; Deloitte Family Office Landscape 2024; UBS 2024; Airbnb host fee and Booking.com Preferred commission (Brazil, 2026); Direzione Hotel (Italy); BLTA 2025 via O Hoje (Aug 2026).</a:t>
             </a:r>
             <a:endParaRPr lang="en-US" sz="850" dirty="0"/>
           </a:p>
@@ -7024,7 +7894,7 @@
                   <a:srgbClr val="1B2A5C"/>
                 </a:solidFill>
               </a:rPr>
-              <a:t>~47%</a:t>
+              <a:t>16–30%</a:t>
             </a:r>
             <a:endParaRPr lang="en-US" sz="2400" dirty="0"/>
           </a:p>
@@ -7060,7 +7930,7 @@
                   <a:srgbClr val="222222"/>
                 </a:solidFill>
               </a:rPr>
-              <a:t>of family offices offer no lifestyle services today (UBS)</a:t>
+              <a:t>what hotels and villas pay booking platforms: 16–18% in Brazil, up to 30% in Italy</a:t>
             </a:r>
             <a:endParaRPr lang="en-US" sz="1200" dirty="0"/>
           </a:p>
@@ -7096,7 +7966,7 @@
                   <a:srgbClr val="1B2A5C"/>
                 </a:solidFill>
               </a:rPr>
-              <a:t>£55–110k</a:t>
+              <a:t>50%</a:t>
             </a:r>
             <a:endParaRPr lang="en-US" sz="2400" dirty="0"/>
           </a:p>
@@ -7132,7 +8002,7 @@
                   <a:srgbClr val="222222"/>
                 </a:solidFill>
               </a:rPr>
-              <a:t>a year for a travelling nanny in the UK; US$70–150k in the US</a:t>
+              <a:t>average occupancy at Brazil’s leading luxury hotels (BLTA 2025)</a:t>
             </a:r>
             <a:endParaRPr lang="en-US" sz="1200" dirty="0"/>
           </a:p>
@@ -7179,7 +8049,7 @@
                             <a:srgbClr val="1B2A5C"/>
                           </a:solidFill>
                         </a:rPr>
-                        <a:t>Customer</a:t>
+                        <a:t>Side</a:t>
                       </a:r>
                       <a:endParaRPr lang="en-US" sz="1050" dirty="0"/>
                     </a:p>
@@ -7219,7 +8089,7 @@
                             <a:srgbClr val="1B2A5C"/>
                           </a:solidFill>
                         </a:rPr>
-                        <a:t>The job they need done</a:t>
+                        <a:t>What they need</a:t>
                       </a:r>
                       <a:endParaRPr lang="en-US" sz="1050" dirty="0"/>
                     </a:p>
@@ -7261,7 +8131,7 @@
                             <a:srgbClr val="1B2A5C"/>
                           </a:solidFill>
                         </a:rPr>
-                        <a:t>Multi-home family with a family office</a:t>
+                        <a:t>Families and family offices</a:t>
                       </a:r>
                       <a:endParaRPr lang="en-US" sz="1100" dirty="0"/>
                     </a:p>
@@ -7301,7 +8171,7 @@
                             <a:srgbClr val="222222"/>
                           </a:solidFill>
                         </a:rPr>
-                        <a:t>Staff every home and trip lawfully, without adding headcount or employer exposure</a:t>
+                        <a:t>One trusted place for the journey, the access and the people — lawful on every leg</a:t>
                       </a:r>
                       <a:endParaRPr lang="en-US" sz="1100" dirty="0"/>
                     </a:p>
@@ -7343,7 +8213,7 @@
                             <a:srgbClr val="1B2A5C"/>
                           </a:solidFill>
                         </a:rPr>
-                        <a:t>Family run by the principal or an assistant</a:t>
+                        <a:t>Villas, hotels, hosts, access providers</a:t>
                       </a:r>
                       <a:endParaRPr lang="en-US" sz="1100" dirty="0"/>
                     </a:p>
@@ -7383,7 +8253,7 @@
                             <a:srgbClr val="222222"/>
                           </a:solidFill>
                         </a:rPr>
-                        <a:t>The same trusted people in each home — and no gap when someone quits or a border says no</a:t>
+                        <a:t>Qualified, high-spending guests in every season, paid only on completed stays</a:t>
                       </a:r>
                       <a:endParaRPr lang="en-US" sz="1100" dirty="0"/>
                     </a:p>
@@ -7425,7 +8295,7 @@
                             <a:srgbClr val="1B2A5C"/>
                           </a:solidFill>
                         </a:rPr>
-                        <a:t>Visiting family bringing its own staff</a:t>
+                        <a:t>Household staff</a:t>
                       </a:r>
                       <a:endParaRPr lang="en-US" sz="1100" dirty="0"/>
                     </a:p>
@@ -7465,7 +8335,7 @@
                             <a:srgbClr val="222222"/>
                           </a:solidFill>
                         </a:rPr>
-                        <a:t>Bring staff in lawfully; cover their days off</a:t>
+                        <a:t>Steady, legal travelling work, with a record that follows them</a:t>
                       </a:r>
                       <a:endParaRPr lang="en-US" sz="1100" dirty="0"/>
                     </a:p>
@@ -7636,7 +8506,7 @@
                   <a:schemeClr val="tx2"/>
                 </a:solidFill>
               </a:rPr>
-              <a:t>Families stitch together agencies, temps and payroll — no one employs travelling staff and clears every border</a:t>
+              <a:t>Every vendor solves one piece — no one integrates the journey, the access, the people and the trust</a:t>
             </a:r>
             <a:endParaRPr lang="en-US" sz="2200" dirty="0"/>
           </a:p>
@@ -7672,7 +8542,7 @@
                   <a:srgbClr val="6B6B6B"/>
                 </a:solidFill>
               </a:rPr>
-              <a:t>Source: raw/fmo_competitors.md (Oct 2026); agency fee schedules (2025–26); temp rate from one ad (weak); Nannytax and Deel/Remote pricing (2026-10-06).</a:t>
+              <a:t>Source: raw/alt_a–c.md and raw/fmo_competitors.md (Oct 2026); Stirling Access; agency fee schedules (2025–26); Travel Weekly (Aug 2025).</a:t>
             </a:r>
             <a:endParaRPr lang="en-US" sz="850" dirty="0"/>
           </a:p>
@@ -7736,7 +8606,7 @@
                   <a:srgbClr val="1B2A5C"/>
                 </a:solidFill>
               </a:rPr>
-              <a:t>Placement agencies</a:t>
+              <a:t>Advisors and DMCs</a:t>
             </a:r>
             <a:endParaRPr lang="en-US" sz="1500" dirty="0"/>
           </a:p>
@@ -7748,12 +8618,12 @@
               <a:buNone/>
             </a:pPr>
             <a:r>
-              <a:rPr lang="en-US" sz="1300" b="1" dirty="0">
+              <a:rPr lang="en-US" sz="1200" b="1" dirty="0">
                 <a:solidFill>
                   <a:srgbClr val="8C6D23"/>
                 </a:solidFill>
               </a:rPr>
-              <a:t>15–25% of salary, once</a:t>
+              <a:t>~US$350 fee; ~10–12% commission</a:t>
             </a:r>
             <a:endParaRPr lang="en-US" sz="1500" dirty="0"/>
           </a:p>
@@ -7770,7 +8640,7 @@
                   <a:srgbClr val="222222"/>
                 </a:solidFill>
               </a:rPr>
-              <a:t>Find the person; the family stays employer in every country</a:t>
+              <a:t>Design the trip; not the staff, the legal status or the data</a:t>
             </a:r>
             <a:endParaRPr lang="en-US" sz="1500" dirty="0"/>
           </a:p>
@@ -7833,7 +8703,7 @@
                   <a:srgbClr val="A23B2A"/>
                 </a:solidFill>
               </a:rPr>
-              <a:t>Does not travel with the family</a:t>
+              <a:t>One piece only</a:t>
             </a:r>
             <a:endParaRPr lang="en-US" sz="1000" dirty="0"/>
           </a:p>
@@ -7897,7 +8767,7 @@
                   <a:srgbClr val="1B2A5C"/>
                 </a:solidFill>
               </a:rPr>
-              <a:t>Temp desks</a:t>
+              <a:t>Concierge clubs</a:t>
             </a:r>
             <a:endParaRPr lang="en-US" sz="1500" dirty="0"/>
           </a:p>
@@ -7909,12 +8779,12 @@
               <a:buNone/>
             </a:pPr>
             <a:r>
-              <a:rPr lang="en-US" sz="1300" b="1" dirty="0">
+              <a:rPr lang="en-US" sz="1200" b="1" dirty="0">
                 <a:solidFill>
                   <a:srgbClr val="8C6D23"/>
                 </a:solidFill>
               </a:rPr>
-              <a:t>£300–400 a day (London)</a:t>
+              <a:t>£2k–25k a year</a:t>
             </a:r>
             <a:endParaRPr lang="en-US" sz="1500" dirty="0"/>
           </a:p>
@@ -7931,7 +8801,7 @@
                   <a:srgbClr val="222222"/>
                 </a:solidFill>
               </a:rPr>
-              <a:t>Short-notice cover, one city, no cross-border cover</a:t>
+              <a:t>Open doors; outside the family’s own journey and people</a:t>
             </a:r>
             <a:endParaRPr lang="en-US" sz="1500" dirty="0"/>
           </a:p>
@@ -7994,7 +8864,7 @@
                   <a:srgbClr val="A23B2A"/>
                 </a:solidFill>
               </a:rPr>
-              <a:t>Does not travel with the family</a:t>
+              <a:t>One piece only</a:t>
             </a:r>
             <a:endParaRPr lang="en-US" sz="1000" dirty="0"/>
           </a:p>
@@ -8058,7 +8928,7 @@
                   <a:srgbClr val="1B2A5C"/>
                 </a:solidFill>
               </a:rPr>
-              <a:t>Household payroll</a:t>
+              <a:t>Staff agencies</a:t>
             </a:r>
             <a:endParaRPr lang="en-US" sz="1500" dirty="0"/>
           </a:p>
@@ -8070,12 +8940,12 @@
               <a:buNone/>
             </a:pPr>
             <a:r>
-              <a:rPr lang="en-US" sz="1300" b="1" dirty="0">
+              <a:rPr lang="en-US" sz="1200" b="1" dirty="0">
                 <a:solidFill>
                   <a:srgbClr val="8C6D23"/>
                 </a:solidFill>
               </a:rPr>
-              <a:t>£276–474 a year</a:t>
+              <a:t>15–25% of salary, once</a:t>
             </a:r>
             <a:endParaRPr lang="en-US" sz="1500" dirty="0"/>
           </a:p>
@@ -8092,7 +8962,7 @@
                   <a:srgbClr val="222222"/>
                 </a:solidFill>
               </a:rPr>
-              <a:t>One country; no relief, no visas</a:t>
+              <a:t>Place a person; the family stays employer everywhere</a:t>
             </a:r>
             <a:endParaRPr lang="en-US" sz="1500" dirty="0"/>
           </a:p>
@@ -8155,7 +9025,7 @@
                   <a:srgbClr val="A23B2A"/>
                 </a:solidFill>
               </a:rPr>
-              <a:t>Does not travel with the family</a:t>
+              <a:t>One piece only</a:t>
             </a:r>
             <a:endParaRPr lang="en-US" sz="1000" dirty="0"/>
           </a:p>
@@ -8219,7 +9089,7 @@
                   <a:srgbClr val="1B2A5C"/>
                 </a:solidFill>
               </a:rPr>
-              <a:t>Corporate EOR</a:t>
+              <a:t>Payroll and EOR</a:t>
             </a:r>
             <a:endParaRPr lang="en-US" sz="1500" dirty="0"/>
           </a:p>
@@ -8231,12 +9101,12 @@
               <a:buNone/>
             </a:pPr>
             <a:r>
-              <a:rPr lang="en-US" sz="1300" b="1" dirty="0">
+              <a:rPr lang="en-US" sz="1200" b="1" dirty="0">
                 <a:solidFill>
                   <a:srgbClr val="8C6D23"/>
                 </a:solidFill>
               </a:rPr>
-              <a:t>US$599–699 a month</a:t>
+              <a:t>£276–474 a year; US$599–699 a month</a:t>
             </a:r>
             <a:endParaRPr lang="en-US" sz="1500" dirty="0"/>
           </a:p>
@@ -8253,7 +9123,7 @@
                   <a:srgbClr val="222222"/>
                 </a:solidFill>
               </a:rPr>
-              <a:t>Built for companies; domestic workers not found</a:t>
+              <a:t>One country, or built for companies</a:t>
             </a:r>
             <a:endParaRPr lang="en-US" sz="1500" dirty="0"/>
           </a:p>
@@ -8316,7 +9186,7 @@
                   <a:srgbClr val="A23B2A"/>
                 </a:solidFill>
               </a:rPr>
-              <a:t>Does not travel with the family</a:t>
+              <a:t>One piece only</a:t>
             </a:r>
             <a:endParaRPr lang="en-US" sz="1000" dirty="0"/>
           </a:p>
@@ -8377,7 +9247,7 @@
                   <a:srgbClr val="1B2A5C"/>
                 </a:solidFill>
               </a:rPr>
-              <a:t>The closest rival, Morgan &amp; Mallet, places staff and runs employer services in four countries — but runs no shared pool that rotates.</a:t>
+              <a:t>The family is the only integrator today — and it pays every vendor separately.</a:t>
             </a:r>
             <a:endParaRPr lang="en-US" sz="1300" dirty="0"/>
           </a:p>
@@ -8519,7 +9389,7 @@
                   <a:srgbClr val="FFFFFF"/>
                 </a:solidFill>
               </a:rPr>
-              <a:t>Keep your nanny. Add guaranteed cover — lawful on every leg.</a:t>
+              <a:t>Otium Chigi Journeys: the journey, the access, the people and the trust — in one place</a:t>
             </a:r>
             <a:endParaRPr lang="en-US" sz="2600" dirty="0"/>
           </a:p>
@@ -8534,7 +9404,7 @@
         <p:spPr>
           <a:xfrm>
             <a:off x="548640" y="2011680"/>
-            <a:ext cx="3566160" cy="3291840"/>
+            <a:ext cx="2697480" cy="3200400"/>
           </a:xfrm>
           <a:prstGeom prst="rect">
             <a:avLst/>
@@ -8558,7 +9428,7 @@
         </p:nvSpPr>
         <p:spPr>
           <a:xfrm>
-            <a:off x="777240" y="2194560"/>
+            <a:off x="731520" y="2148840"/>
             <a:ext cx="731520" cy="640080"/>
           </a:xfrm>
           <a:prstGeom prst="rect">
@@ -8575,14 +9445,14 @@
               <a:buNone/>
             </a:pPr>
             <a:r>
-              <a:rPr lang="en-US" sz="3600" b="1" dirty="0">
+              <a:rPr lang="en-US" sz="3400" b="1" dirty="0">
                 <a:solidFill>
                   <a:srgbClr val="C9A24B"/>
                 </a:solidFill>
               </a:rPr>
               <a:t>1</a:t>
             </a:r>
-            <a:endParaRPr lang="en-US" sz="3600" dirty="0"/>
+            <a:endParaRPr lang="en-US" sz="3400" dirty="0"/>
           </a:p>
         </p:txBody>
       </p:sp>
@@ -8594,8 +9464,8 @@
         </p:nvSpPr>
         <p:spPr>
           <a:xfrm>
-            <a:off x="777240" y="2880360"/>
-            <a:ext cx="3108960" cy="2286000"/>
+            <a:off x="731520" y="2834640"/>
+            <a:ext cx="2331720" cy="2286000"/>
           </a:xfrm>
           <a:prstGeom prst="rect">
             <a:avLst/>
@@ -8614,14 +9484,14 @@
               <a:buNone/>
             </a:pPr>
             <a:r>
-              <a:rPr lang="en-US" sz="1800" b="1" dirty="0">
+              <a:rPr lang="en-US" sz="1600" b="1" dirty="0">
                 <a:solidFill>
                   <a:srgbClr val="FFFFFF"/>
                 </a:solidFill>
               </a:rPr>
-              <a:t>Relief club</a:t>
-            </a:r>
-            <a:endParaRPr lang="en-US" sz="1800" dirty="0"/>
+              <a:t>Journey design + booking</a:t>
+            </a:r>
+            <a:endParaRPr lang="en-US" sz="1600" dirty="0"/>
           </a:p>
           <a:p>
             <a:pPr indent="0" marL="0">
@@ -8631,14 +9501,14 @@
               <a:buNone/>
             </a:pPr>
             <a:r>
-              <a:rPr lang="en-US" sz="1300" dirty="0">
+              <a:rPr lang="en-US" sz="1200" dirty="0">
                 <a:solidFill>
                   <a:srgbClr val="B7C6DE"/>
                 </a:solidFill>
               </a:rPr>
-              <a:t>An employed, vetted reliever your family has met, covering days off, holidays and gaps — guaranteed within 7 days, 72 hours or 24 hours</a:t>
-            </a:r>
-            <a:endParaRPr lang="en-US" sz="1800" dirty="0"/>
+              <a:t>A three-minute questionnaire, three priced proposals in 24 hours, one price</a:t>
+            </a:r>
+            <a:endParaRPr lang="en-US" sz="1600" dirty="0"/>
           </a:p>
         </p:txBody>
       </p:sp>
@@ -8650,8 +9520,8 @@
         </p:nvSpPr>
         <p:spPr>
           <a:xfrm>
-            <a:off x="4297680" y="2011680"/>
-            <a:ext cx="3566160" cy="3291840"/>
+            <a:off x="3346704" y="2011680"/>
+            <a:ext cx="2697480" cy="3200400"/>
           </a:xfrm>
           <a:prstGeom prst="rect">
             <a:avLst/>
@@ -8675,7 +9545,7 @@
         </p:nvSpPr>
         <p:spPr>
           <a:xfrm>
-            <a:off x="4526280" y="2194560"/>
+            <a:off x="3529584" y="2148840"/>
             <a:ext cx="731520" cy="640080"/>
           </a:xfrm>
           <a:prstGeom prst="rect">
@@ -8692,14 +9562,14 @@
               <a:buNone/>
             </a:pPr>
             <a:r>
-              <a:rPr lang="en-US" sz="3600" b="1" dirty="0">
+              <a:rPr lang="en-US" sz="3400" b="1" dirty="0">
                 <a:solidFill>
                   <a:srgbClr val="C9A24B"/>
                 </a:solidFill>
               </a:rPr>
               <a:t>2</a:t>
             </a:r>
-            <a:endParaRPr lang="en-US" sz="3600" dirty="0"/>
+            <a:endParaRPr lang="en-US" sz="3400" dirty="0"/>
           </a:p>
         </p:txBody>
       </p:sp>
@@ -8711,8 +9581,8 @@
         </p:nvSpPr>
         <p:spPr>
           <a:xfrm>
-            <a:off x="4526280" y="2880360"/>
-            <a:ext cx="3108960" cy="2286000"/>
+            <a:off x="3529584" y="2834640"/>
+            <a:ext cx="2331720" cy="2286000"/>
           </a:xfrm>
           <a:prstGeom prst="rect">
             <a:avLst/>
@@ -8731,14 +9601,14 @@
               <a:buNone/>
             </a:pPr>
             <a:r>
-              <a:rPr lang="en-US" sz="1800" b="1" dirty="0">
+              <a:rPr lang="en-US" sz="1600" b="1" dirty="0">
                 <a:solidFill>
                   <a:srgbClr val="FFFFFF"/>
                 </a:solidFill>
               </a:rPr>
-              <a:t>Compliance coordination</a:t>
-            </a:r>
-            <a:endParaRPr lang="en-US" sz="1800" dirty="0"/>
+              <a:t>Access + hosting</a:t>
+            </a:r>
+            <a:endParaRPr lang="en-US" sz="1600" dirty="0"/>
           </a:p>
           <a:p>
             <a:pPr indent="0" marL="0">
@@ -8748,14 +9618,14 @@
               <a:buNone/>
             </a:pPr>
             <a:r>
-              <a:rPr lang="en-US" sz="1300" dirty="0">
+              <a:rPr lang="en-US" sz="1200" dirty="0">
                 <a:solidFill>
                   <a:srgbClr val="B7C6DE"/>
                 </a:solidFill>
               </a:rPr>
-              <a:t>Counsel-led visas for each leg, a payroll check and liability and medical cover bound before travel — we coordinate, licensed partners advise</a:t>
-            </a:r>
-            <a:endParaRPr lang="en-US" sz="1800" dirty="0"/>
+              <a:t>Held tables, private doors, crowd-smart timing and a local host in each region</a:t>
+            </a:r>
+            <a:endParaRPr lang="en-US" sz="1600" dirty="0"/>
           </a:p>
         </p:txBody>
       </p:sp>
@@ -8767,8 +9637,125 @@
         </p:nvSpPr>
         <p:spPr>
           <a:xfrm>
-            <a:off x="8046720" y="2011680"/>
-            <a:ext cx="3566160" cy="3291840"/>
+            <a:off x="6144768" y="2011680"/>
+            <a:ext cx="2697480" cy="3200400"/>
+          </a:xfrm>
+          <a:prstGeom prst="rect">
+            <a:avLst/>
+          </a:prstGeom>
+          <a:solidFill>
+            <a:srgbClr val="C9A24B"/>
+          </a:solidFill>
+          <a:ln w="12700">
+            <a:solidFill>
+              <a:srgbClr val="C9A24B"/>
+            </a:solidFill>
+            <a:prstDash val="solid"/>
+          </a:ln>
+        </p:spPr>
+      </p:sp>
+      <p:sp>
+        <p:nvSpPr>
+          <p:cNvPr id="11" name="Text 9"/>
+          <p:cNvSpPr txBox="1"/>
+          <p:nvPr/>
+        </p:nvSpPr>
+        <p:spPr>
+          <a:xfrm>
+            <a:off x="6327648" y="2148840"/>
+            <a:ext cx="731520" cy="640080"/>
+          </a:xfrm>
+          <a:prstGeom prst="rect">
+            <a:avLst/>
+          </a:prstGeom>
+          <a:noFill/>
+          <a:ln/>
+        </p:spPr>
+        <p:txBody>
+          <a:bodyPr wrap="square" lIns="0" tIns="0" rIns="0" bIns="0" rtlCol="0" anchor="ctr"/>
+          <a:lstStyle/>
+          <a:p>
+            <a:pPr indent="0" marL="0">
+              <a:buNone/>
+            </a:pPr>
+            <a:r>
+              <a:rPr lang="en-US" sz="3400" b="1" dirty="0">
+                <a:solidFill>
+                  <a:srgbClr val="1B2A5C"/>
+                </a:solidFill>
+              </a:rPr>
+              <a:t>3</a:t>
+            </a:r>
+            <a:endParaRPr lang="en-US" sz="3400" dirty="0"/>
+          </a:p>
+        </p:txBody>
+      </p:sp>
+      <p:sp>
+        <p:nvSpPr>
+          <p:cNvPr id="12" name="Text 10"/>
+          <p:cNvSpPr txBox="1"/>
+          <p:nvPr/>
+        </p:nvSpPr>
+        <p:spPr>
+          <a:xfrm>
+            <a:off x="6327648" y="2834640"/>
+            <a:ext cx="2331720" cy="2286000"/>
+          </a:xfrm>
+          <a:prstGeom prst="rect">
+            <a:avLst/>
+          </a:prstGeom>
+          <a:noFill/>
+          <a:ln/>
+        </p:spPr>
+        <p:txBody>
+          <a:bodyPr wrap="square" lIns="0" tIns="0" rIns="0" bIns="0" rtlCol="0" anchor="t"/>
+          <a:lstStyle/>
+          <a:p>
+            <a:pPr indent="0" marL="0">
+              <a:spcAft>
+                <a:spcPts val="800"/>
+              </a:spcAft>
+              <a:buNone/>
+            </a:pPr>
+            <a:r>
+              <a:rPr lang="en-US" sz="1600" b="1" dirty="0">
+                <a:solidFill>
+                  <a:srgbClr val="1B2A5C"/>
+                </a:solidFill>
+              </a:rPr>
+              <a:t>Staff + compliance</a:t>
+            </a:r>
+            <a:endParaRPr lang="en-US" sz="1600" dirty="0"/>
+          </a:p>
+          <a:p>
+            <a:pPr indent="0" marL="0">
+              <a:spcAft>
+                <a:spcPts val="800"/>
+              </a:spcAft>
+              <a:buNone/>
+            </a:pPr>
+            <a:r>
+              <a:rPr lang="en-US" sz="1200" dirty="0">
+                <a:solidFill>
+                  <a:srgbClr val="1B2A5C"/>
+                </a:solidFill>
+              </a:rPr>
+              <a:t>Hire our vetted staff or manage your own — visas, payroll and insurance across borders</a:t>
+            </a:r>
+            <a:endParaRPr lang="en-US" sz="1600" dirty="0"/>
+          </a:p>
+        </p:txBody>
+      </p:sp>
+      <p:sp>
+        <p:nvSpPr>
+          <p:cNvPr id="13" name="Shape 11"/>
+          <p:cNvSpPr/>
+          <p:nvPr/>
+        </p:nvSpPr>
+        <p:spPr>
+          <a:xfrm>
+            <a:off x="8942832" y="2011680"/>
+            <a:ext cx="2697480" cy="3200400"/>
           </a:xfrm>
           <a:prstGeom prst="rect">
             <a:avLst/>
@@ -8786,13 +9773,13 @@
       </p:sp>
       <p:sp>
         <p:nvSpPr>
-          <p:cNvPr id="11" name="Text 9"/>
+          <p:cNvPr id="14" name="Text 12"/>
           <p:cNvSpPr txBox="1"/>
           <p:nvPr/>
         </p:nvSpPr>
         <p:spPr>
           <a:xfrm>
-            <a:off x="8275320" y="2194560"/>
+            <a:off x="9125712" y="2148840"/>
             <a:ext cx="731520" cy="640080"/>
           </a:xfrm>
           <a:prstGeom prst="rect">
@@ -8809,27 +9796,27 @@
               <a:buNone/>
             </a:pPr>
             <a:r>
-              <a:rPr lang="en-US" sz="3600" b="1" dirty="0">
+              <a:rPr lang="en-US" sz="3400" b="1" dirty="0">
                 <a:solidFill>
                   <a:srgbClr val="C9A24B"/>
                 </a:solidFill>
               </a:rPr>
-              <a:t>3</a:t>
-            </a:r>
-            <a:endParaRPr lang="en-US" sz="3600" dirty="0"/>
-          </a:p>
-        </p:txBody>
-      </p:sp>
-      <p:sp>
-        <p:nvSpPr>
-          <p:cNvPr id="12" name="Text 10"/>
+              <a:t>4</a:t>
+            </a:r>
+            <a:endParaRPr lang="en-US" sz="3400" dirty="0"/>
+          </a:p>
+        </p:txBody>
+      </p:sp>
+      <p:sp>
+        <p:nvSpPr>
+          <p:cNvPr id="15" name="Text 13"/>
           <p:cNvSpPr txBox="1"/>
           <p:nvPr/>
         </p:nvSpPr>
         <p:spPr>
           <a:xfrm>
-            <a:off x="8275320" y="2880360"/>
-            <a:ext cx="3108960" cy="2286000"/>
+            <a:off x="9125712" y="2834640"/>
+            <a:ext cx="2331720" cy="2286000"/>
           </a:xfrm>
           <a:prstGeom prst="rect">
             <a:avLst/>
@@ -8848,14 +9835,14 @@
               <a:buNone/>
             </a:pPr>
             <a:r>
-              <a:rPr lang="en-US" sz="1800" b="1" dirty="0">
+              <a:rPr lang="en-US" sz="1600" b="1" dirty="0">
                 <a:solidFill>
                   <a:srgbClr val="FFFFFF"/>
                 </a:solidFill>
               </a:rPr>
-              <a:t>Staff-owned record</a:t>
-            </a:r>
-            <a:endParaRPr lang="en-US" sz="1800" dirty="0"/>
+              <a:t>Data + trust</a:t>
+            </a:r>
+            <a:endParaRPr lang="en-US" sz="1600" dirty="0"/>
           </a:p>
           <a:p>
             <a:pPr indent="0" marL="0">
@@ -8865,27 +9852,27 @@
               <a:buNone/>
             </a:pPr>
             <a:r>
-              <a:rPr lang="en-US" sz="1300" dirty="0">
+              <a:rPr lang="en-US" sz="1200" dirty="0">
                 <a:solidFill>
                   <a:srgbClr val="B7C6DE"/>
                 </a:solidFill>
               </a:rPr>
-              <a:t>A portable, verified vetting record that follows the staff member — free to staff, accepted by employers</a:t>
-            </a:r>
-            <a:endParaRPr lang="en-US" sz="1800" dirty="0"/>
-          </a:p>
-        </p:txBody>
-      </p:sp>
-      <p:sp>
-        <p:nvSpPr>
-          <p:cNvPr id="13" name="Text 11"/>
+              <a:t>Preferences, residency days, health records, supplier vetting and deposit protection</a:t>
+            </a:r>
+            <a:endParaRPr lang="en-US" sz="1600" dirty="0"/>
+          </a:p>
+        </p:txBody>
+      </p:sp>
+      <p:sp>
+        <p:nvSpPr>
+          <p:cNvPr id="16" name="Text 14"/>
           <p:cNvSpPr txBox="1"/>
           <p:nvPr/>
         </p:nvSpPr>
         <p:spPr>
           <a:xfrm>
-            <a:off x="548640" y="5577840"/>
-            <a:ext cx="11064240" cy="548640"/>
+            <a:off x="548640" y="5486400"/>
+            <a:ext cx="11064240" cy="640080"/>
           </a:xfrm>
           <a:prstGeom prst="rect">
             <a:avLst/>
@@ -8906,7 +9893,7 @@
                   <a:srgbClr val="FFFFFF"/>
                 </a:solidFill>
               </a:rPr>
-              <a:t>The family keeps employing its regular staff. We employ the relievers — so nothing changes for the people they already trust.</a:t>
+              <a:t>We start with module 3 — families use it even before suppliers join — then add the rest on the same family, the same people and the same data.</a:t>
             </a:r>
             <a:endParaRPr lang="en-US" sz="1300" dirty="0"/>
           </a:p>
@@ -9007,7 +9994,7 @@
                   <a:schemeClr val="tx2"/>
                 </a:solidFill>
               </a:rPr>
-              <a:t>One membership per position: we employ, clear, insure and cover — partners hold the licences</a:t>
+              <a:t>A two-sided platform that is useful from day one: families come for staff and compliance, suppliers follow the families</a:t>
             </a:r>
             <a:endParaRPr lang="en-US" sz="2200" dirty="0"/>
           </a:p>
@@ -9043,7 +10030,7 @@
                   <a:srgbClr val="6B6B6B"/>
                 </a:solidFill>
               </a:rPr>
-              <a:t>Source: Operating model in research/fmo_strategy.md §8. Partners named are candidates, not agreements.</a:t>
+              <a:t>Source: Operating model and platform logic: research/fmo_strategy.md §8 and the strategy deck (platform economics). Partners named are candidates, not agreements.</a:t>
             </a:r>
             <a:endParaRPr lang="en-US" sz="850" dirty="0"/>
           </a:p>
@@ -9057,8 +10044,106 @@
         </p:nvSpPr>
         <p:spPr>
           <a:xfrm>
-            <a:off x="1188720" y="1828800"/>
-            <a:ext cx="822960" cy="822960"/>
+            <a:off x="548640" y="1828800"/>
+            <a:ext cx="3108960" cy="3291840"/>
+          </a:xfrm>
+          <a:prstGeom prst="rect">
+            <a:avLst/>
+          </a:prstGeom>
+          <a:solidFill>
+            <a:srgbClr val="F6F7FA"/>
+          </a:solidFill>
+          <a:ln w="9525">
+            <a:solidFill>
+              <a:srgbClr val="D0D4DC"/>
+            </a:solidFill>
+            <a:prstDash val="solid"/>
+          </a:ln>
+        </p:spPr>
+      </p:sp>
+      <p:sp>
+        <p:nvSpPr>
+          <p:cNvPr id="6" name="Text 4"/>
+          <p:cNvSpPr txBox="1"/>
+          <p:nvPr/>
+        </p:nvSpPr>
+        <p:spPr>
+          <a:xfrm>
+            <a:off x="731520" y="1965960"/>
+            <a:ext cx="2743200" cy="3017520"/>
+          </a:xfrm>
+          <a:prstGeom prst="rect">
+            <a:avLst/>
+          </a:prstGeom>
+          <a:noFill/>
+          <a:ln/>
+        </p:spPr>
+        <p:txBody>
+          <a:bodyPr wrap="square" lIns="0" tIns="0" rIns="0" bIns="0" rtlCol="0" anchor="t"/>
+          <a:lstStyle/>
+          <a:p>
+            <a:pPr indent="0" marL="0">
+              <a:spcAft>
+                <a:spcPts val="600"/>
+              </a:spcAft>
+              <a:buNone/>
+            </a:pPr>
+            <a:r>
+              <a:rPr lang="en-US" sz="1600" b="1" dirty="0">
+                <a:solidFill>
+                  <a:srgbClr val="1B2A5C"/>
+                </a:solidFill>
+              </a:rPr>
+              <a:t>Families</a:t>
+            </a:r>
+            <a:endParaRPr lang="en-US" sz="1600" dirty="0"/>
+          </a:p>
+          <a:p>
+            <a:pPr indent="0" marL="0">
+              <a:spcAft>
+                <a:spcPts val="600"/>
+              </a:spcAft>
+              <a:buNone/>
+            </a:pPr>
+            <a:r>
+              <a:rPr lang="en-US" sz="1100" dirty="0">
+                <a:solidFill>
+                  <a:srgbClr val="6B6B6B"/>
+                </a:solidFill>
+              </a:rPr>
+              <a:t>and family offices</a:t>
+            </a:r>
+            <a:endParaRPr lang="en-US" sz="1600" dirty="0"/>
+          </a:p>
+          <a:p>
+            <a:pPr indent="0" marL="0">
+              <a:spcAft>
+                <a:spcPts val="600"/>
+              </a:spcAft>
+              <a:buNone/>
+            </a:pPr>
+            <a:r>
+              <a:rPr lang="en-US" sz="1150" dirty="0">
+                <a:solidFill>
+                  <a:srgbClr val="222222"/>
+                </a:solidFill>
+              </a:rPr>
+              <a:t>Membership per household; staff fee per position</a:t>
+            </a:r>
+            <a:endParaRPr lang="en-US" sz="1600" dirty="0"/>
+          </a:p>
+        </p:txBody>
+      </p:sp>
+      <p:sp>
+        <p:nvSpPr>
+          <p:cNvPr id="7" name="Shape 5"/>
+          <p:cNvSpPr/>
+          <p:nvPr/>
+        </p:nvSpPr>
+        <p:spPr>
+          <a:xfrm>
+            <a:off x="4434840" y="2103120"/>
+            <a:ext cx="3291840" cy="2743200"/>
           </a:xfrm>
           <a:prstGeom prst="ellipse">
             <a:avLst/>
@@ -9076,14 +10161,14 @@
       </p:sp>
       <p:sp>
         <p:nvSpPr>
-          <p:cNvPr id="6" name="Text 4"/>
+          <p:cNvPr id="8" name="Text 6"/>
           <p:cNvSpPr txBox="1"/>
           <p:nvPr/>
         </p:nvSpPr>
         <p:spPr>
           <a:xfrm>
-            <a:off x="1188720" y="1828800"/>
-            <a:ext cx="822960" cy="822960"/>
+            <a:off x="4434840" y="2103120"/>
+            <a:ext cx="3291840" cy="2743200"/>
           </a:xfrm>
           <a:prstGeom prst="rect">
             <a:avLst/>
@@ -9099,51 +10184,66 @@
               <a:buNone/>
             </a:pPr>
             <a:r>
-              <a:rPr lang="en-US" sz="2200" b="1" dirty="0">
+              <a:rPr lang="en-US" sz="1400" b="1" dirty="0">
+                <a:solidFill>
+                  <a:srgbClr val="FFFFFF"/>
+                </a:solidFill>
+              </a:rPr>
+              <a:t>Otium Chigi Journeys</a:t>
+            </a:r>
+            <a:endParaRPr lang="en-US" sz="1400" dirty="0"/>
+          </a:p>
+          <a:p>
+            <a:pPr algn="ctr" indent="0" marL="0">
+              <a:buNone/>
+            </a:pPr>
+            <a:r>
+              <a:rPr lang="en-US" sz="1100" dirty="0">
                 <a:solidFill>
                   <a:srgbClr val="C9A24B"/>
                 </a:solidFill>
               </a:rPr>
-              <a:t>1</a:t>
-            </a:r>
-            <a:endParaRPr lang="en-US" sz="2200" dirty="0"/>
-          </a:p>
-        </p:txBody>
-      </p:sp>
-      <p:sp>
-        <p:nvSpPr>
-          <p:cNvPr id="7" name="Shape 5"/>
+              <a:t>design · access · staff · data</a:t>
+            </a:r>
+            <a:endParaRPr lang="en-US" sz="1400" dirty="0"/>
+          </a:p>
+        </p:txBody>
+      </p:sp>
+      <p:sp>
+        <p:nvSpPr>
+          <p:cNvPr id="9" name="Shape 7"/>
           <p:cNvSpPr/>
           <p:nvPr/>
         </p:nvSpPr>
         <p:spPr>
           <a:xfrm>
-            <a:off x="2057400" y="2240280"/>
-            <a:ext cx="1371600" cy="0"/>
-          </a:xfrm>
-          <a:prstGeom prst="line">
-            <a:avLst/>
-          </a:prstGeom>
-          <a:noFill/>
-          <a:ln w="19050">
+            <a:off x="8531352" y="1828800"/>
+            <a:ext cx="3108960" cy="3291840"/>
+          </a:xfrm>
+          <a:prstGeom prst="rect">
+            <a:avLst/>
+          </a:prstGeom>
+          <a:solidFill>
+            <a:srgbClr val="F6F7FA"/>
+          </a:solidFill>
+          <a:ln w="9525">
             <a:solidFill>
               <a:srgbClr val="D0D4DC"/>
             </a:solidFill>
             <a:prstDash val="solid"/>
-            <a:tailEnd type="triangle"/>
           </a:ln>
         </p:spPr>
       </p:sp>
       <p:sp>
         <p:nvSpPr>
-          <p:cNvPr id="8" name="Text 6"/>
+          <p:cNvPr id="10" name="Text 8"/>
           <p:cNvSpPr txBox="1"/>
           <p:nvPr/>
         </p:nvSpPr>
         <p:spPr>
           <a:xfrm>
-            <a:off x="640080" y="2788920"/>
-            <a:ext cx="1920240" cy="1188720"/>
+            <a:off x="8714232" y="1965960"/>
+            <a:ext cx="2743200" cy="3017520"/>
           </a:xfrm>
           <a:prstGeom prst="rect">
             <a:avLst/>
@@ -9155,21 +10255,44 @@
           <a:bodyPr wrap="square" lIns="0" tIns="0" rIns="0" bIns="0" rtlCol="0" anchor="t"/>
           <a:lstStyle/>
           <a:p>
-            <a:pPr algn="ctr" indent="0" marL="0">
-              <a:buNone/>
-            </a:pPr>
-            <a:r>
-              <a:rPr lang="en-US" sz="1500" b="1" dirty="0">
+            <a:pPr indent="0" marL="0">
+              <a:spcAft>
+                <a:spcPts val="600"/>
+              </a:spcAft>
+              <a:buNone/>
+            </a:pPr>
+            <a:r>
+              <a:rPr lang="en-US" sz="1600" b="1" dirty="0">
                 <a:solidFill>
                   <a:srgbClr val="1B2A5C"/>
                 </a:solidFill>
               </a:rPr>
-              <a:t>Join</a:t>
-            </a:r>
-            <a:endParaRPr lang="en-US" sz="1500" dirty="0"/>
-          </a:p>
-          <a:p>
-            <a:pPr algn="ctr" indent="0" marL="0">
+              <a:t>Suppliers</a:t>
+            </a:r>
+            <a:endParaRPr lang="en-US" sz="1600" dirty="0"/>
+          </a:p>
+          <a:p>
+            <a:pPr indent="0" marL="0">
+              <a:spcAft>
+                <a:spcPts val="600"/>
+              </a:spcAft>
+              <a:buNone/>
+            </a:pPr>
+            <a:r>
+              <a:rPr lang="en-US" sz="1100" dirty="0">
+                <a:solidFill>
+                  <a:srgbClr val="6B6B6B"/>
+                </a:solidFill>
+              </a:rPr>
+              <a:t>villas, hotels, hosts, access, staff</a:t>
+            </a:r>
+            <a:endParaRPr lang="en-US" sz="1600" dirty="0"/>
+          </a:p>
+          <a:p>
+            <a:pPr indent="0" marL="0">
+              <a:spcAft>
+                <a:spcPts val="600"/>
+              </a:spcAft>
               <a:buNone/>
             </a:pPr>
             <a:r>
@@ -9178,803 +10301,98 @@
                   <a:srgbClr val="222222"/>
                 </a:solidFill>
               </a:rPr>
-              <a:t>Membership per staff position; travel calendar shared</a:t>
-            </a:r>
-            <a:endParaRPr lang="en-US" sz="1500" dirty="0"/>
-          </a:p>
-        </p:txBody>
-      </p:sp>
-      <p:sp>
-        <p:nvSpPr>
-          <p:cNvPr id="9" name="Shape 7"/>
+              <a:t>Join free; pay a take rate only on completed bookings</a:t>
+            </a:r>
+            <a:endParaRPr lang="en-US" sz="1600" dirty="0"/>
+          </a:p>
+        </p:txBody>
+      </p:sp>
+      <p:sp>
+        <p:nvSpPr>
+          <p:cNvPr id="11" name="Shape 9"/>
           <p:cNvSpPr/>
           <p:nvPr/>
         </p:nvSpPr>
         <p:spPr>
           <a:xfrm>
-            <a:off x="3429000" y="1828800"/>
-            <a:ext cx="822960" cy="822960"/>
-          </a:xfrm>
-          <a:prstGeom prst="ellipse">
-            <a:avLst/>
-          </a:prstGeom>
-          <a:solidFill>
-            <a:srgbClr val="1B2A5C"/>
-          </a:solidFill>
-          <a:ln w="12700">
+            <a:off x="3657600" y="3474720"/>
+            <a:ext cx="777240" cy="0"/>
+          </a:xfrm>
+          <a:prstGeom prst="line">
+            <a:avLst/>
+          </a:prstGeom>
+          <a:noFill/>
+          <a:ln w="25400">
             <a:solidFill>
               <a:srgbClr val="1B2A5C"/>
             </a:solidFill>
             <a:prstDash val="solid"/>
-          </a:ln>
-        </p:spPr>
-      </p:sp>
-      <p:sp>
-        <p:nvSpPr>
-          <p:cNvPr id="10" name="Text 8"/>
-          <p:cNvSpPr txBox="1"/>
-          <p:nvPr/>
-        </p:nvSpPr>
-        <p:spPr>
-          <a:xfrm>
-            <a:off x="3429000" y="1828800"/>
-            <a:ext cx="822960" cy="822960"/>
-          </a:xfrm>
-          <a:prstGeom prst="rect">
-            <a:avLst/>
-          </a:prstGeom>
-          <a:noFill/>
-          <a:ln/>
-        </p:spPr>
-        <p:txBody>
-          <a:bodyPr wrap="square" lIns="0" tIns="0" rIns="0" bIns="0" rtlCol="0" anchor="ctr"/>
-          <a:lstStyle/>
-          <a:p>
-            <a:pPr algn="ctr" indent="0" marL="0">
-              <a:buNone/>
-            </a:pPr>
-            <a:r>
-              <a:rPr lang="en-US" sz="2200" b="1" dirty="0">
-                <a:solidFill>
-                  <a:srgbClr val="C9A24B"/>
-                </a:solidFill>
-              </a:rPr>
-              <a:t>2</a:t>
-            </a:r>
-            <a:endParaRPr lang="en-US" sz="2200" dirty="0"/>
-          </a:p>
-        </p:txBody>
-      </p:sp>
-      <p:sp>
-        <p:nvSpPr>
-          <p:cNvPr id="11" name="Shape 9"/>
-          <p:cNvSpPr/>
-          <p:nvPr/>
-        </p:nvSpPr>
-        <p:spPr>
-          <a:xfrm>
-            <a:off x="4297680" y="2240280"/>
-            <a:ext cx="1371600" cy="0"/>
-          </a:xfrm>
-          <a:prstGeom prst="line">
-            <a:avLst/>
-          </a:prstGeom>
-          <a:noFill/>
-          <a:ln w="19050">
-            <a:solidFill>
-              <a:srgbClr val="D0D4DC"/>
-            </a:solidFill>
-            <a:prstDash val="solid"/>
+            <a:headEnd type="triangle"/>
             <a:tailEnd type="triangle"/>
           </a:ln>
         </p:spPr>
       </p:sp>
       <p:sp>
         <p:nvSpPr>
-          <p:cNvPr id="12" name="Text 10"/>
-          <p:cNvSpPr txBox="1"/>
-          <p:nvPr/>
-        </p:nvSpPr>
-        <p:spPr>
-          <a:xfrm>
-            <a:off x="2880360" y="2788920"/>
-            <a:ext cx="1920240" cy="1188720"/>
-          </a:xfrm>
-          <a:prstGeom prst="rect">
-            <a:avLst/>
-          </a:prstGeom>
-          <a:noFill/>
-          <a:ln/>
-        </p:spPr>
-        <p:txBody>
-          <a:bodyPr wrap="square" lIns="0" tIns="0" rIns="0" bIns="0" rtlCol="0" anchor="t"/>
-          <a:lstStyle/>
-          <a:p>
-            <a:pPr algn="ctr" indent="0" marL="0">
-              <a:buNone/>
-            </a:pPr>
-            <a:r>
-              <a:rPr lang="en-US" sz="1500" b="1" dirty="0">
-                <a:solidFill>
-                  <a:srgbClr val="1B2A5C"/>
-                </a:solidFill>
-              </a:rPr>
-              <a:t>Meet</a:t>
-            </a:r>
-            <a:endParaRPr lang="en-US" sz="1500" dirty="0"/>
-          </a:p>
-          <a:p>
-            <a:pPr algn="ctr" indent="0" marL="0">
-              <a:buNone/>
-            </a:pPr>
-            <a:r>
-              <a:rPr lang="en-US" sz="1150" dirty="0">
-                <a:solidFill>
-                  <a:srgbClr val="222222"/>
-                </a:solidFill>
-              </a:rPr>
-              <a:t>A vetted reliever is introduced to the family</a:t>
-            </a:r>
-            <a:endParaRPr lang="en-US" sz="1500" dirty="0"/>
-          </a:p>
-        </p:txBody>
-      </p:sp>
-      <p:sp>
-        <p:nvSpPr>
-          <p:cNvPr id="13" name="Shape 11"/>
+          <p:cNvPr id="12" name="Shape 10"/>
           <p:cNvSpPr/>
           <p:nvPr/>
         </p:nvSpPr>
         <p:spPr>
           <a:xfrm>
-            <a:off x="5669280" y="1828800"/>
-            <a:ext cx="822960" cy="822960"/>
-          </a:xfrm>
-          <a:prstGeom prst="ellipse">
-            <a:avLst/>
-          </a:prstGeom>
-          <a:solidFill>
-            <a:srgbClr val="1B2A5C"/>
-          </a:solidFill>
-          <a:ln w="12700">
+            <a:off x="7726680" y="3474720"/>
+            <a:ext cx="804672" cy="0"/>
+          </a:xfrm>
+          <a:prstGeom prst="line">
+            <a:avLst/>
+          </a:prstGeom>
+          <a:noFill/>
+          <a:ln w="25400">
             <a:solidFill>
               <a:srgbClr val="1B2A5C"/>
             </a:solidFill>
             <a:prstDash val="solid"/>
-          </a:ln>
-        </p:spPr>
-      </p:sp>
-      <p:sp>
-        <p:nvSpPr>
-          <p:cNvPr id="14" name="Text 12"/>
-          <p:cNvSpPr txBox="1"/>
-          <p:nvPr/>
-        </p:nvSpPr>
-        <p:spPr>
-          <a:xfrm>
-            <a:off x="5669280" y="1828800"/>
-            <a:ext cx="822960" cy="822960"/>
-          </a:xfrm>
-          <a:prstGeom prst="rect">
-            <a:avLst/>
-          </a:prstGeom>
-          <a:noFill/>
-          <a:ln/>
-        </p:spPr>
-        <p:txBody>
-          <a:bodyPr wrap="square" lIns="0" tIns="0" rIns="0" bIns="0" rtlCol="0" anchor="ctr"/>
-          <a:lstStyle/>
-          <a:p>
-            <a:pPr algn="ctr" indent="0" marL="0">
-              <a:buNone/>
-            </a:pPr>
-            <a:r>
-              <a:rPr lang="en-US" sz="2200" b="1" dirty="0">
-                <a:solidFill>
-                  <a:srgbClr val="C9A24B"/>
-                </a:solidFill>
-              </a:rPr>
-              <a:t>3</a:t>
-            </a:r>
-            <a:endParaRPr lang="en-US" sz="2200" dirty="0"/>
-          </a:p>
-        </p:txBody>
-      </p:sp>
-      <p:sp>
-        <p:nvSpPr>
-          <p:cNvPr id="15" name="Shape 13"/>
-          <p:cNvSpPr/>
-          <p:nvPr/>
-        </p:nvSpPr>
-        <p:spPr>
-          <a:xfrm>
-            <a:off x="6537960" y="2240280"/>
-            <a:ext cx="1371600" cy="0"/>
-          </a:xfrm>
-          <a:prstGeom prst="line">
-            <a:avLst/>
-          </a:prstGeom>
-          <a:noFill/>
-          <a:ln w="19050">
-            <a:solidFill>
-              <a:srgbClr val="D0D4DC"/>
-            </a:solidFill>
-            <a:prstDash val="solid"/>
+            <a:headEnd type="triangle"/>
             <a:tailEnd type="triangle"/>
           </a:ln>
         </p:spPr>
       </p:sp>
       <p:sp>
         <p:nvSpPr>
-          <p:cNvPr id="16" name="Text 14"/>
+          <p:cNvPr id="13" name="Text 11"/>
           <p:cNvSpPr txBox="1"/>
           <p:nvPr/>
         </p:nvSpPr>
         <p:spPr>
           <a:xfrm>
-            <a:off x="5120640" y="2788920"/>
-            <a:ext cx="1920240" cy="1188720"/>
-          </a:xfrm>
-          <a:prstGeom prst="rect">
-            <a:avLst/>
-          </a:prstGeom>
-          <a:noFill/>
-          <a:ln/>
-        </p:spPr>
-        <p:txBody>
-          <a:bodyPr wrap="square" lIns="0" tIns="0" rIns="0" bIns="0" rtlCol="0" anchor="t"/>
-          <a:lstStyle/>
-          <a:p>
-            <a:pPr algn="ctr" indent="0" marL="0">
-              <a:buNone/>
-            </a:pPr>
-            <a:r>
-              <a:rPr lang="en-US" sz="1500" b="1" dirty="0">
+            <a:off x="548640" y="5303520"/>
+            <a:ext cx="11091672" cy="548640"/>
+          </a:xfrm>
+          <a:prstGeom prst="rect">
+            <a:avLst/>
+          </a:prstGeom>
+          <a:noFill/>
+          <a:ln/>
+        </p:spPr>
+        <p:txBody>
+          <a:bodyPr wrap="square" lIns="0" tIns="0" rIns="0" bIns="0" rtlCol="0" anchor="ctr"/>
+          <a:lstStyle/>
+          <a:p>
+            <a:pPr indent="0" marL="0">
+              <a:buNone/>
+            </a:pPr>
+            <a:r>
+              <a:rPr lang="en-US" sz="1200" i="1" dirty="0">
                 <a:solidFill>
                   <a:srgbClr val="1B2A5C"/>
                 </a:solidFill>
               </a:rPr>
-              <a:t>Clear</a:t>
-            </a:r>
-            <a:endParaRPr lang="en-US" sz="1500" dirty="0"/>
-          </a:p>
-          <a:p>
-            <a:pPr algn="ctr" indent="0" marL="0">
-              <a:buNone/>
-            </a:pPr>
-            <a:r>
-              <a:rPr lang="en-US" sz="1150" dirty="0">
-                <a:solidFill>
-                  <a:srgbClr val="222222"/>
-                </a:solidFill>
-              </a:rPr>
-              <a:t>Counsel clears each foreign leg in writing</a:t>
-            </a:r>
-            <a:endParaRPr lang="en-US" sz="1500" dirty="0"/>
-          </a:p>
-        </p:txBody>
-      </p:sp>
-      <p:sp>
-        <p:nvSpPr>
-          <p:cNvPr id="17" name="Shape 15"/>
-          <p:cNvSpPr/>
-          <p:nvPr/>
-        </p:nvSpPr>
-        <p:spPr>
-          <a:xfrm>
-            <a:off x="7909560" y="1828800"/>
-            <a:ext cx="822960" cy="822960"/>
-          </a:xfrm>
-          <a:prstGeom prst="ellipse">
-            <a:avLst/>
-          </a:prstGeom>
-          <a:solidFill>
-            <a:srgbClr val="1B2A5C"/>
-          </a:solidFill>
-          <a:ln w="12700">
-            <a:solidFill>
-              <a:srgbClr val="1B2A5C"/>
-            </a:solidFill>
-            <a:prstDash val="solid"/>
-          </a:ln>
-        </p:spPr>
-      </p:sp>
-      <p:sp>
-        <p:nvSpPr>
-          <p:cNvPr id="18" name="Text 16"/>
-          <p:cNvSpPr txBox="1"/>
-          <p:nvPr/>
-        </p:nvSpPr>
-        <p:spPr>
-          <a:xfrm>
-            <a:off x="7909560" y="1828800"/>
-            <a:ext cx="822960" cy="822960"/>
-          </a:xfrm>
-          <a:prstGeom prst="rect">
-            <a:avLst/>
-          </a:prstGeom>
-          <a:noFill/>
-          <a:ln/>
-        </p:spPr>
-        <p:txBody>
-          <a:bodyPr wrap="square" lIns="0" tIns="0" rIns="0" bIns="0" rtlCol="0" anchor="ctr"/>
-          <a:lstStyle/>
-          <a:p>
-            <a:pPr algn="ctr" indent="0" marL="0">
-              <a:buNone/>
-            </a:pPr>
-            <a:r>
-              <a:rPr lang="en-US" sz="2200" b="1" dirty="0">
-                <a:solidFill>
-                  <a:srgbClr val="C9A24B"/>
-                </a:solidFill>
-              </a:rPr>
-              <a:t>4</a:t>
-            </a:r>
-            <a:endParaRPr lang="en-US" sz="2200" dirty="0"/>
-          </a:p>
-        </p:txBody>
-      </p:sp>
-      <p:sp>
-        <p:nvSpPr>
-          <p:cNvPr id="19" name="Shape 17"/>
-          <p:cNvSpPr/>
-          <p:nvPr/>
-        </p:nvSpPr>
-        <p:spPr>
-          <a:xfrm>
-            <a:off x="8778240" y="2240280"/>
-            <a:ext cx="1371600" cy="0"/>
-          </a:xfrm>
-          <a:prstGeom prst="line">
-            <a:avLst/>
-          </a:prstGeom>
-          <a:noFill/>
-          <a:ln w="19050">
-            <a:solidFill>
-              <a:srgbClr val="D0D4DC"/>
-            </a:solidFill>
-            <a:prstDash val="solid"/>
-            <a:tailEnd type="triangle"/>
-          </a:ln>
-        </p:spPr>
-      </p:sp>
-      <p:sp>
-        <p:nvSpPr>
-          <p:cNvPr id="20" name="Text 18"/>
-          <p:cNvSpPr txBox="1"/>
-          <p:nvPr/>
-        </p:nvSpPr>
-        <p:spPr>
-          <a:xfrm>
-            <a:off x="7360920" y="2788920"/>
-            <a:ext cx="1920240" cy="1188720"/>
-          </a:xfrm>
-          <a:prstGeom prst="rect">
-            <a:avLst/>
-          </a:prstGeom>
-          <a:noFill/>
-          <a:ln/>
-        </p:spPr>
-        <p:txBody>
-          <a:bodyPr wrap="square" lIns="0" tIns="0" rIns="0" bIns="0" rtlCol="0" anchor="t"/>
-          <a:lstStyle/>
-          <a:p>
-            <a:pPr algn="ctr" indent="0" marL="0">
-              <a:buNone/>
-            </a:pPr>
-            <a:r>
-              <a:rPr lang="en-US" sz="1500" b="1" dirty="0">
-                <a:solidFill>
-                  <a:srgbClr val="1B2A5C"/>
-                </a:solidFill>
-              </a:rPr>
-              <a:t>Insure</a:t>
-            </a:r>
-            <a:endParaRPr lang="en-US" sz="1500" dirty="0"/>
-          </a:p>
-          <a:p>
-            <a:pPr algn="ctr" indent="0" marL="0">
-              <a:buNone/>
-            </a:pPr>
-            <a:r>
-              <a:rPr lang="en-US" sz="1150" dirty="0">
-                <a:solidFill>
-                  <a:srgbClr val="222222"/>
-                </a:solidFill>
-              </a:rPr>
-              <a:t>Liability and trip-medical cover bound before travel</a:t>
-            </a:r>
-            <a:endParaRPr lang="en-US" sz="1500" dirty="0"/>
-          </a:p>
-        </p:txBody>
-      </p:sp>
-      <p:sp>
-        <p:nvSpPr>
-          <p:cNvPr id="21" name="Shape 19"/>
-          <p:cNvSpPr/>
-          <p:nvPr/>
-        </p:nvSpPr>
-        <p:spPr>
-          <a:xfrm>
-            <a:off x="10149840" y="1828800"/>
-            <a:ext cx="822960" cy="822960"/>
-          </a:xfrm>
-          <a:prstGeom prst="ellipse">
-            <a:avLst/>
-          </a:prstGeom>
-          <a:solidFill>
-            <a:srgbClr val="1B2A5C"/>
-          </a:solidFill>
-          <a:ln w="12700">
-            <a:solidFill>
-              <a:srgbClr val="1B2A5C"/>
-            </a:solidFill>
-            <a:prstDash val="solid"/>
-          </a:ln>
-        </p:spPr>
-      </p:sp>
-      <p:sp>
-        <p:nvSpPr>
-          <p:cNvPr id="22" name="Text 20"/>
-          <p:cNvSpPr txBox="1"/>
-          <p:nvPr/>
-        </p:nvSpPr>
-        <p:spPr>
-          <a:xfrm>
-            <a:off x="10149840" y="1828800"/>
-            <a:ext cx="822960" cy="822960"/>
-          </a:xfrm>
-          <a:prstGeom prst="rect">
-            <a:avLst/>
-          </a:prstGeom>
-          <a:noFill/>
-          <a:ln/>
-        </p:spPr>
-        <p:txBody>
-          <a:bodyPr wrap="square" lIns="0" tIns="0" rIns="0" bIns="0" rtlCol="0" anchor="ctr"/>
-          <a:lstStyle/>
-          <a:p>
-            <a:pPr algn="ctr" indent="0" marL="0">
-              <a:buNone/>
-            </a:pPr>
-            <a:r>
-              <a:rPr lang="en-US" sz="2200" b="1" dirty="0">
-                <a:solidFill>
-                  <a:srgbClr val="C9A24B"/>
-                </a:solidFill>
-              </a:rPr>
-              <a:t>5</a:t>
-            </a:r>
-            <a:endParaRPr lang="en-US" sz="2200" dirty="0"/>
-          </a:p>
-        </p:txBody>
-      </p:sp>
-      <p:sp>
-        <p:nvSpPr>
-          <p:cNvPr id="23" name="Text 21"/>
-          <p:cNvSpPr txBox="1"/>
-          <p:nvPr/>
-        </p:nvSpPr>
-        <p:spPr>
-          <a:xfrm>
-            <a:off x="9601200" y="2788920"/>
-            <a:ext cx="1920240" cy="1188720"/>
-          </a:xfrm>
-          <a:prstGeom prst="rect">
-            <a:avLst/>
-          </a:prstGeom>
-          <a:noFill/>
-          <a:ln/>
-        </p:spPr>
-        <p:txBody>
-          <a:bodyPr wrap="square" lIns="0" tIns="0" rIns="0" bIns="0" rtlCol="0" anchor="t"/>
-          <a:lstStyle/>
-          <a:p>
-            <a:pPr algn="ctr" indent="0" marL="0">
-              <a:buNone/>
-            </a:pPr>
-            <a:r>
-              <a:rPr lang="en-US" sz="1500" b="1" dirty="0">
-                <a:solidFill>
-                  <a:srgbClr val="1B2A5C"/>
-                </a:solidFill>
-              </a:rPr>
-              <a:t>Cover</a:t>
-            </a:r>
-            <a:endParaRPr lang="en-US" sz="1500" dirty="0"/>
-          </a:p>
-          <a:p>
-            <a:pPr algn="ctr" indent="0" marL="0">
-              <a:buNone/>
-            </a:pPr>
-            <a:r>
-              <a:rPr lang="en-US" sz="1150" dirty="0">
-                <a:solidFill>
-                  <a:srgbClr val="222222"/>
-                </a:solidFill>
-              </a:rPr>
-              <a:t>Relief arrives within the tier’s response time</a:t>
-            </a:r>
-            <a:endParaRPr lang="en-US" sz="1500" dirty="0"/>
-          </a:p>
-        </p:txBody>
-      </p:sp>
-      <p:graphicFrame>
-        <p:nvGraphicFramePr>
-          <p:cNvPr id="7" name="Table 0"/>
-          <p:cNvGraphicFramePr>
-            <a:graphicFrameLocks noGrp="1"/>
-          </p:cNvGraphicFramePr>
-          <p:nvPr>
-            <p:extLst>
-              <p:ext uri="{D42A27DB-BD31-4B8C-83A1-F6EECF244321}">
-                <p14:modId xmlns:p14="http://schemas.microsoft.com/office/powerpoint/2010/main" val="1579011935"/>
-              </p:ext>
-            </p:extLst>
-          </p:nvPr>
-        </p:nvGraphicFramePr>
-        <p:xfrm>
-          <a:off x="548640" y="4206240"/>
-          <a:ext cx="11091672" cy="914400"/>
-        </p:xfrm>
-        <a:graphic>
-          <a:graphicData uri="http://schemas.openxmlformats.org/drawingml/2006/table">
-            <a:tbl>
-              <a:tblPr/>
-              <a:tblGrid>
-                <a:gridCol w="3694176"/>
-                <a:gridCol w="3694176"/>
-                <a:gridCol w="3703320"/>
-              </a:tblGrid>
-              <a:tr h="685800">
-                <a:tc>
-                  <a:txBody>
-                    <a:bodyPr/>
-                    <a:lstStyle/>
-                    <a:p>
-                      <a:pPr indent="0" marL="0">
-                        <a:buNone/>
-                      </a:pPr>
-                      <a:r>
-                        <a:rPr lang="en-US" sz="1050" b="1" dirty="0">
-                          <a:solidFill>
-                            <a:srgbClr val="1B2A5C"/>
-                          </a:solidFill>
-                        </a:rPr>
-                        <a:t>We own</a:t>
-                      </a:r>
-                      <a:endParaRPr lang="en-US" sz="1050" dirty="0"/>
-                    </a:p>
-                  </a:txBody>
-                  <a:tcPr marL="76200" marR="76200" marT="38100" marB="38100" anchor="b">
-                    <a:lnL w="0" cap="flat" cmpd="sng" algn="ctr">
-                      <a:noFill/>
-                    </a:lnL>
-                    <a:lnR w="0" cap="flat" cmpd="sng" algn="ctr">
-                      <a:noFill/>
-                    </a:lnR>
-                    <a:lnT w="0" cap="flat" cmpd="sng" algn="ctr">
-                      <a:noFill/>
-                    </a:lnT>
-                    <a:lnB w="22225" cap="flat" cmpd="sng" algn="ctr">
-                      <a:solidFill>
-                        <a:srgbClr val="1B2A5C"/>
-                      </a:solidFill>
-                      <a:prstDash val="solid"/>
-                      <a:round/>
-                      <a:headEnd type="none" w="med" len="med"/>
-                      <a:tailEnd type="none" w="med" len="med"/>
-                    </a:lnB>
-                  </a:tcPr>
-                </a:tc>
-                <a:tc>
-                  <a:txBody>
-                    <a:bodyPr/>
-                    <a:lstStyle/>
-                    <a:p>
-                      <a:pPr indent="0" marL="0">
-                        <a:buNone/>
-                      </a:pPr>
-                      <a:r>
-                        <a:rPr lang="en-US" sz="1050" b="1" dirty="0">
-                          <a:solidFill>
-                            <a:srgbClr val="1B2A5C"/>
-                          </a:solidFill>
-                        </a:rPr>
-                        <a:t>Partners provide</a:t>
-                      </a:r>
-                      <a:endParaRPr lang="en-US" sz="1050" dirty="0"/>
-                    </a:p>
-                  </a:txBody>
-                  <a:tcPr marL="76200" marR="76200" marT="38100" marB="38100" anchor="b">
-                    <a:lnL w="0" cap="flat" cmpd="sng" algn="ctr">
-                      <a:noFill/>
-                    </a:lnL>
-                    <a:lnR w="0" cap="flat" cmpd="sng" algn="ctr">
-                      <a:noFill/>
-                    </a:lnR>
-                    <a:lnT w="0" cap="flat" cmpd="sng" algn="ctr">
-                      <a:noFill/>
-                    </a:lnT>
-                    <a:lnB w="22225" cap="flat" cmpd="sng" algn="ctr">
-                      <a:solidFill>
-                        <a:srgbClr val="1B2A5C"/>
-                      </a:solidFill>
-                      <a:prstDash val="solid"/>
-                      <a:round/>
-                      <a:headEnd type="none" w="med" len="med"/>
-                      <a:tailEnd type="none" w="med" len="med"/>
-                    </a:lnB>
-                  </a:tcPr>
-                </a:tc>
-                <a:tc>
-                  <a:txBody>
-                    <a:bodyPr/>
-                    <a:lstStyle/>
-                    <a:p>
-                      <a:pPr indent="0" marL="0">
-                        <a:buNone/>
-                      </a:pPr>
-                      <a:r>
-                        <a:rPr lang="en-US" sz="1050" b="1" dirty="0">
-                          <a:solidFill>
-                            <a:srgbClr val="1B2A5C"/>
-                          </a:solidFill>
-                        </a:rPr>
-                        <a:t>We never</a:t>
-                      </a:r>
-                      <a:endParaRPr lang="en-US" sz="1050" dirty="0"/>
-                    </a:p>
-                  </a:txBody>
-                  <a:tcPr marL="76200" marR="76200" marT="38100" marB="38100" anchor="b">
-                    <a:lnL w="0" cap="flat" cmpd="sng" algn="ctr">
-                      <a:noFill/>
-                    </a:lnL>
-                    <a:lnR w="0" cap="flat" cmpd="sng" algn="ctr">
-                      <a:noFill/>
-                    </a:lnR>
-                    <a:lnT w="0" cap="flat" cmpd="sng" algn="ctr">
-                      <a:noFill/>
-                    </a:lnT>
-                    <a:lnB w="22225" cap="flat" cmpd="sng" algn="ctr">
-                      <a:solidFill>
-                        <a:srgbClr val="1B2A5C"/>
-                      </a:solidFill>
-                      <a:prstDash val="solid"/>
-                      <a:round/>
-                      <a:headEnd type="none" w="med" len="med"/>
-                      <a:tailEnd type="none" w="med" len="med"/>
-                    </a:lnB>
-                  </a:tcPr>
-                </a:tc>
-              </a:tr>
-              <a:tr h="685800">
-                <a:tc>
-                  <a:txBody>
-                    <a:bodyPr/>
-                    <a:lstStyle/>
-                    <a:p>
-                      <a:pPr indent="0" marL="0">
-                        <a:buNone/>
-                      </a:pPr>
-                      <a:r>
-                        <a:rPr lang="en-US" sz="1100" b="1" dirty="0">
-                          <a:solidFill>
-                            <a:srgbClr val="1B2A5C"/>
-                          </a:solidFill>
-                        </a:rPr>
-                        <a:t>Relief scheduling, reliever contracts, welfare monitoring, the staff record</a:t>
-                      </a:r>
-                      <a:endParaRPr lang="en-US" sz="1100" dirty="0"/>
-                    </a:p>
-                  </a:txBody>
-                  <a:tcPr marL="76200" marR="76200" marT="38100" marB="38100" anchor="ctr">
-                    <a:lnL w="0" cap="flat" cmpd="sng" algn="ctr">
-                      <a:noFill/>
-                    </a:lnL>
-                    <a:lnR w="0" cap="flat" cmpd="sng" algn="ctr">
-                      <a:noFill/>
-                    </a:lnR>
-                    <a:lnT w="0" cap="flat" cmpd="sng" algn="ctr">
-                      <a:noFill/>
-                    </a:lnT>
-                    <a:lnB w="12700" cap="flat" cmpd="sng" algn="ctr">
-                      <a:solidFill>
-                        <a:srgbClr val="1B2A5C"/>
-                      </a:solidFill>
-                      <a:prstDash val="solid"/>
-                      <a:round/>
-                      <a:headEnd type="none" w="med" len="med"/>
-                      <a:tailEnd type="none" w="med" len="med"/>
-                    </a:lnB>
-                  </a:tcPr>
-                </a:tc>
-                <a:tc>
-                  <a:txBody>
-                    <a:bodyPr/>
-                    <a:lstStyle/>
-                    <a:p>
-                      <a:pPr indent="0" marL="0">
-                        <a:buNone/>
-                      </a:pPr>
-                      <a:r>
-                        <a:rPr lang="en-US" sz="1100" dirty="0">
-                          <a:solidFill>
-                            <a:srgbClr val="222222"/>
-                          </a:solidFill>
-                        </a:rPr>
-                        <a:t>Employer of record, insurance broker, immigration counsel, background-check rails</a:t>
-                      </a:r>
-                      <a:endParaRPr lang="en-US" sz="1100" dirty="0"/>
-                    </a:p>
-                  </a:txBody>
-                  <a:tcPr marL="76200" marR="76200" marT="38100" marB="38100" anchor="ctr">
-                    <a:lnL w="0" cap="flat" cmpd="sng" algn="ctr">
-                      <a:noFill/>
-                    </a:lnL>
-                    <a:lnR w="0" cap="flat" cmpd="sng" algn="ctr">
-                      <a:noFill/>
-                    </a:lnR>
-                    <a:lnT w="0" cap="flat" cmpd="sng" algn="ctr">
-                      <a:noFill/>
-                    </a:lnT>
-                    <a:lnB w="12700" cap="flat" cmpd="sng" algn="ctr">
-                      <a:solidFill>
-                        <a:srgbClr val="1B2A5C"/>
-                      </a:solidFill>
-                      <a:prstDash val="solid"/>
-                      <a:round/>
-                      <a:headEnd type="none" w="med" len="med"/>
-                      <a:tailEnd type="none" w="med" len="med"/>
-                    </a:lnB>
-                  </a:tcPr>
-                </a:tc>
-                <a:tc>
-                  <a:txBody>
-                    <a:bodyPr/>
-                    <a:lstStyle/>
-                    <a:p>
-                      <a:pPr indent="0" marL="0">
-                        <a:buNone/>
-                      </a:pPr>
-                      <a:r>
-                        <a:rPr lang="en-US" sz="1100" dirty="0">
-                          <a:solidFill>
-                            <a:srgbClr val="222222"/>
-                          </a:solidFill>
-                        </a:rPr>
-                        <a:t>Hold passports, give legal advice, or own homes, yachts or aircraft</a:t>
-                      </a:r>
-                      <a:endParaRPr lang="en-US" sz="1100" dirty="0"/>
-                    </a:p>
-                  </a:txBody>
-                  <a:tcPr marL="76200" marR="76200" marT="38100" marB="38100" anchor="ctr">
-                    <a:lnL w="0" cap="flat" cmpd="sng" algn="ctr">
-                      <a:noFill/>
-                    </a:lnL>
-                    <a:lnR w="0" cap="flat" cmpd="sng" algn="ctr">
-                      <a:noFill/>
-                    </a:lnR>
-                    <a:lnT w="0" cap="flat" cmpd="sng" algn="ctr">
-                      <a:noFill/>
-                    </a:lnT>
-                    <a:lnB w="12700" cap="flat" cmpd="sng" algn="ctr">
-                      <a:solidFill>
-                        <a:srgbClr val="1B2A5C"/>
-                      </a:solidFill>
-                      <a:prstDash val="solid"/>
-                      <a:round/>
-                      <a:headEnd type="none" w="med" len="med"/>
-                      <a:tailEnd type="none" w="med" len="med"/>
-                    </a:lnB>
-                  </a:tcPr>
-                </a:tc>
-              </a:tr>
-            </a:tbl>
-          </a:graphicData>
-        </a:graphic>
-      </p:graphicFrame>
+              <a:t>Rails partners — employer of record, insurance broker, immigration counsel, background checks — hold the licences; we never hold passports or give legal advice.</a:t>
+            </a:r>
+            <a:endParaRPr lang="en-US" sz="1200" dirty="0"/>
+          </a:p>
+        </p:txBody>
+      </p:sp>
       <p:sp>
         <p:nvSpPr>
           <p:cNvPr id="25" name="Slide Number Placeholder 0"/>
@@ -10151,7 +10569,7 @@
                   <a:srgbClr val="6B6B6B"/>
                 </a:solidFill>
               </a:rPr>
-              <a:t>Source: Henley Private Wealth Migration Report 2025 (vendor projection); Home Office PQ55427 (Jun 2025); Gulf News on MOHRE actions (2022–26); Deloitte 2024; Altrata 2026.</a:t>
+              <a:t>Source: Henley Private Wealth Migration Report 2025 (vendor projection); Home Office PQ55427 (Jun 2025); Gulf News on MOHRE actions (2022–26); Deloitte 2024; Banco Central via Economic News Brasil (Jan 2026).</a:t>
             </a:r>
             <a:endParaRPr lang="en-US" sz="850" dirty="0"/>
           </a:p>
@@ -10406,7 +10824,7 @@
                   <a:srgbClr val="1B2A5C"/>
                 </a:solidFill>
               </a:rPr>
-              <a:t>153</a:t>
+              <a:t>US$21.7bn</a:t>
             </a:r>
             <a:endParaRPr lang="en-US" sz="3000" dirty="0"/>
           </a:p>
@@ -10442,7 +10860,7 @@
                   <a:srgbClr val="222222"/>
                 </a:solidFill>
               </a:rPr>
-              <a:t>UAE employers acted against for domestic-worker swaps; fines up to AED 50,000</a:t>
+              <a:t>spent abroad by Brazilians in 2025, up 10% — Italy their most-booked country</a:t>
             </a:r>
             <a:endParaRPr lang="en-US" sz="1200" dirty="0"/>
           </a:p>
@@ -10647,7 +11065,7 @@
                   <a:schemeClr val="accent4"/>
                 </a:solidFill>
               </a:rPr>
-              <a:t>BUSINESS MODEL</a:t>
+              <a:t>COMPETITION</a:t>
             </a:r>
             <a:endParaRPr lang="en-US" sz="1000" dirty="0"/>
           </a:p>
@@ -10685,7 +11103,7 @@
                   <a:schemeClr val="tx2"/>
                 </a:solidFill>
               </a:rPr>
-              <a:t>A membership per staff position: a base, premiums for speed and reach, discounts for what families give us back</a:t>
+              <a:t>We envelop single-function rivals by bundling them around the family’s own people and data</a:t>
             </a:r>
             <a:endParaRPr lang="en-US" sz="2200" dirty="0"/>
           </a:p>
@@ -10721,7 +11139,7 @@
                   <a:srgbClr val="6B6B6B"/>
                 </a:solidFill>
               </a:rPr>
-              <a:t>Source: research/fmo_strategy.md §5.6 and §6. Break-even fee and discount ceilings are CALC; fixed costs £90k a year (assumption).</a:t>
+              <a:t>Source: Envelopment per the network-markets framework; raw/fmo_competitors.md and raw/alt_a–c.md (Oct 2026); our positioning assessment.</a:t>
             </a:r>
             <a:endParaRPr lang="en-US" sz="850" dirty="0"/>
           </a:p>
@@ -10735,17 +11153,601 @@
         </p:nvSpPr>
         <p:spPr>
           <a:xfrm>
-            <a:off x="548640" y="1783080"/>
-            <a:ext cx="3611880" cy="3520440"/>
-          </a:xfrm>
-          <a:prstGeom prst="rect">
-            <a:avLst/>
+            <a:off x="1097280" y="1783080"/>
+            <a:ext cx="6035040" cy="3749040"/>
+          </a:xfrm>
+          <a:prstGeom prst="rect">
+            <a:avLst/>
+          </a:prstGeom>
+          <a:solidFill>
+            <a:srgbClr val="F6F7FA"/>
+          </a:solidFill>
+          <a:ln w="9525">
+            <a:solidFill>
+              <a:srgbClr val="D0D4DC"/>
+            </a:solidFill>
+            <a:prstDash val="solid"/>
+          </a:ln>
+        </p:spPr>
+      </p:sp>
+      <p:sp>
+        <p:nvSpPr>
+          <p:cNvPr id="6" name="Shape 4"/>
+          <p:cNvSpPr/>
+          <p:nvPr/>
+        </p:nvSpPr>
+        <p:spPr>
+          <a:xfrm>
+            <a:off x="4114800" y="1783080"/>
+            <a:ext cx="0" cy="3749040"/>
+          </a:xfrm>
+          <a:prstGeom prst="line">
+            <a:avLst/>
+          </a:prstGeom>
+          <a:noFill/>
+          <a:ln w="9525">
+            <a:solidFill>
+              <a:srgbClr val="D0D4DC"/>
+            </a:solidFill>
+            <a:prstDash val="dash"/>
+          </a:ln>
+        </p:spPr>
+      </p:sp>
+      <p:sp>
+        <p:nvSpPr>
+          <p:cNvPr id="7" name="Shape 5"/>
+          <p:cNvSpPr/>
+          <p:nvPr/>
+        </p:nvSpPr>
+        <p:spPr>
+          <a:xfrm>
+            <a:off x="1097280" y="3657600"/>
+            <a:ext cx="6035040" cy="0"/>
+          </a:xfrm>
+          <a:prstGeom prst="line">
+            <a:avLst/>
+          </a:prstGeom>
+          <a:noFill/>
+          <a:ln w="9525">
+            <a:solidFill>
+              <a:srgbClr val="D0D4DC"/>
+            </a:solidFill>
+            <a:prstDash val="dash"/>
+          </a:ln>
+        </p:spPr>
+      </p:sp>
+      <p:sp>
+        <p:nvSpPr>
+          <p:cNvPr id="8" name="Text 6"/>
+          <p:cNvSpPr txBox="1"/>
+          <p:nvPr/>
+        </p:nvSpPr>
+        <p:spPr>
+          <a:xfrm>
+            <a:off x="1097280" y="5577840"/>
+            <a:ext cx="6035040" cy="274320"/>
+          </a:xfrm>
+          <a:prstGeom prst="rect">
+            <a:avLst/>
+          </a:prstGeom>
+          <a:noFill/>
+          <a:ln/>
+        </p:spPr>
+        <p:txBody>
+          <a:bodyPr wrap="square" lIns="0" tIns="0" rIns="0" bIns="0" rtlCol="0" anchor="ctr"/>
+          <a:lstStyle/>
+          <a:p>
+            <a:pPr algn="ctr" indent="0" marL="0">
+              <a:buNone/>
+            </a:pPr>
+            <a:r>
+              <a:rPr lang="en-US" sz="1050" b="1" dirty="0">
+                <a:solidFill>
+                  <a:srgbClr val="6B6B6B"/>
+                </a:solidFill>
+              </a:rPr>
+              <a:t>Breadth of the journey covered →</a:t>
+            </a:r>
+            <a:endParaRPr lang="en-US" sz="1050" dirty="0"/>
+          </a:p>
+        </p:txBody>
+      </p:sp>
+      <p:sp>
+        <p:nvSpPr>
+          <p:cNvPr id="9" name="Text 7"/>
+          <p:cNvSpPr txBox="1"/>
+          <p:nvPr/>
+        </p:nvSpPr>
+        <p:spPr>
+          <a:xfrm>
+            <a:off x="274320" y="1490472"/>
+            <a:ext cx="3657600" cy="274320"/>
+          </a:xfrm>
+          <a:prstGeom prst="rect">
+            <a:avLst/>
+          </a:prstGeom>
+          <a:noFill/>
+          <a:ln/>
+        </p:spPr>
+        <p:txBody>
+          <a:bodyPr wrap="square" lIns="0" tIns="0" rIns="0" bIns="0" rtlCol="0" anchor="ctr"/>
+          <a:lstStyle/>
+          <a:p>
+            <a:pPr indent="0" marL="0">
+              <a:buNone/>
+            </a:pPr>
+            <a:r>
+              <a:rPr lang="en-US" sz="1050" b="1" dirty="0">
+                <a:solidFill>
+                  <a:srgbClr val="6B6B6B"/>
+                </a:solidFill>
+              </a:rPr>
+              <a:t>People and legal status covered ↑</a:t>
+            </a:r>
+            <a:endParaRPr lang="en-US" sz="1050" dirty="0"/>
+          </a:p>
+        </p:txBody>
+      </p:sp>
+      <p:sp>
+        <p:nvSpPr>
+          <p:cNvPr id="10" name="Shape 8"/>
+          <p:cNvSpPr/>
+          <p:nvPr/>
+        </p:nvSpPr>
+        <p:spPr>
+          <a:xfrm>
+            <a:off x="1452067" y="3287268"/>
+            <a:ext cx="1463040" cy="365760"/>
+          </a:xfrm>
+          <a:prstGeom prst="roundRect">
+            <a:avLst>
+              <a:gd name="adj" fmla="val 25000"/>
+            </a:avLst>
+          </a:prstGeom>
+          <a:solidFill>
+            <a:srgbClr val="B7C6DE"/>
+          </a:solidFill>
+          <a:ln w="12700">
+            <a:solidFill>
+              <a:srgbClr val="FFFFFF"/>
+            </a:solidFill>
+            <a:prstDash val="solid"/>
+          </a:ln>
+        </p:spPr>
+      </p:sp>
+      <p:sp>
+        <p:nvSpPr>
+          <p:cNvPr id="11" name="Text 9"/>
+          <p:cNvSpPr txBox="1"/>
+          <p:nvPr/>
+        </p:nvSpPr>
+        <p:spPr>
+          <a:xfrm>
+            <a:off x="1452067" y="3287268"/>
+            <a:ext cx="1463040" cy="365760"/>
+          </a:xfrm>
+          <a:prstGeom prst="rect">
+            <a:avLst/>
+          </a:prstGeom>
+          <a:noFill/>
+          <a:ln/>
+        </p:spPr>
+        <p:txBody>
+          <a:bodyPr wrap="square" lIns="0" tIns="0" rIns="0" bIns="0" rtlCol="0" anchor="ctr"/>
+          <a:lstStyle/>
+          <a:p>
+            <a:pPr algn="ctr" indent="0" marL="0">
+              <a:buNone/>
+            </a:pPr>
+            <a:r>
+              <a:rPr lang="en-US" sz="1000" b="1" dirty="0">
+                <a:solidFill>
+                  <a:srgbClr val="222222"/>
+                </a:solidFill>
+              </a:rPr>
+              <a:t>Staff agencies</a:t>
+            </a:r>
+            <a:endParaRPr lang="en-US" sz="1000" dirty="0"/>
+          </a:p>
+        </p:txBody>
+      </p:sp>
+      <p:sp>
+        <p:nvSpPr>
+          <p:cNvPr id="12" name="Shape 10"/>
+          <p:cNvSpPr/>
+          <p:nvPr/>
+        </p:nvSpPr>
+        <p:spPr>
+          <a:xfrm>
+            <a:off x="1271016" y="4224528"/>
+            <a:ext cx="1463040" cy="365760"/>
+          </a:xfrm>
+          <a:prstGeom prst="roundRect">
+            <a:avLst>
+              <a:gd name="adj" fmla="val 25000"/>
+            </a:avLst>
+          </a:prstGeom>
+          <a:solidFill>
+            <a:srgbClr val="B7C6DE"/>
+          </a:solidFill>
+          <a:ln w="12700">
+            <a:solidFill>
+              <a:srgbClr val="FFFFFF"/>
+            </a:solidFill>
+            <a:prstDash val="solid"/>
+          </a:ln>
+        </p:spPr>
+      </p:sp>
+      <p:sp>
+        <p:nvSpPr>
+          <p:cNvPr id="13" name="Text 11"/>
+          <p:cNvSpPr txBox="1"/>
+          <p:nvPr/>
+        </p:nvSpPr>
+        <p:spPr>
+          <a:xfrm>
+            <a:off x="1271016" y="4224528"/>
+            <a:ext cx="1463040" cy="365760"/>
+          </a:xfrm>
+          <a:prstGeom prst="rect">
+            <a:avLst/>
+          </a:prstGeom>
+          <a:noFill/>
+          <a:ln/>
+        </p:spPr>
+        <p:txBody>
+          <a:bodyPr wrap="square" lIns="0" tIns="0" rIns="0" bIns="0" rtlCol="0" anchor="ctr"/>
+          <a:lstStyle/>
+          <a:p>
+            <a:pPr algn="ctr" indent="0" marL="0">
+              <a:buNone/>
+            </a:pPr>
+            <a:r>
+              <a:rPr lang="en-US" sz="1000" b="1" dirty="0">
+                <a:solidFill>
+                  <a:srgbClr val="222222"/>
+                </a:solidFill>
+              </a:rPr>
+              <a:t>Payroll / EOR</a:t>
+            </a:r>
+            <a:endParaRPr lang="en-US" sz="1000" dirty="0"/>
+          </a:p>
+        </p:txBody>
+      </p:sp>
+      <p:sp>
+        <p:nvSpPr>
+          <p:cNvPr id="14" name="Shape 12"/>
+          <p:cNvSpPr/>
+          <p:nvPr/>
+        </p:nvSpPr>
+        <p:spPr>
+          <a:xfrm>
+            <a:off x="2176272" y="2649931"/>
+            <a:ext cx="1463040" cy="365760"/>
+          </a:xfrm>
+          <a:prstGeom prst="roundRect">
+            <a:avLst>
+              <a:gd name="adj" fmla="val 25000"/>
+            </a:avLst>
+          </a:prstGeom>
+          <a:solidFill>
+            <a:srgbClr val="5B8DB8"/>
+          </a:solidFill>
+          <a:ln w="12700">
+            <a:solidFill>
+              <a:srgbClr val="FFFFFF"/>
+            </a:solidFill>
+            <a:prstDash val="solid"/>
+          </a:ln>
+        </p:spPr>
+      </p:sp>
+      <p:sp>
+        <p:nvSpPr>
+          <p:cNvPr id="15" name="Text 13"/>
+          <p:cNvSpPr txBox="1"/>
+          <p:nvPr/>
+        </p:nvSpPr>
+        <p:spPr>
+          <a:xfrm>
+            <a:off x="2176272" y="2649931"/>
+            <a:ext cx="1463040" cy="365760"/>
+          </a:xfrm>
+          <a:prstGeom prst="rect">
+            <a:avLst/>
+          </a:prstGeom>
+          <a:noFill/>
+          <a:ln/>
+        </p:spPr>
+        <p:txBody>
+          <a:bodyPr wrap="square" lIns="0" tIns="0" rIns="0" bIns="0" rtlCol="0" anchor="ctr"/>
+          <a:lstStyle/>
+          <a:p>
+            <a:pPr algn="ctr" indent="0" marL="0">
+              <a:buNone/>
+            </a:pPr>
+            <a:r>
+              <a:rPr lang="en-US" sz="1000" b="1" dirty="0">
+                <a:solidFill>
+                  <a:srgbClr val="FFFFFF"/>
+                </a:solidFill>
+              </a:rPr>
+              <a:t>Morgan &amp; Mallet</a:t>
+            </a:r>
+            <a:endParaRPr lang="en-US" sz="1000" dirty="0"/>
+          </a:p>
+        </p:txBody>
+      </p:sp>
+      <p:sp>
+        <p:nvSpPr>
+          <p:cNvPr id="16" name="Shape 14"/>
+          <p:cNvSpPr/>
+          <p:nvPr/>
+        </p:nvSpPr>
+        <p:spPr>
+          <a:xfrm>
+            <a:off x="3685032" y="4786884"/>
+            <a:ext cx="1463040" cy="365760"/>
+          </a:xfrm>
+          <a:prstGeom prst="roundRect">
+            <a:avLst>
+              <a:gd name="adj" fmla="val 25000"/>
+            </a:avLst>
+          </a:prstGeom>
+          <a:solidFill>
+            <a:srgbClr val="B7C6DE"/>
+          </a:solidFill>
+          <a:ln w="12700">
+            <a:solidFill>
+              <a:srgbClr val="FFFFFF"/>
+            </a:solidFill>
+            <a:prstDash val="solid"/>
+          </a:ln>
+        </p:spPr>
+      </p:sp>
+      <p:sp>
+        <p:nvSpPr>
+          <p:cNvPr id="17" name="Text 15"/>
+          <p:cNvSpPr txBox="1"/>
+          <p:nvPr/>
+        </p:nvSpPr>
+        <p:spPr>
+          <a:xfrm>
+            <a:off x="3685032" y="4786884"/>
+            <a:ext cx="1463040" cy="365760"/>
+          </a:xfrm>
+          <a:prstGeom prst="rect">
+            <a:avLst/>
+          </a:prstGeom>
+          <a:noFill/>
+          <a:ln/>
+        </p:spPr>
+        <p:txBody>
+          <a:bodyPr wrap="square" lIns="0" tIns="0" rIns="0" bIns="0" rtlCol="0" anchor="ctr"/>
+          <a:lstStyle/>
+          <a:p>
+            <a:pPr algn="ctr" indent="0" marL="0">
+              <a:buNone/>
+            </a:pPr>
+            <a:r>
+              <a:rPr lang="en-US" sz="1000" b="1" dirty="0">
+                <a:solidFill>
+                  <a:srgbClr val="222222"/>
+                </a:solidFill>
+              </a:rPr>
+              <a:t>Concierge clubs</a:t>
+            </a:r>
+            <a:endParaRPr lang="en-US" sz="1000" dirty="0"/>
+          </a:p>
+        </p:txBody>
+      </p:sp>
+      <p:sp>
+        <p:nvSpPr>
+          <p:cNvPr id="18" name="Shape 16"/>
+          <p:cNvSpPr/>
+          <p:nvPr/>
+        </p:nvSpPr>
+        <p:spPr>
+          <a:xfrm>
+            <a:off x="4913071" y="4299509"/>
+            <a:ext cx="1783080" cy="365760"/>
+          </a:xfrm>
+          <a:prstGeom prst="roundRect">
+            <a:avLst>
+              <a:gd name="adj" fmla="val 25000"/>
+            </a:avLst>
+          </a:prstGeom>
+          <a:solidFill>
+            <a:srgbClr val="B7C6DE"/>
+          </a:solidFill>
+          <a:ln w="12700">
+            <a:solidFill>
+              <a:srgbClr val="FFFFFF"/>
+            </a:solidFill>
+            <a:prstDash val="solid"/>
+          </a:ln>
+        </p:spPr>
+      </p:sp>
+      <p:sp>
+        <p:nvSpPr>
+          <p:cNvPr id="19" name="Text 17"/>
+          <p:cNvSpPr txBox="1"/>
+          <p:nvPr/>
+        </p:nvSpPr>
+        <p:spPr>
+          <a:xfrm>
+            <a:off x="4913071" y="4299509"/>
+            <a:ext cx="1783080" cy="365760"/>
+          </a:xfrm>
+          <a:prstGeom prst="rect">
+            <a:avLst/>
+          </a:prstGeom>
+          <a:noFill/>
+          <a:ln/>
+        </p:spPr>
+        <p:txBody>
+          <a:bodyPr wrap="square" lIns="0" tIns="0" rIns="0" bIns="0" rtlCol="0" anchor="ctr"/>
+          <a:lstStyle/>
+          <a:p>
+            <a:pPr algn="ctr" indent="0" marL="0">
+              <a:buNone/>
+            </a:pPr>
+            <a:r>
+              <a:rPr lang="en-US" sz="1000" b="1" dirty="0">
+                <a:solidFill>
+                  <a:srgbClr val="222222"/>
+                </a:solidFill>
+              </a:rPr>
+              <a:t>Advisors and DMCs</a:t>
+            </a:r>
+            <a:endParaRPr lang="en-US" sz="1000" dirty="0"/>
+          </a:p>
+        </p:txBody>
+      </p:sp>
+      <p:sp>
+        <p:nvSpPr>
+          <p:cNvPr id="20" name="Shape 18"/>
+          <p:cNvSpPr/>
+          <p:nvPr/>
+        </p:nvSpPr>
+        <p:spPr>
+          <a:xfrm>
+            <a:off x="3826764" y="3774643"/>
+            <a:ext cx="1783080" cy="365760"/>
+          </a:xfrm>
+          <a:prstGeom prst="roundRect">
+            <a:avLst>
+              <a:gd name="adj" fmla="val 25000"/>
+            </a:avLst>
+          </a:prstGeom>
+          <a:solidFill>
+            <a:srgbClr val="B7C6DE"/>
+          </a:solidFill>
+          <a:ln w="12700">
+            <a:solidFill>
+              <a:srgbClr val="FFFFFF"/>
+            </a:solidFill>
+            <a:prstDash val="solid"/>
+          </a:ln>
+        </p:spPr>
+      </p:sp>
+      <p:sp>
+        <p:nvSpPr>
+          <p:cNvPr id="21" name="Text 19"/>
+          <p:cNvSpPr txBox="1"/>
+          <p:nvPr/>
+        </p:nvSpPr>
+        <p:spPr>
+          <a:xfrm>
+            <a:off x="3826764" y="3774643"/>
+            <a:ext cx="1783080" cy="365760"/>
+          </a:xfrm>
+          <a:prstGeom prst="rect">
+            <a:avLst/>
+          </a:prstGeom>
+          <a:noFill/>
+          <a:ln/>
+        </p:spPr>
+        <p:txBody>
+          <a:bodyPr wrap="square" lIns="0" tIns="0" rIns="0" bIns="0" rtlCol="0" anchor="ctr"/>
+          <a:lstStyle/>
+          <a:p>
+            <a:pPr algn="ctr" indent="0" marL="0">
+              <a:buNone/>
+            </a:pPr>
+            <a:r>
+              <a:rPr lang="en-US" sz="1000" b="1" dirty="0">
+                <a:solidFill>
+                  <a:srgbClr val="222222"/>
+                </a:solidFill>
+              </a:rPr>
+              <a:t>Booking platforms</a:t>
+            </a:r>
+            <a:endParaRPr lang="en-US" sz="1000" dirty="0"/>
+          </a:p>
+        </p:txBody>
+      </p:sp>
+      <p:sp>
+        <p:nvSpPr>
+          <p:cNvPr id="22" name="Shape 20"/>
+          <p:cNvSpPr/>
+          <p:nvPr/>
+        </p:nvSpPr>
+        <p:spPr>
+          <a:xfrm>
+            <a:off x="5033772" y="2162556"/>
+            <a:ext cx="1783080" cy="365760"/>
+          </a:xfrm>
+          <a:prstGeom prst="roundRect">
+            <a:avLst>
+              <a:gd name="adj" fmla="val 25000"/>
+            </a:avLst>
           </a:prstGeom>
           <a:solidFill>
             <a:srgbClr val="1B2A5C"/>
           </a:solidFill>
           <a:ln w="12700">
             <a:solidFill>
+              <a:srgbClr val="FFFFFF"/>
+            </a:solidFill>
+            <a:prstDash val="solid"/>
+          </a:ln>
+        </p:spPr>
+      </p:sp>
+      <p:sp>
+        <p:nvSpPr>
+          <p:cNvPr id="23" name="Text 21"/>
+          <p:cNvSpPr txBox="1"/>
+          <p:nvPr/>
+        </p:nvSpPr>
+        <p:spPr>
+          <a:xfrm>
+            <a:off x="5033772" y="2162556"/>
+            <a:ext cx="1783080" cy="365760"/>
+          </a:xfrm>
+          <a:prstGeom prst="rect">
+            <a:avLst/>
+          </a:prstGeom>
+          <a:noFill/>
+          <a:ln/>
+        </p:spPr>
+        <p:txBody>
+          <a:bodyPr wrap="square" lIns="0" tIns="0" rIns="0" bIns="0" rtlCol="0" anchor="ctr"/>
+          <a:lstStyle/>
+          <a:p>
+            <a:pPr algn="ctr" indent="0" marL="0">
+              <a:buNone/>
+            </a:pPr>
+            <a:r>
+              <a:rPr lang="en-US" sz="1000" b="1" dirty="0">
+                <a:solidFill>
+                  <a:srgbClr val="FFFFFF"/>
+                </a:solidFill>
+              </a:rPr>
+              <a:t>Otium Chigi Journeys</a:t>
+            </a:r>
+            <a:endParaRPr lang="en-US" sz="1000" dirty="0"/>
+          </a:p>
+        </p:txBody>
+      </p:sp>
+      <p:sp>
+        <p:nvSpPr>
+          <p:cNvPr id="24" name="Shape 22"/>
+          <p:cNvSpPr/>
+          <p:nvPr/>
+        </p:nvSpPr>
+        <p:spPr>
+          <a:xfrm>
+            <a:off x="7589520" y="1783080"/>
+            <a:ext cx="4050792" cy="3749040"/>
+          </a:xfrm>
+          <a:prstGeom prst="rect">
+            <a:avLst/>
+          </a:prstGeom>
+          <a:solidFill>
+            <a:srgbClr val="1B2A5C"/>
+          </a:solidFill>
+          <a:ln w="9525">
+            <a:solidFill>
               <a:srgbClr val="1B2A5C"/>
             </a:solidFill>
             <a:prstDash val="solid"/>
@@ -10754,67 +11756,47 @@
       </p:sp>
       <p:sp>
         <p:nvSpPr>
-          <p:cNvPr id="6" name="Text 4"/>
+          <p:cNvPr id="25" name="Text 23"/>
           <p:cNvSpPr txBox="1"/>
           <p:nvPr/>
         </p:nvSpPr>
         <p:spPr>
           <a:xfrm>
-            <a:off x="731520" y="1874520"/>
-            <a:ext cx="3246120" cy="411480"/>
-          </a:xfrm>
-          <a:prstGeom prst="rect">
-            <a:avLst/>
-          </a:prstGeom>
-          <a:noFill/>
-          <a:ln/>
-        </p:spPr>
-        <p:txBody>
-          <a:bodyPr wrap="square" lIns="0" tIns="0" rIns="0" bIns="0" rtlCol="0" anchor="ctr"/>
-          <a:lstStyle/>
-          <a:p>
-            <a:pPr indent="0" marL="0">
-              <a:buNone/>
-            </a:pPr>
-            <a:r>
-              <a:rPr lang="en-US" sz="1500" b="1" dirty="0">
+            <a:off x="7726680" y="1874520"/>
+            <a:ext cx="3776472" cy="3566160"/>
+          </a:xfrm>
+          <a:prstGeom prst="rect">
+            <a:avLst/>
+          </a:prstGeom>
+          <a:noFill/>
+          <a:ln/>
+        </p:spPr>
+        <p:txBody>
+          <a:bodyPr wrap="square" lIns="0" tIns="0" rIns="0" bIns="0" rtlCol="0" anchor="t"/>
+          <a:lstStyle/>
+          <a:p>
+            <a:pPr indent="0" marL="0">
+              <a:spcAft>
+                <a:spcPts val="400"/>
+              </a:spcAft>
+              <a:buNone/>
+            </a:pPr>
+            <a:r>
+              <a:rPr lang="en-US" sz="1300" b="1" dirty="0">
                 <a:solidFill>
                   <a:srgbClr val="C9A24B"/>
                 </a:solidFill>
               </a:rPr>
-              <a:t>Base membership</a:t>
-            </a:r>
-            <a:endParaRPr lang="en-US" sz="1500" dirty="0"/>
-          </a:p>
-        </p:txBody>
-      </p:sp>
-      <p:sp>
-        <p:nvSpPr>
-          <p:cNvPr id="7" name="Text 5"/>
-          <p:cNvSpPr txBox="1"/>
-          <p:nvPr/>
-        </p:nvSpPr>
-        <p:spPr>
-          <a:xfrm>
-            <a:off x="731520" y="2377440"/>
-            <a:ext cx="3246120" cy="2834640"/>
-          </a:xfrm>
-          <a:prstGeom prst="rect">
-            <a:avLst/>
-          </a:prstGeom>
-          <a:noFill/>
-          <a:ln/>
-        </p:spPr>
-        <p:txBody>
-          <a:bodyPr wrap="square" lIns="0" tIns="0" rIns="0" bIns="0" rtlCol="0" anchor="t"/>
-          <a:lstStyle/>
-          <a:p>
-            <a:pPr marL="342900" indent="-342900">
+              <a:t>Honest about envelopment</a:t>
+            </a:r>
+            <a:endParaRPr lang="en-US" sz="1300" dirty="0"/>
+          </a:p>
+          <a:p>
+            <a:pPr indent="0" marL="0">
               <a:spcAft>
-                <a:spcPts val="600"/>
+                <a:spcPts val="400"/>
               </a:spcAft>
-              <a:buSzPct val="100000"/>
-              <a:buChar char="•"/>
+              <a:buNone/>
             </a:pPr>
             <a:r>
               <a:rPr lang="en-US" sz="1200" dirty="0">
@@ -10822,17 +11804,25 @@
                   <a:srgbClr val="FFFFFF"/>
                 </a:solidFill>
               </a:rPr>
-              <a:t>Planned relief from an employed reliever</a:t>
-            </a:r>
-            <a:endParaRPr lang="en-US" sz="1200" dirty="0"/>
-          </a:p>
-          <a:p>
-            <a:pPr marL="342900" indent="-342900">
+              <a:t>Bigger platforms could do it to us: card issuers and banks, advisor networks, booking platforms.</a:t>
+            </a:r>
+            <a:endParaRPr lang="en-US" sz="1300" dirty="0"/>
+          </a:p>
+          <a:p>
+            <a:pPr indent="0" marL="0">
               <a:spcAft>
-                <a:spcPts val="600"/>
+                <a:spcPts val="400"/>
               </a:spcAft>
-              <a:buSzPct val="100000"/>
-              <a:buChar char="•"/>
+              <a:buNone/>
+            </a:pPr>
+            <a:endParaRPr lang="en-US" sz="1300" dirty="0"/>
+          </a:p>
+          <a:p>
+            <a:pPr indent="0" marL="0">
+              <a:spcAft>
+                <a:spcPts val="400"/>
+              </a:spcAft>
+              <a:buNone/>
             </a:pPr>
             <a:r>
               <a:rPr lang="en-US" sz="1200" dirty="0">
@@ -10840,414 +11830,7 @@
                   <a:srgbClr val="FFFFFF"/>
                 </a:solidFill>
               </a:rPr>
-              <a:t>Replacement guarantee</a:t>
-            </a:r>
-            <a:endParaRPr lang="en-US" sz="1200" dirty="0"/>
-          </a:p>
-          <a:p>
-            <a:pPr marL="342900" indent="-342900">
-              <a:spcAft>
-                <a:spcPts val="600"/>
-              </a:spcAft>
-              <a:buSzPct val="100000"/>
-              <a:buChar char="•"/>
-            </a:pPr>
-            <a:r>
-              <a:rPr lang="en-US" sz="1200" dirty="0">
-                <a:solidFill>
-                  <a:srgbClr val="FFFFFF"/>
-                </a:solidFill>
-              </a:rPr>
-              <a:t>Compliance coordination for cleared legs</a:t>
-            </a:r>
-            <a:endParaRPr lang="en-US" sz="1200" dirty="0"/>
-          </a:p>
-          <a:p>
-            <a:pPr marL="342900" indent="-342900">
-              <a:spcAft>
-                <a:spcPts val="600"/>
-              </a:spcAft>
-              <a:buSzPct val="100000"/>
-              <a:buChar char="•"/>
-            </a:pPr>
-            <a:r>
-              <a:rPr lang="en-US" sz="1200" dirty="0">
-                <a:solidFill>
-                  <a:srgbClr val="FFFFFF"/>
-                </a:solidFill>
-              </a:rPr>
-              <a:t>Staff-owned record</a:t>
-            </a:r>
-            <a:endParaRPr lang="en-US" sz="1200" dirty="0"/>
-          </a:p>
-        </p:txBody>
-      </p:sp>
-      <p:sp>
-        <p:nvSpPr>
-          <p:cNvPr id="8" name="Shape 6"/>
-          <p:cNvSpPr/>
-          <p:nvPr/>
-        </p:nvSpPr>
-        <p:spPr>
-          <a:xfrm>
-            <a:off x="4288536" y="1783080"/>
-            <a:ext cx="3611880" cy="3520440"/>
-          </a:xfrm>
-          <a:prstGeom prst="rect">
-            <a:avLst/>
-          </a:prstGeom>
-          <a:solidFill>
-            <a:srgbClr val="F6F7FA"/>
-          </a:solidFill>
-          <a:ln w="12700">
-            <a:solidFill>
-              <a:srgbClr val="F6F7FA"/>
-            </a:solidFill>
-            <a:prstDash val="solid"/>
-          </a:ln>
-        </p:spPr>
-      </p:sp>
-      <p:sp>
-        <p:nvSpPr>
-          <p:cNvPr id="9" name="Text 7"/>
-          <p:cNvSpPr txBox="1"/>
-          <p:nvPr/>
-        </p:nvSpPr>
-        <p:spPr>
-          <a:xfrm>
-            <a:off x="4471416" y="1874520"/>
-            <a:ext cx="3246120" cy="411480"/>
-          </a:xfrm>
-          <a:prstGeom prst="rect">
-            <a:avLst/>
-          </a:prstGeom>
-          <a:noFill/>
-          <a:ln/>
-        </p:spPr>
-        <p:txBody>
-          <a:bodyPr wrap="square" lIns="0" tIns="0" rIns="0" bIns="0" rtlCol="0" anchor="ctr"/>
-          <a:lstStyle/>
-          <a:p>
-            <a:pPr indent="0" marL="0">
-              <a:buNone/>
-            </a:pPr>
-            <a:r>
-              <a:rPr lang="en-US" sz="1500" b="1" dirty="0">
-                <a:solidFill>
-                  <a:srgbClr val="1B2A5C"/>
-                </a:solidFill>
-              </a:rPr>
-              <a:t>Premiums</a:t>
-            </a:r>
-            <a:endParaRPr lang="en-US" sz="1500" dirty="0"/>
-          </a:p>
-        </p:txBody>
-      </p:sp>
-      <p:sp>
-        <p:nvSpPr>
-          <p:cNvPr id="10" name="Text 8"/>
-          <p:cNvSpPr txBox="1"/>
-          <p:nvPr/>
-        </p:nvSpPr>
-        <p:spPr>
-          <a:xfrm>
-            <a:off x="4471416" y="2377440"/>
-            <a:ext cx="3246120" cy="2834640"/>
-          </a:xfrm>
-          <a:prstGeom prst="rect">
-            <a:avLst/>
-          </a:prstGeom>
-          <a:noFill/>
-          <a:ln/>
-        </p:spPr>
-        <p:txBody>
-          <a:bodyPr wrap="square" lIns="0" tIns="0" rIns="0" bIns="0" rtlCol="0" anchor="t"/>
-          <a:lstStyle/>
-          <a:p>
-            <a:pPr marL="342900" indent="-342900">
-              <a:spcAft>
-                <a:spcPts val="600"/>
-              </a:spcAft>
-              <a:buSzPct val="100000"/>
-              <a:buChar char="•"/>
-            </a:pPr>
-            <a:r>
-              <a:rPr lang="en-US" sz="1200" dirty="0">
-                <a:solidFill>
-                  <a:srgbClr val="222222"/>
-                </a:solidFill>
-              </a:rPr>
-              <a:t>Faster response: 72 h or 24 h</a:t>
-            </a:r>
-            <a:endParaRPr lang="en-US" sz="1200" dirty="0"/>
-          </a:p>
-          <a:p>
-            <a:pPr marL="342900" indent="-342900">
-              <a:spcAft>
-                <a:spcPts val="600"/>
-              </a:spcAft>
-              <a:buSzPct val="100000"/>
-              <a:buChar char="•"/>
-            </a:pPr>
-            <a:r>
-              <a:rPr lang="en-US" sz="1200" dirty="0">
-                <a:solidFill>
-                  <a:srgbClr val="222222"/>
-                </a:solidFill>
-              </a:rPr>
-              <a:t>Dedicated reliever</a:t>
-            </a:r>
-            <a:endParaRPr lang="en-US" sz="1200" dirty="0"/>
-          </a:p>
-          <a:p>
-            <a:pPr marL="342900" indent="-342900">
-              <a:spcAft>
-                <a:spcPts val="600"/>
-              </a:spcAft>
-              <a:buSzPct val="100000"/>
-              <a:buChar char="•"/>
-            </a:pPr>
-            <a:r>
-              <a:rPr lang="en-US" sz="1200" dirty="0">
-                <a:solidFill>
-                  <a:srgbClr val="222222"/>
-                </a:solidFill>
-              </a:rPr>
-              <a:t>Extra jurisdictions at partner cost</a:t>
-            </a:r>
-            <a:endParaRPr lang="en-US" sz="1200" dirty="0"/>
-          </a:p>
-          <a:p>
-            <a:pPr marL="342900" indent="-342900">
-              <a:spcAft>
-                <a:spcPts val="600"/>
-              </a:spcAft>
-              <a:buSzPct val="100000"/>
-              <a:buChar char="•"/>
-            </a:pPr>
-            <a:r>
-              <a:rPr lang="en-US" sz="1200" dirty="0">
-                <a:solidFill>
-                  <a:srgbClr val="222222"/>
-                </a:solidFill>
-              </a:rPr>
-              <a:t>Peak-season cover</a:t>
-            </a:r>
-            <a:endParaRPr lang="en-US" sz="1200" dirty="0"/>
-          </a:p>
-        </p:txBody>
-      </p:sp>
-      <p:sp>
-        <p:nvSpPr>
-          <p:cNvPr id="11" name="Shape 9"/>
-          <p:cNvSpPr/>
-          <p:nvPr/>
-        </p:nvSpPr>
-        <p:spPr>
-          <a:xfrm>
-            <a:off x="8028432" y="1783080"/>
-            <a:ext cx="3611880" cy="3520440"/>
-          </a:xfrm>
-          <a:prstGeom prst="rect">
-            <a:avLst/>
-          </a:prstGeom>
-          <a:solidFill>
-            <a:srgbClr val="B7C6DE"/>
-          </a:solidFill>
-          <a:ln w="12700">
-            <a:solidFill>
-              <a:srgbClr val="B7C6DE"/>
-            </a:solidFill>
-            <a:prstDash val="solid"/>
-          </a:ln>
-        </p:spPr>
-      </p:sp>
-      <p:sp>
-        <p:nvSpPr>
-          <p:cNvPr id="12" name="Text 10"/>
-          <p:cNvSpPr txBox="1"/>
-          <p:nvPr/>
-        </p:nvSpPr>
-        <p:spPr>
-          <a:xfrm>
-            <a:off x="8211312" y="1874520"/>
-            <a:ext cx="3246120" cy="411480"/>
-          </a:xfrm>
-          <a:prstGeom prst="rect">
-            <a:avLst/>
-          </a:prstGeom>
-          <a:noFill/>
-          <a:ln/>
-        </p:spPr>
-        <p:txBody>
-          <a:bodyPr wrap="square" lIns="0" tIns="0" rIns="0" bIns="0" rtlCol="0" anchor="ctr"/>
-          <a:lstStyle/>
-          <a:p>
-            <a:pPr indent="0" marL="0">
-              <a:buNone/>
-            </a:pPr>
-            <a:r>
-              <a:rPr lang="en-US" sz="1500" b="1" dirty="0">
-                <a:solidFill>
-                  <a:srgbClr val="1B2A5C"/>
-                </a:solidFill>
-              </a:rPr>
-              <a:t>Discounts</a:t>
-            </a:r>
-            <a:endParaRPr lang="en-US" sz="1500" dirty="0"/>
-          </a:p>
-        </p:txBody>
-      </p:sp>
-      <p:sp>
-        <p:nvSpPr>
-          <p:cNvPr id="13" name="Text 11"/>
-          <p:cNvSpPr txBox="1"/>
-          <p:nvPr/>
-        </p:nvSpPr>
-        <p:spPr>
-          <a:xfrm>
-            <a:off x="8211312" y="2377440"/>
-            <a:ext cx="3246120" cy="2834640"/>
-          </a:xfrm>
-          <a:prstGeom prst="rect">
-            <a:avLst/>
-          </a:prstGeom>
-          <a:noFill/>
-          <a:ln/>
-        </p:spPr>
-        <p:txBody>
-          <a:bodyPr wrap="square" lIns="0" tIns="0" rIns="0" bIns="0" rtlCol="0" anchor="t"/>
-          <a:lstStyle/>
-          <a:p>
-            <a:pPr marL="342900" indent="-342900">
-              <a:spcAft>
-                <a:spcPts val="600"/>
-              </a:spcAft>
-              <a:buSzPct val="100000"/>
-              <a:buChar char="•"/>
-            </a:pPr>
-            <a:r>
-              <a:rPr lang="en-US" sz="1200" dirty="0">
-                <a:solidFill>
-                  <a:srgbClr val="222222"/>
-                </a:solidFill>
-              </a:rPr>
-              <a:t>12-month travel calendar</a:t>
-            </a:r>
-            <a:endParaRPr lang="en-US" sz="1200" dirty="0"/>
-          </a:p>
-          <a:p>
-            <a:pPr marL="342900" indent="-342900">
-              <a:spcAft>
-                <a:spcPts val="600"/>
-              </a:spcAft>
-              <a:buSzPct val="100000"/>
-              <a:buChar char="•"/>
-            </a:pPr>
-            <a:r>
-              <a:rPr lang="en-US" sz="1200" dirty="0">
-                <a:solidFill>
-                  <a:srgbClr val="222222"/>
-                </a:solidFill>
-              </a:rPr>
-              <a:t>90 days’ notice</a:t>
-            </a:r>
-            <a:endParaRPr lang="en-US" sz="1200" dirty="0"/>
-          </a:p>
-          <a:p>
-            <a:pPr marL="342900" indent="-342900">
-              <a:spcAft>
-                <a:spcPts val="600"/>
-              </a:spcAft>
-              <a:buSzPct val="100000"/>
-              <a:buChar char="•"/>
-            </a:pPr>
-            <a:r>
-              <a:rPr lang="en-US" sz="1200" dirty="0">
-                <a:solidFill>
-                  <a:srgbClr val="222222"/>
-                </a:solidFill>
-              </a:rPr>
-              <a:t>Billing in advance</a:t>
-            </a:r>
-            <a:endParaRPr lang="en-US" sz="1200" dirty="0"/>
-          </a:p>
-          <a:p>
-            <a:pPr marL="342900" indent="-342900">
-              <a:spcAft>
-                <a:spcPts val="600"/>
-              </a:spcAft>
-              <a:buSzPct val="100000"/>
-              <a:buChar char="•"/>
-            </a:pPr>
-            <a:r>
-              <a:rPr lang="en-US" sz="1200" dirty="0">
-                <a:solidFill>
-                  <a:srgbClr val="222222"/>
-                </a:solidFill>
-              </a:rPr>
-              <a:t>Multi-year contract; referrals</a:t>
-            </a:r>
-            <a:endParaRPr lang="en-US" sz="1200" dirty="0"/>
-          </a:p>
-        </p:txBody>
-      </p:sp>
-      <p:sp>
-        <p:nvSpPr>
-          <p:cNvPr id="14" name="callout"/>
-          <p:cNvSpPr/>
-          <p:nvPr/>
-        </p:nvSpPr>
-        <p:spPr>
-          <a:xfrm>
-            <a:off x="548640" y="5486400"/>
-            <a:ext cx="11091672" cy="457200"/>
-          </a:xfrm>
-          <a:prstGeom prst="rect">
-            <a:avLst/>
-          </a:prstGeom>
-          <a:solidFill>
-            <a:srgbClr val="EEF1F7"/>
-          </a:solidFill>
-          <a:ln w="12700">
-            <a:solidFill>
-              <a:srgbClr val="EEF1F7"/>
-            </a:solidFill>
-            <a:prstDash val="solid"/>
-          </a:ln>
-        </p:spPr>
-      </p:sp>
-      <p:sp>
-        <p:nvSpPr>
-          <p:cNvPr id="15" name="Text 13"/>
-          <p:cNvSpPr txBox="1"/>
-          <p:nvPr/>
-        </p:nvSpPr>
-        <p:spPr>
-          <a:xfrm>
-            <a:off x="731520" y="5486400"/>
-            <a:ext cx="10789920" cy="457200"/>
-          </a:xfrm>
-          <a:prstGeom prst="rect">
-            <a:avLst/>
-          </a:prstGeom>
-          <a:noFill/>
-          <a:ln/>
-        </p:spPr>
-        <p:txBody>
-          <a:bodyPr wrap="square" lIns="0" tIns="0" rIns="0" bIns="0" rtlCol="0" anchor="ctr"/>
-          <a:lstStyle/>
-          <a:p>
-            <a:pPr indent="0" marL="0">
-              <a:buNone/>
-            </a:pPr>
-            <a:r>
-              <a:rPr lang="en-US" sz="1300" b="1" dirty="0">
-                <a:solidFill>
-                  <a:srgbClr val="1B2A5C"/>
-                </a:solidFill>
-              </a:rPr>
-              <a:t>Break-even: £30.6–31.4k per position-year at 15 positions — the target for year 3 (CALC).</a:t>
+              <a:t>Our defence: partner with them — white-label staff and compliance — and stay where they cannot: the family’s own staff, legal status and private access.</a:t>
             </a:r>
             <a:endParaRPr lang="en-US" sz="1300" dirty="0"/>
           </a:p>
@@ -11355,7 +11938,7 @@
                   <a:schemeClr val="accent4"/>
                 </a:solidFill>
               </a:rPr>
-              <a:t>UNIT ECONOMICS</a:t>
+              <a:t>BUSINESS MODEL</a:t>
             </a:r>
             <a:endParaRPr lang="en-US" sz="1000" dirty="0"/>
           </a:p>
@@ -11393,7 +11976,7 @@
                   <a:schemeClr val="tx2"/>
                 </a:solidFill>
               </a:rPr>
-              <a:t>The economics hinge on one number: what families pay for guaranteed, lawful cover — our 90-day test measures it</a:t>
+              <a:t>Three revenue lines on one family: a membership, a take rate on bookings and a fee per staff position</a:t>
             </a:r>
             <a:endParaRPr lang="en-US" sz="2200" dirty="0"/>
           </a:p>
@@ -11429,7 +12012,7 @@
                   <a:srgbClr val="6B6B6B"/>
                 </a:solidFill>
               </a:rPr>
-              <a:t>Source: research/fmo_strategy.md §5.3–5.5 (CALC, £ per position-year, 5 positions per reliever); temp rate from one ad (weak); assistant hours are an assumption.</a:t>
+              <a:t>Source: Benchmarks: platform fees 16–30% (Brazil 2026; Italy, Direzione Hotel); merchant model from our earlier Southern Italy model; advisor commissions ~10–12%; agency fees 15–25%. Levels are assumptions until the trade-off interviews; staff break-even is CALC (research/fmo_strategy.md).</a:t>
             </a:r>
             <a:endParaRPr lang="en-US" sz="850" dirty="0"/>
           </a:p>
@@ -11437,64 +12020,334 @@
       </p:sp>
       <p:sp>
         <p:nvSpPr>
-          <p:cNvPr id="5" name="Text 3"/>
+          <p:cNvPr id="5" name="Shape 3"/>
+          <p:cNvSpPr/>
+          <p:nvPr/>
+        </p:nvSpPr>
+        <p:spPr>
+          <a:xfrm>
+            <a:off x="548640" y="1783080"/>
+            <a:ext cx="3611880" cy="3520440"/>
+          </a:xfrm>
+          <a:prstGeom prst="rect">
+            <a:avLst/>
+          </a:prstGeom>
+          <a:solidFill>
+            <a:srgbClr val="1B2A5C"/>
+          </a:solidFill>
+          <a:ln w="12700">
+            <a:solidFill>
+              <a:srgbClr val="1B2A5C"/>
+            </a:solidFill>
+            <a:prstDash val="solid"/>
+          </a:ln>
+        </p:spPr>
+      </p:sp>
+      <p:sp>
+        <p:nvSpPr>
+          <p:cNvPr id="6" name="Text 4"/>
           <p:cNvSpPr txBox="1"/>
           <p:nvPr/>
         </p:nvSpPr>
         <p:spPr>
           <a:xfrm>
-            <a:off x="548640" y="1874520"/>
-            <a:ext cx="2560320" cy="731520"/>
-          </a:xfrm>
-          <a:prstGeom prst="rect">
-            <a:avLst/>
-          </a:prstGeom>
-          <a:noFill/>
-          <a:ln/>
-        </p:spPr>
-        <p:txBody>
-          <a:bodyPr wrap="square" lIns="0" tIns="0" rIns="0" bIns="0" rtlCol="0" anchor="ctr"/>
-          <a:lstStyle/>
-          <a:p>
-            <a:pPr indent="0" marL="0">
-              <a:buNone/>
-            </a:pPr>
-            <a:r>
-              <a:rPr lang="en-US" sz="1200" b="1" dirty="0">
+            <a:off x="731520" y="1874520"/>
+            <a:ext cx="3246120" cy="1005840"/>
+          </a:xfrm>
+          <a:prstGeom prst="rect">
+            <a:avLst/>
+          </a:prstGeom>
+          <a:noFill/>
+          <a:ln/>
+        </p:spPr>
+        <p:txBody>
+          <a:bodyPr wrap="square" lIns="0" tIns="0" rIns="0" bIns="0" rtlCol="0" anchor="t"/>
+          <a:lstStyle/>
+          <a:p>
+            <a:pPr indent="0" marL="0">
+              <a:buNone/>
+            </a:pPr>
+            <a:r>
+              <a:rPr lang="en-US" sz="1400" b="1" dirty="0">
+                <a:solidFill>
+                  <a:srgbClr val="C9A24B"/>
+                </a:solidFill>
+              </a:rPr>
+              <a:t>Household membership</a:t>
+            </a:r>
+            <a:endParaRPr lang="en-US" sz="1400" dirty="0"/>
+          </a:p>
+          <a:p>
+            <a:pPr indent="0" marL="0">
+              <a:buNone/>
+            </a:pPr>
+            <a:r>
+              <a:rPr lang="en-US" sz="2200" b="1" dirty="0">
+                <a:solidFill>
+                  <a:srgbClr val="FFFFFF"/>
+                </a:solidFill>
+              </a:rPr>
+              <a:t>Per family, per year</a:t>
+            </a:r>
+            <a:endParaRPr lang="en-US" sz="1400" dirty="0"/>
+          </a:p>
+        </p:txBody>
+      </p:sp>
+      <p:sp>
+        <p:nvSpPr>
+          <p:cNvPr id="7" name="Text 5"/>
+          <p:cNvSpPr txBox="1"/>
+          <p:nvPr/>
+        </p:nvSpPr>
+        <p:spPr>
+          <a:xfrm>
+            <a:off x="731520" y="2971800"/>
+            <a:ext cx="3246120" cy="2240280"/>
+          </a:xfrm>
+          <a:prstGeom prst="rect">
+            <a:avLst/>
+          </a:prstGeom>
+          <a:noFill/>
+          <a:ln/>
+        </p:spPr>
+        <p:txBody>
+          <a:bodyPr wrap="square" lIns="0" tIns="0" rIns="0" bIns="0" rtlCol="0" anchor="t"/>
+          <a:lstStyle/>
+          <a:p>
+            <a:pPr marL="342900" indent="-342900">
+              <a:spcAft>
+                <a:spcPts val="600"/>
+              </a:spcAft>
+              <a:buSzPct val="100000"/>
+              <a:buChar char="•"/>
+            </a:pPr>
+            <a:r>
+              <a:rPr lang="en-US" sz="1150" dirty="0">
+                <a:solidFill>
+                  <a:srgbClr val="FFFFFF"/>
+                </a:solidFill>
+              </a:rPr>
+              <a:t>Fixed fee that captures surplus</a:t>
+            </a:r>
+            <a:endParaRPr lang="en-US" sz="1150" dirty="0"/>
+          </a:p>
+          <a:p>
+            <a:pPr marL="342900" indent="-342900">
+              <a:spcAft>
+                <a:spcPts val="600"/>
+              </a:spcAft>
+              <a:buSzPct val="100000"/>
+              <a:buChar char="•"/>
+            </a:pPr>
+            <a:r>
+              <a:rPr lang="en-US" sz="1150" dirty="0">
+                <a:solidFill>
+                  <a:srgbClr val="FFFFFF"/>
+                </a:solidFill>
+              </a:rPr>
+              <a:t>Access to all modules</a:t>
+            </a:r>
+            <a:endParaRPr lang="en-US" sz="1150" dirty="0"/>
+          </a:p>
+          <a:p>
+            <a:pPr marL="342900" indent="-342900">
+              <a:spcAft>
+                <a:spcPts val="600"/>
+              </a:spcAft>
+              <a:buSzPct val="100000"/>
+              <a:buChar char="•"/>
+            </a:pPr>
+            <a:r>
+              <a:rPr lang="en-US" sz="1150" dirty="0">
+                <a:solidFill>
+                  <a:srgbClr val="FFFFFF"/>
+                </a:solidFill>
+              </a:rPr>
+              <a:t>Set by trade-off interviews</a:t>
+            </a:r>
+            <a:endParaRPr lang="en-US" sz="1150" dirty="0"/>
+          </a:p>
+        </p:txBody>
+      </p:sp>
+      <p:sp>
+        <p:nvSpPr>
+          <p:cNvPr id="8" name="Shape 6"/>
+          <p:cNvSpPr/>
+          <p:nvPr/>
+        </p:nvSpPr>
+        <p:spPr>
+          <a:xfrm>
+            <a:off x="4288536" y="1783080"/>
+            <a:ext cx="3611880" cy="3520440"/>
+          </a:xfrm>
+          <a:prstGeom prst="rect">
+            <a:avLst/>
+          </a:prstGeom>
+          <a:solidFill>
+            <a:srgbClr val="F6F7FA"/>
+          </a:solidFill>
+          <a:ln w="12700">
+            <a:solidFill>
+              <a:srgbClr val="F6F7FA"/>
+            </a:solidFill>
+            <a:prstDash val="solid"/>
+          </a:ln>
+        </p:spPr>
+      </p:sp>
+      <p:sp>
+        <p:nvSpPr>
+          <p:cNvPr id="9" name="Text 7"/>
+          <p:cNvSpPr txBox="1"/>
+          <p:nvPr/>
+        </p:nvSpPr>
+        <p:spPr>
+          <a:xfrm>
+            <a:off x="4471416" y="1874520"/>
+            <a:ext cx="3246120" cy="1005840"/>
+          </a:xfrm>
+          <a:prstGeom prst="rect">
+            <a:avLst/>
+          </a:prstGeom>
+          <a:noFill/>
+          <a:ln/>
+        </p:spPr>
+        <p:txBody>
+          <a:bodyPr wrap="square" lIns="0" tIns="0" rIns="0" bIns="0" rtlCol="0" anchor="t"/>
+          <a:lstStyle/>
+          <a:p>
+            <a:pPr indent="0" marL="0">
+              <a:buNone/>
+            </a:pPr>
+            <a:r>
+              <a:rPr lang="en-US" sz="1400" b="1" dirty="0">
                 <a:solidFill>
                   <a:srgbClr val="1B2A5C"/>
                 </a:solidFill>
               </a:rPr>
-              <a:t>What families can save today</a:t>
-            </a:r>
-            <a:endParaRPr lang="en-US" sz="1200" dirty="0"/>
-          </a:p>
-          <a:p>
-            <a:pPr indent="0" marL="0">
-              <a:buNone/>
-            </a:pPr>
-            <a:r>
-              <a:rPr lang="en-US" sz="950" dirty="0">
-                <a:solidFill>
-                  <a:srgbClr val="6B6B6B"/>
-                </a:solidFill>
-              </a:rPr>
-              <a:t>Temps + assistant time</a:t>
-            </a:r>
-            <a:endParaRPr lang="en-US" sz="1200" dirty="0"/>
-          </a:p>
-        </p:txBody>
-      </p:sp>
-      <p:sp>
-        <p:nvSpPr>
-          <p:cNvPr id="6" name="Shape 4"/>
+              <a:t>Take rate on bookings</a:t>
+            </a:r>
+            <a:endParaRPr lang="en-US" sz="1400" dirty="0"/>
+          </a:p>
+          <a:p>
+            <a:pPr indent="0" marL="0">
+              <a:buNone/>
+            </a:pPr>
+            <a:r>
+              <a:rPr lang="en-US" sz="2200" b="1" dirty="0">
+                <a:solidFill>
+                  <a:srgbClr val="222222"/>
+                </a:solidFill>
+              </a:rPr>
+              <a:t>10–15% (assumption)</a:t>
+            </a:r>
+            <a:endParaRPr lang="en-US" sz="1400" dirty="0"/>
+          </a:p>
+        </p:txBody>
+      </p:sp>
+      <p:sp>
+        <p:nvSpPr>
+          <p:cNvPr id="10" name="Text 8"/>
+          <p:cNvSpPr txBox="1"/>
+          <p:nvPr/>
+        </p:nvSpPr>
+        <p:spPr>
+          <a:xfrm>
+            <a:off x="4471416" y="2971800"/>
+            <a:ext cx="3246120" cy="2240280"/>
+          </a:xfrm>
+          <a:prstGeom prst="rect">
+            <a:avLst/>
+          </a:prstGeom>
+          <a:noFill/>
+          <a:ln/>
+        </p:spPr>
+        <p:txBody>
+          <a:bodyPr wrap="square" lIns="0" tIns="0" rIns="0" bIns="0" rtlCol="0" anchor="t"/>
+          <a:lstStyle/>
+          <a:p>
+            <a:pPr marL="342900" indent="-342900">
+              <a:spcAft>
+                <a:spcPts val="600"/>
+              </a:spcAft>
+              <a:buSzPct val="100000"/>
+              <a:buChar char="•"/>
+            </a:pPr>
+            <a:r>
+              <a:rPr lang="en-US" sz="1150" dirty="0">
+                <a:solidFill>
+                  <a:srgbClr val="222222"/>
+                </a:solidFill>
+              </a:rPr>
+              <a:t>Paid by suppliers, only on completed stays</a:t>
+            </a:r>
+            <a:endParaRPr lang="en-US" sz="1150" dirty="0"/>
+          </a:p>
+          <a:p>
+            <a:pPr marL="342900" indent="-342900">
+              <a:spcAft>
+                <a:spcPts val="600"/>
+              </a:spcAft>
+              <a:buSzPct val="100000"/>
+              <a:buChar char="•"/>
+            </a:pPr>
+            <a:r>
+              <a:rPr lang="en-US" sz="1150" dirty="0">
+                <a:solidFill>
+                  <a:srgbClr val="222222"/>
+                </a:solidFill>
+              </a:rPr>
+              <a:t>Below platforms’ 16–30%</a:t>
+            </a:r>
+            <a:endParaRPr lang="en-US" sz="1150" dirty="0"/>
+          </a:p>
+          <a:p>
+            <a:pPr marL="342900" indent="-342900">
+              <a:spcAft>
+                <a:spcPts val="600"/>
+              </a:spcAft>
+              <a:buSzPct val="100000"/>
+              <a:buChar char="•"/>
+            </a:pPr>
+            <a:r>
+              <a:rPr lang="en-US" sz="1150" dirty="0">
+                <a:solidFill>
+                  <a:srgbClr val="222222"/>
+                </a:solidFill>
+              </a:rPr>
+              <a:t>€2.4–3.6k on a €24k family trip (CALC)</a:t>
+            </a:r>
+            <a:endParaRPr lang="en-US" sz="1150" dirty="0"/>
+          </a:p>
+          <a:p>
+            <a:pPr marL="342900" indent="-342900">
+              <a:spcAft>
+                <a:spcPts val="600"/>
+              </a:spcAft>
+              <a:buSzPct val="100000"/>
+              <a:buChar char="•"/>
+            </a:pPr>
+            <a:r>
+              <a:rPr lang="en-US" sz="1150" dirty="0">
+                <a:solidFill>
+                  <a:srgbClr val="222222"/>
+                </a:solidFill>
+              </a:rPr>
+              <a:t>Or one price: 30% markup on net cost, VAT on the margin only</a:t>
+            </a:r>
+            <a:endParaRPr lang="en-US" sz="1150" dirty="0"/>
+          </a:p>
+        </p:txBody>
+      </p:sp>
+      <p:sp>
+        <p:nvSpPr>
+          <p:cNvPr id="11" name="Shape 9"/>
           <p:cNvSpPr/>
           <p:nvPr/>
         </p:nvSpPr>
         <p:spPr>
           <a:xfrm>
-            <a:off x="3200400" y="1984248"/>
-            <a:ext cx="3127248" cy="512064"/>
+            <a:off x="8028432" y="1783080"/>
+            <a:ext cx="3611880" cy="3520440"/>
           </a:xfrm>
           <a:prstGeom prst="rect">
             <a:avLst/>
@@ -11512,110 +12365,150 @@
       </p:sp>
       <p:sp>
         <p:nvSpPr>
-          <p:cNvPr id="7" name="Text 5"/>
+          <p:cNvPr id="12" name="Text 10"/>
           <p:cNvSpPr txBox="1"/>
           <p:nvPr/>
         </p:nvSpPr>
         <p:spPr>
           <a:xfrm>
-            <a:off x="3291840" y="1984248"/>
-            <a:ext cx="1828800" cy="512064"/>
-          </a:xfrm>
-          <a:prstGeom prst="rect">
-            <a:avLst/>
-          </a:prstGeom>
-          <a:noFill/>
-          <a:ln/>
-        </p:spPr>
-        <p:txBody>
-          <a:bodyPr wrap="square" lIns="0" tIns="0" rIns="0" bIns="0" rtlCol="0" anchor="ctr"/>
-          <a:lstStyle/>
-          <a:p>
-            <a:pPr indent="0" marL="0">
-              <a:buNone/>
-            </a:pPr>
-            <a:r>
-              <a:rPr lang="en-US" sz="1300" b="1" dirty="0">
-                <a:solidFill>
-                  <a:srgbClr val="222222"/>
-                </a:solidFill>
-              </a:rPr>
-              <a:t>£11.5–17.0k</a:t>
-            </a:r>
-            <a:endParaRPr lang="en-US" sz="1300" dirty="0"/>
-          </a:p>
-        </p:txBody>
-      </p:sp>
-      <p:sp>
-        <p:nvSpPr>
-          <p:cNvPr id="8" name="Text 6"/>
+            <a:off x="8211312" y="1874520"/>
+            <a:ext cx="3246120" cy="1005840"/>
+          </a:xfrm>
+          <a:prstGeom prst="rect">
+            <a:avLst/>
+          </a:prstGeom>
+          <a:noFill/>
+          <a:ln/>
+        </p:spPr>
+        <p:txBody>
+          <a:bodyPr wrap="square" lIns="0" tIns="0" rIns="0" bIns="0" rtlCol="0" anchor="t"/>
+          <a:lstStyle/>
+          <a:p>
+            <a:pPr indent="0" marL="0">
+              <a:buNone/>
+            </a:pPr>
+            <a:r>
+              <a:rPr lang="en-US" sz="1400" b="1" dirty="0">
+                <a:solidFill>
+                  <a:srgbClr val="1B2A5C"/>
+                </a:solidFill>
+              </a:rPr>
+              <a:t>Staff + compliance</a:t>
+            </a:r>
+            <a:endParaRPr lang="en-US" sz="1400" dirty="0"/>
+          </a:p>
+          <a:p>
+            <a:pPr indent="0" marL="0">
+              <a:buNone/>
+            </a:pPr>
+            <a:r>
+              <a:rPr lang="en-US" sz="2200" b="1" dirty="0">
+                <a:solidFill>
+                  <a:srgbClr val="1B2A5C"/>
+                </a:solidFill>
+              </a:rPr>
+              <a:t>Per position-year</a:t>
+            </a:r>
+            <a:endParaRPr lang="en-US" sz="1400" dirty="0"/>
+          </a:p>
+        </p:txBody>
+      </p:sp>
+      <p:sp>
+        <p:nvSpPr>
+          <p:cNvPr id="13" name="Text 11"/>
           <p:cNvSpPr txBox="1"/>
           <p:nvPr/>
         </p:nvSpPr>
         <p:spPr>
           <a:xfrm>
-            <a:off x="548640" y="2788920"/>
-            <a:ext cx="2560320" cy="731520"/>
-          </a:xfrm>
-          <a:prstGeom prst="rect">
-            <a:avLst/>
-          </a:prstGeom>
-          <a:noFill/>
-          <a:ln/>
-        </p:spPr>
-        <p:txBody>
-          <a:bodyPr wrap="square" lIns="0" tIns="0" rIns="0" bIns="0" rtlCol="0" anchor="ctr"/>
-          <a:lstStyle/>
-          <a:p>
-            <a:pPr indent="0" marL="0">
-              <a:buNone/>
-            </a:pPr>
-            <a:r>
-              <a:rPr lang="en-US" sz="1200" b="1" dirty="0">
+            <a:off x="8211312" y="2971800"/>
+            <a:ext cx="3246120" cy="2240280"/>
+          </a:xfrm>
+          <a:prstGeom prst="rect">
+            <a:avLst/>
+          </a:prstGeom>
+          <a:noFill/>
+          <a:ln/>
+        </p:spPr>
+        <p:txBody>
+          <a:bodyPr wrap="square" lIns="0" tIns="0" rIns="0" bIns="0" rtlCol="0" anchor="t"/>
+          <a:lstStyle/>
+          <a:p>
+            <a:pPr marL="342900" indent="-342900">
+              <a:spcAft>
+                <a:spcPts val="600"/>
+              </a:spcAft>
+              <a:buSzPct val="100000"/>
+              <a:buChar char="•"/>
+            </a:pPr>
+            <a:r>
+              <a:rPr lang="en-US" sz="1150" dirty="0">
                 <a:solidFill>
                   <a:srgbClr val="1B2A5C"/>
                 </a:solidFill>
               </a:rPr>
-              <a:t>Our cost per position</a:t>
-            </a:r>
-            <a:endParaRPr lang="en-US" sz="1200" dirty="0"/>
-          </a:p>
-          <a:p>
-            <a:pPr indent="0" marL="0">
-              <a:buNone/>
-            </a:pPr>
-            <a:r>
-              <a:rPr lang="en-US" sz="950" dirty="0">
-                <a:solidFill>
-                  <a:srgbClr val="6B6B6B"/>
-                </a:solidFill>
-              </a:rPr>
-              <a:t>Reliever, employer, recruiting, capital</a:t>
-            </a:r>
-            <a:endParaRPr lang="en-US" sz="1200" dirty="0"/>
-          </a:p>
-        </p:txBody>
-      </p:sp>
-      <p:sp>
-        <p:nvSpPr>
-          <p:cNvPr id="9" name="Shape 7"/>
+              <a:t>Break-even £30.6–31.4k at 15 positions (CALC)</a:t>
+            </a:r>
+            <a:endParaRPr lang="en-US" sz="1150" dirty="0"/>
+          </a:p>
+          <a:p>
+            <a:pPr marL="342900" indent="-342900">
+              <a:spcAft>
+                <a:spcPts val="600"/>
+              </a:spcAft>
+              <a:buSzPct val="100000"/>
+              <a:buChar char="•"/>
+            </a:pPr>
+            <a:r>
+              <a:rPr lang="en-US" sz="1150" dirty="0">
+                <a:solidFill>
+                  <a:srgbClr val="1B2A5C"/>
+                </a:solidFill>
+              </a:rPr>
+              <a:t>Premiums for speed and reach</a:t>
+            </a:r>
+            <a:endParaRPr lang="en-US" sz="1150" dirty="0"/>
+          </a:p>
+          <a:p>
+            <a:pPr marL="342900" indent="-342900">
+              <a:spcAft>
+                <a:spcPts val="600"/>
+              </a:spcAft>
+              <a:buSzPct val="100000"/>
+              <a:buChar char="•"/>
+            </a:pPr>
+            <a:r>
+              <a:rPr lang="en-US" sz="1150" dirty="0">
+                <a:solidFill>
+                  <a:srgbClr val="1B2A5C"/>
+                </a:solidFill>
+              </a:rPr>
+              <a:t>Discounts for notice and calendars</a:t>
+            </a:r>
+            <a:endParaRPr lang="en-US" sz="1150" dirty="0"/>
+          </a:p>
+        </p:txBody>
+      </p:sp>
+      <p:sp>
+        <p:nvSpPr>
+          <p:cNvPr id="14" name="callout"/>
           <p:cNvSpPr/>
           <p:nvPr/>
         </p:nvSpPr>
         <p:spPr>
           <a:xfrm>
-            <a:off x="3200400" y="2898648"/>
-            <a:ext cx="5486400" cy="512064"/>
+            <a:off x="548640" y="5486400"/>
+            <a:ext cx="11091672" cy="457200"/>
           </a:xfrm>
           <a:prstGeom prst="rect">
             <a:avLst/>
           </a:prstGeom>
           <a:solidFill>
-            <a:srgbClr val="C9A24B"/>
+            <a:srgbClr val="EEF1F7"/>
           </a:solidFill>
           <a:ln w="12700">
             <a:solidFill>
-              <a:srgbClr val="C9A24B"/>
+              <a:srgbClr val="EEF1F7"/>
             </a:solidFill>
             <a:prstDash val="solid"/>
           </a:ln>
@@ -11623,186 +12516,14 @@
       </p:sp>
       <p:sp>
         <p:nvSpPr>
-          <p:cNvPr id="10" name="Text 8"/>
-          <p:cNvSpPr txBox="1"/>
-          <p:nvPr/>
-        </p:nvSpPr>
-        <p:spPr>
-          <a:xfrm>
-            <a:off x="3291840" y="2898648"/>
-            <a:ext cx="1828800" cy="512064"/>
-          </a:xfrm>
-          <a:prstGeom prst="rect">
-            <a:avLst/>
-          </a:prstGeom>
-          <a:noFill/>
-          <a:ln/>
-        </p:spPr>
-        <p:txBody>
-          <a:bodyPr wrap="square" lIns="0" tIns="0" rIns="0" bIns="0" rtlCol="0" anchor="ctr"/>
-          <a:lstStyle/>
-          <a:p>
-            <a:pPr indent="0" marL="0">
-              <a:buNone/>
-            </a:pPr>
-            <a:r>
-              <a:rPr lang="en-US" sz="1300" b="1" dirty="0">
-                <a:solidFill>
-                  <a:srgbClr val="222222"/>
-                </a:solidFill>
-              </a:rPr>
-              <a:t>£24.6–25.4k</a:t>
-            </a:r>
-            <a:endParaRPr lang="en-US" sz="1300" dirty="0"/>
-          </a:p>
-        </p:txBody>
-      </p:sp>
-      <p:sp>
-        <p:nvSpPr>
-          <p:cNvPr id="11" name="Text 9"/>
-          <p:cNvSpPr txBox="1"/>
-          <p:nvPr/>
-        </p:nvSpPr>
-        <p:spPr>
-          <a:xfrm>
-            <a:off x="548640" y="3703320"/>
-            <a:ext cx="2560320" cy="731520"/>
-          </a:xfrm>
-          <a:prstGeom prst="rect">
-            <a:avLst/>
-          </a:prstGeom>
-          <a:noFill/>
-          <a:ln/>
-        </p:spPr>
-        <p:txBody>
-          <a:bodyPr wrap="square" lIns="0" tIns="0" rIns="0" bIns="0" rtlCol="0" anchor="ctr"/>
-          <a:lstStyle/>
-          <a:p>
-            <a:pPr indent="0" marL="0">
-              <a:buNone/>
-            </a:pPr>
-            <a:r>
-              <a:rPr lang="en-US" sz="1200" b="1" dirty="0">
-                <a:solidFill>
-                  <a:srgbClr val="1B2A5C"/>
-                </a:solidFill>
-              </a:rPr>
-              <a:t>Break-even fee, year 3</a:t>
-            </a:r>
-            <a:endParaRPr lang="en-US" sz="1200" dirty="0"/>
-          </a:p>
-          <a:p>
-            <a:pPr indent="0" marL="0">
-              <a:buNone/>
-            </a:pPr>
-            <a:r>
-              <a:rPr lang="en-US" sz="950" dirty="0">
-                <a:solidFill>
-                  <a:srgbClr val="6B6B6B"/>
-                </a:solidFill>
-              </a:rPr>
-              <a:t>15 positions incl. fixed costs</a:t>
-            </a:r>
-            <a:endParaRPr lang="en-US" sz="1200" dirty="0"/>
-          </a:p>
-        </p:txBody>
-      </p:sp>
-      <p:sp>
-        <p:nvSpPr>
-          <p:cNvPr id="12" name="Shape 10"/>
-          <p:cNvSpPr/>
-          <p:nvPr/>
-        </p:nvSpPr>
-        <p:spPr>
-          <a:xfrm>
-            <a:off x="3200400" y="3813048"/>
-            <a:ext cx="6803136" cy="512064"/>
-          </a:xfrm>
-          <a:prstGeom prst="rect">
-            <a:avLst/>
-          </a:prstGeom>
-          <a:solidFill>
-            <a:srgbClr val="1B2A5C"/>
-          </a:solidFill>
-          <a:ln w="12700">
-            <a:solidFill>
-              <a:srgbClr val="1B2A5C"/>
-            </a:solidFill>
-            <a:prstDash val="solid"/>
-          </a:ln>
-        </p:spPr>
-      </p:sp>
-      <p:sp>
-        <p:nvSpPr>
-          <p:cNvPr id="13" name="Text 11"/>
-          <p:cNvSpPr txBox="1"/>
-          <p:nvPr/>
-        </p:nvSpPr>
-        <p:spPr>
-          <a:xfrm>
-            <a:off x="3291840" y="3813048"/>
-            <a:ext cx="1828800" cy="512064"/>
-          </a:xfrm>
-          <a:prstGeom prst="rect">
-            <a:avLst/>
-          </a:prstGeom>
-          <a:noFill/>
-          <a:ln/>
-        </p:spPr>
-        <p:txBody>
-          <a:bodyPr wrap="square" lIns="0" tIns="0" rIns="0" bIns="0" rtlCol="0" anchor="ctr"/>
-          <a:lstStyle/>
-          <a:p>
-            <a:pPr indent="0" marL="0">
-              <a:buNone/>
-            </a:pPr>
-            <a:r>
-              <a:rPr lang="en-US" sz="1300" b="1" dirty="0">
-                <a:solidFill>
-                  <a:srgbClr val="FFFFFF"/>
-                </a:solidFill>
-              </a:rPr>
-              <a:t>£30.6–31.4k</a:t>
-            </a:r>
-            <a:endParaRPr lang="en-US" sz="1300" dirty="0"/>
-          </a:p>
-        </p:txBody>
-      </p:sp>
-      <p:sp>
-        <p:nvSpPr>
-          <p:cNvPr id="14" name="Shape 12"/>
-          <p:cNvSpPr/>
-          <p:nvPr/>
-        </p:nvSpPr>
-        <p:spPr>
-          <a:xfrm>
-            <a:off x="548640" y="4709160"/>
-            <a:ext cx="11091672" cy="868680"/>
-          </a:xfrm>
-          <a:prstGeom prst="rect">
-            <a:avLst/>
-          </a:prstGeom>
-          <a:solidFill>
-            <a:srgbClr val="1B2A5C"/>
-          </a:solidFill>
-          <a:ln w="12700">
-            <a:solidFill>
-              <a:srgbClr val="1B2A5C"/>
-            </a:solidFill>
-            <a:prstDash val="solid"/>
-          </a:ln>
-        </p:spPr>
-      </p:sp>
-      <p:sp>
-        <p:nvSpPr>
           <p:cNvPr id="15" name="Text 13"/>
           <p:cNvSpPr txBox="1"/>
           <p:nvPr/>
         </p:nvSpPr>
         <p:spPr>
           <a:xfrm>
-            <a:off x="731520" y="4709160"/>
-            <a:ext cx="10789920" cy="868680"/>
+            <a:off x="731520" y="5486400"/>
+            <a:ext cx="10789920" cy="457200"/>
           </a:xfrm>
           <a:prstGeom prst="rect">
             <a:avLst/>
@@ -11818,14 +12539,14 @@
               <a:buNone/>
             </a:pPr>
             <a:r>
-              <a:rPr lang="en-US" sz="1400" b="1" dirty="0">
-                <a:solidFill>
-                  <a:srgbClr val="FFFFFF"/>
-                </a:solidFill>
-              </a:rPr>
-              <a:t>The value we must prove: £13.6–19.9k per position-year for the guarantee, continuity and lawful status — about what families already pay staff to travel (£16.5–23.6k).</a:t>
-            </a:r>
-            <a:endParaRPr lang="en-US" sz="1400" dirty="0"/>
+              <a:rPr lang="en-US" sz="1300" b="1" dirty="0">
+                <a:solidFill>
+                  <a:srgbClr val="1B2A5C"/>
+                </a:solidFill>
+              </a:rPr>
+              <a:t>Opposite seasons — Italy Apr–Oct, Santa Catarina Dec–Mar — keep the same staff and the same families active all year.</a:t>
+            </a:r>
+            <a:endParaRPr lang="en-US" sz="1300" dirty="0"/>
           </a:p>
         </p:txBody>
       </p:sp>
